--- a/psychologicalReview/figures/actionParadigmFiguresTargetFindings4&5.pptx
+++ b/psychologicalReview/figures/actionParadigmFiguresTargetFindings4&5.pptx
@@ -2,7 +2,7 @@
 <file path=ppt/presentation.xml><?xml version="1.0" encoding="utf-8"?>
 <p:presentation xmlns:a="http://schemas.openxmlformats.org/drawingml/2006/main" xmlns:r="http://schemas.openxmlformats.org/officeDocument/2006/relationships" xmlns:p="http://schemas.openxmlformats.org/presentationml/2006/main" saveSubsetFonts="1">
   <p:sldMasterIdLst>
-    <p:sldMasterId id="2147483720" r:id="rId4"/>
+    <p:sldMasterId id="2147483744" r:id="rId4"/>
   </p:sldMasterIdLst>
   <p:notesMasterIdLst>
     <p:notesMasterId r:id="rId8"/>
@@ -12,7 +12,7 @@
     <p:sldId id="257" r:id="rId6"/>
     <p:sldId id="258" r:id="rId7"/>
   </p:sldIdLst>
-  <p:sldSz cx="50399950" cy="21599525"/>
+  <p:sldSz cx="50399950" cy="15636875"/>
   <p:notesSz cx="6858000" cy="9144000"/>
   <p:defaultTextStyle>
     <a:defPPr>
@@ -217,8 +217,8 @@
         </p:nvSpPr>
         <p:spPr>
           <a:xfrm>
-            <a:off x="-171450" y="1143000"/>
-            <a:ext cx="7200900" cy="3086100"/>
+            <a:off x="-1543050" y="1143000"/>
+            <a:ext cx="9944100" cy="3086100"/>
           </a:xfrm>
           <a:prstGeom prst="rect">
             <a:avLst/>
@@ -495,8 +495,8 @@
         </p:nvSpPr>
         <p:spPr>
           <a:xfrm>
-            <a:off x="-171450" y="1143000"/>
-            <a:ext cx="7200900" cy="3086100"/>
+            <a:off x="-1543050" y="1143000"/>
+            <a:ext cx="9944100" cy="3086100"/>
           </a:xfrm>
         </p:spPr>
       </p:sp>
@@ -596,8 +596,8 @@
         </p:nvSpPr>
         <p:spPr>
           <a:xfrm>
-            <a:off x="-171450" y="1143000"/>
-            <a:ext cx="7200900" cy="3086100"/>
+            <a:off x="-1543050" y="1143000"/>
+            <a:ext cx="9944100" cy="3086100"/>
           </a:xfrm>
         </p:spPr>
       </p:sp>
@@ -697,15 +697,15 @@
         </p:nvSpPr>
         <p:spPr>
           <a:xfrm>
-            <a:off x="6299994" y="3534924"/>
-            <a:ext cx="37799963" cy="7519835"/>
+            <a:off x="6299994" y="2559092"/>
+            <a:ext cx="37799963" cy="5443949"/>
           </a:xfrm>
         </p:spPr>
         <p:txBody>
           <a:bodyPr anchor="b"/>
           <a:lstStyle>
             <a:lvl1pPr algn="ctr">
-              <a:defRPr sz="18897"/>
+              <a:defRPr sz="13681"/>
             </a:lvl1pPr>
           </a:lstStyle>
           <a:p>
@@ -729,8 +729,8 @@
         </p:nvSpPr>
         <p:spPr>
           <a:xfrm>
-            <a:off x="6299994" y="11344752"/>
-            <a:ext cx="37799963" cy="5214884"/>
+            <a:off x="6299994" y="8212980"/>
+            <a:ext cx="37799963" cy="3775291"/>
           </a:xfrm>
         </p:spPr>
         <p:txBody>
@@ -738,39 +738,39 @@
           <a:lstStyle>
             <a:lvl1pPr marL="0" indent="0" algn="ctr">
               <a:buNone/>
-              <a:defRPr sz="7559"/>
+              <a:defRPr sz="5472"/>
             </a:lvl1pPr>
-            <a:lvl2pPr marL="1439951" indent="0" algn="ctr">
+            <a:lvl2pPr marL="1042462" indent="0" algn="ctr">
               <a:buNone/>
-              <a:defRPr sz="6299"/>
+              <a:defRPr sz="4560"/>
             </a:lvl2pPr>
-            <a:lvl3pPr marL="2879903" indent="0" algn="ctr">
+            <a:lvl3pPr marL="2084923" indent="0" algn="ctr">
               <a:buNone/>
-              <a:defRPr sz="5669"/>
+              <a:defRPr sz="4104"/>
             </a:lvl3pPr>
-            <a:lvl4pPr marL="4319854" indent="0" algn="ctr">
+            <a:lvl4pPr marL="3127385" indent="0" algn="ctr">
               <a:buNone/>
-              <a:defRPr sz="5039"/>
+              <a:defRPr sz="3648"/>
             </a:lvl4pPr>
-            <a:lvl5pPr marL="5759806" indent="0" algn="ctr">
+            <a:lvl5pPr marL="4169847" indent="0" algn="ctr">
               <a:buNone/>
-              <a:defRPr sz="5039"/>
+              <a:defRPr sz="3648"/>
             </a:lvl5pPr>
-            <a:lvl6pPr marL="7199757" indent="0" algn="ctr">
+            <a:lvl6pPr marL="5212309" indent="0" algn="ctr">
               <a:buNone/>
-              <a:defRPr sz="5039"/>
+              <a:defRPr sz="3648"/>
             </a:lvl6pPr>
-            <a:lvl7pPr marL="8639708" indent="0" algn="ctr">
+            <a:lvl7pPr marL="6254770" indent="0" algn="ctr">
               <a:buNone/>
-              <a:defRPr sz="5039"/>
+              <a:defRPr sz="3648"/>
             </a:lvl7pPr>
-            <a:lvl8pPr marL="10079660" indent="0" algn="ctr">
+            <a:lvl8pPr marL="7297232" indent="0" algn="ctr">
               <a:buNone/>
-              <a:defRPr sz="5039"/>
+              <a:defRPr sz="3648"/>
             </a:lvl8pPr>
-            <a:lvl9pPr marL="11519611" indent="0" algn="ctr">
+            <a:lvl9pPr marL="8339694" indent="0" algn="ctr">
               <a:buNone/>
-              <a:defRPr sz="5039"/>
+              <a:defRPr sz="3648"/>
             </a:lvl9pPr>
           </a:lstStyle>
           <a:p>
@@ -850,7 +850,7 @@
     </p:spTree>
     <p:extLst>
       <p:ext uri="{BB962C8B-B14F-4D97-AF65-F5344CB8AC3E}">
-        <p14:creationId xmlns:p14="http://schemas.microsoft.com/office/powerpoint/2010/main" val="1365518724"/>
+        <p14:creationId xmlns:p14="http://schemas.microsoft.com/office/powerpoint/2010/main" val="2587148023"/>
       </p:ext>
     </p:extLst>
   </p:cSld>
@@ -1020,7 +1020,7 @@
     </p:spTree>
     <p:extLst>
       <p:ext uri="{BB962C8B-B14F-4D97-AF65-F5344CB8AC3E}">
-        <p14:creationId xmlns:p14="http://schemas.microsoft.com/office/powerpoint/2010/main" val="3250659746"/>
+        <p14:creationId xmlns:p14="http://schemas.microsoft.com/office/powerpoint/2010/main" val="2563536730"/>
       </p:ext>
     </p:extLst>
   </p:cSld>
@@ -1059,8 +1059,8 @@
         </p:nvSpPr>
         <p:spPr>
           <a:xfrm>
-            <a:off x="36067464" y="1149975"/>
-            <a:ext cx="10867489" cy="18304599"/>
+            <a:off x="36067464" y="832519"/>
+            <a:ext cx="10867489" cy="13251529"/>
           </a:xfrm>
         </p:spPr>
         <p:txBody>
@@ -1087,8 +1087,8 @@
         </p:nvSpPr>
         <p:spPr>
           <a:xfrm>
-            <a:off x="3464997" y="1149975"/>
-            <a:ext cx="31972468" cy="18304599"/>
+            <a:off x="3464997" y="832519"/>
+            <a:ext cx="31972468" cy="13251529"/>
           </a:xfrm>
         </p:spPr>
         <p:txBody>
@@ -1200,7 +1200,7 @@
     </p:spTree>
     <p:extLst>
       <p:ext uri="{BB962C8B-B14F-4D97-AF65-F5344CB8AC3E}">
-        <p14:creationId xmlns:p14="http://schemas.microsoft.com/office/powerpoint/2010/main" val="1199104695"/>
+        <p14:creationId xmlns:p14="http://schemas.microsoft.com/office/powerpoint/2010/main" val="3180868622"/>
       </p:ext>
     </p:extLst>
   </p:cSld>
@@ -1370,7 +1370,7 @@
     </p:spTree>
     <p:extLst>
       <p:ext uri="{BB962C8B-B14F-4D97-AF65-F5344CB8AC3E}">
-        <p14:creationId xmlns:p14="http://schemas.microsoft.com/office/powerpoint/2010/main" val="3787071241"/>
+        <p14:creationId xmlns:p14="http://schemas.microsoft.com/office/powerpoint/2010/main" val="952856516"/>
       </p:ext>
     </p:extLst>
   </p:cSld>
@@ -1409,15 +1409,15 @@
         </p:nvSpPr>
         <p:spPr>
           <a:xfrm>
-            <a:off x="3438747" y="5384885"/>
-            <a:ext cx="43469957" cy="8984801"/>
+            <a:off x="3438747" y="3898362"/>
+            <a:ext cx="43469957" cy="6504505"/>
           </a:xfrm>
         </p:spPr>
         <p:txBody>
           <a:bodyPr anchor="b"/>
           <a:lstStyle>
             <a:lvl1pPr>
-              <a:defRPr sz="18897"/>
+              <a:defRPr sz="13681"/>
             </a:lvl1pPr>
           </a:lstStyle>
           <a:p>
@@ -1441,8 +1441,8 @@
         </p:nvSpPr>
         <p:spPr>
           <a:xfrm>
-            <a:off x="3438747" y="14454685"/>
-            <a:ext cx="43469957" cy="4724895"/>
+            <a:off x="3438747" y="10464402"/>
+            <a:ext cx="43469957" cy="3420565"/>
           </a:xfrm>
         </p:spPr>
         <p:txBody>
@@ -1450,7 +1450,7 @@
           <a:lstStyle>
             <a:lvl1pPr marL="0" indent="0">
               <a:buNone/>
-              <a:defRPr sz="7559">
+              <a:defRPr sz="5472">
                 <a:solidFill>
                   <a:schemeClr val="tx1">
                     <a:tint val="82000"/>
@@ -1458,9 +1458,9 @@
                 </a:solidFill>
               </a:defRPr>
             </a:lvl1pPr>
-            <a:lvl2pPr marL="1439951" indent="0">
+            <a:lvl2pPr marL="1042462" indent="0">
               <a:buNone/>
-              <a:defRPr sz="6299">
+              <a:defRPr sz="4560">
                 <a:solidFill>
                   <a:schemeClr val="tx1">
                     <a:tint val="82000"/>
@@ -1468,9 +1468,9 @@
                 </a:solidFill>
               </a:defRPr>
             </a:lvl2pPr>
-            <a:lvl3pPr marL="2879903" indent="0">
+            <a:lvl3pPr marL="2084923" indent="0">
               <a:buNone/>
-              <a:defRPr sz="5669">
+              <a:defRPr sz="4104">
                 <a:solidFill>
                   <a:schemeClr val="tx1">
                     <a:tint val="82000"/>
@@ -1478,9 +1478,9 @@
                 </a:solidFill>
               </a:defRPr>
             </a:lvl3pPr>
-            <a:lvl4pPr marL="4319854" indent="0">
+            <a:lvl4pPr marL="3127385" indent="0">
               <a:buNone/>
-              <a:defRPr sz="5039">
+              <a:defRPr sz="3648">
                 <a:solidFill>
                   <a:schemeClr val="tx1">
                     <a:tint val="82000"/>
@@ -1488,9 +1488,9 @@
                 </a:solidFill>
               </a:defRPr>
             </a:lvl4pPr>
-            <a:lvl5pPr marL="5759806" indent="0">
+            <a:lvl5pPr marL="4169847" indent="0">
               <a:buNone/>
-              <a:defRPr sz="5039">
+              <a:defRPr sz="3648">
                 <a:solidFill>
                   <a:schemeClr val="tx1">
                     <a:tint val="82000"/>
@@ -1498,9 +1498,9 @@
                 </a:solidFill>
               </a:defRPr>
             </a:lvl5pPr>
-            <a:lvl6pPr marL="7199757" indent="0">
+            <a:lvl6pPr marL="5212309" indent="0">
               <a:buNone/>
-              <a:defRPr sz="5039">
+              <a:defRPr sz="3648">
                 <a:solidFill>
                   <a:schemeClr val="tx1">
                     <a:tint val="82000"/>
@@ -1508,9 +1508,9 @@
                 </a:solidFill>
               </a:defRPr>
             </a:lvl6pPr>
-            <a:lvl7pPr marL="8639708" indent="0">
+            <a:lvl7pPr marL="6254770" indent="0">
               <a:buNone/>
-              <a:defRPr sz="5039">
+              <a:defRPr sz="3648">
                 <a:solidFill>
                   <a:schemeClr val="tx1">
                     <a:tint val="82000"/>
@@ -1518,9 +1518,9 @@
                 </a:solidFill>
               </a:defRPr>
             </a:lvl7pPr>
-            <a:lvl8pPr marL="10079660" indent="0">
+            <a:lvl8pPr marL="7297232" indent="0">
               <a:buNone/>
-              <a:defRPr sz="5039">
+              <a:defRPr sz="3648">
                 <a:solidFill>
                   <a:schemeClr val="tx1">
                     <a:tint val="82000"/>
@@ -1528,9 +1528,9 @@
                 </a:solidFill>
               </a:defRPr>
             </a:lvl8pPr>
-            <a:lvl9pPr marL="11519611" indent="0">
+            <a:lvl9pPr marL="8339694" indent="0">
               <a:buNone/>
-              <a:defRPr sz="5039">
+              <a:defRPr sz="3648">
                 <a:solidFill>
                   <a:schemeClr val="tx1">
                     <a:tint val="82000"/>
@@ -1616,7 +1616,7 @@
     </p:spTree>
     <p:extLst>
       <p:ext uri="{BB962C8B-B14F-4D97-AF65-F5344CB8AC3E}">
-        <p14:creationId xmlns:p14="http://schemas.microsoft.com/office/powerpoint/2010/main" val="4151412108"/>
+        <p14:creationId xmlns:p14="http://schemas.microsoft.com/office/powerpoint/2010/main" val="1305959123"/>
       </p:ext>
     </p:extLst>
   </p:cSld>
@@ -1678,8 +1678,8 @@
         </p:nvSpPr>
         <p:spPr>
           <a:xfrm>
-            <a:off x="3464996" y="5749874"/>
-            <a:ext cx="21419979" cy="13704700"/>
+            <a:off x="3464996" y="4162594"/>
+            <a:ext cx="21419979" cy="9921454"/>
           </a:xfrm>
         </p:spPr>
         <p:txBody>
@@ -1735,8 +1735,8 @@
         </p:nvSpPr>
         <p:spPr>
           <a:xfrm>
-            <a:off x="25514975" y="5749874"/>
-            <a:ext cx="21419979" cy="13704700"/>
+            <a:off x="25514975" y="4162594"/>
+            <a:ext cx="21419979" cy="9921454"/>
           </a:xfrm>
         </p:spPr>
         <p:txBody>
@@ -1848,7 +1848,7 @@
     </p:spTree>
     <p:extLst>
       <p:ext uri="{BB962C8B-B14F-4D97-AF65-F5344CB8AC3E}">
-        <p14:creationId xmlns:p14="http://schemas.microsoft.com/office/powerpoint/2010/main" val="2334815159"/>
+        <p14:creationId xmlns:p14="http://schemas.microsoft.com/office/powerpoint/2010/main" val="1880008436"/>
       </p:ext>
     </p:extLst>
   </p:cSld>
@@ -1887,8 +1887,8 @@
         </p:nvSpPr>
         <p:spPr>
           <a:xfrm>
-            <a:off x="3471561" y="1149976"/>
-            <a:ext cx="43469957" cy="4174910"/>
+            <a:off x="3471561" y="832520"/>
+            <a:ext cx="43469957" cy="3022406"/>
           </a:xfrm>
         </p:spPr>
         <p:txBody>
@@ -1915,8 +1915,8 @@
         </p:nvSpPr>
         <p:spPr>
           <a:xfrm>
-            <a:off x="3471563" y="5294885"/>
-            <a:ext cx="21321539" cy="2594941"/>
+            <a:off x="3471563" y="3833207"/>
+            <a:ext cx="21321539" cy="1878596"/>
           </a:xfrm>
         </p:spPr>
         <p:txBody>
@@ -1924,39 +1924,39 @@
           <a:lstStyle>
             <a:lvl1pPr marL="0" indent="0">
               <a:buNone/>
-              <a:defRPr sz="7559" b="1"/>
+              <a:defRPr sz="5472" b="1"/>
             </a:lvl1pPr>
-            <a:lvl2pPr marL="1439951" indent="0">
+            <a:lvl2pPr marL="1042462" indent="0">
               <a:buNone/>
-              <a:defRPr sz="6299" b="1"/>
+              <a:defRPr sz="4560" b="1"/>
             </a:lvl2pPr>
-            <a:lvl3pPr marL="2879903" indent="0">
+            <a:lvl3pPr marL="2084923" indent="0">
               <a:buNone/>
-              <a:defRPr sz="5669" b="1"/>
+              <a:defRPr sz="4104" b="1"/>
             </a:lvl3pPr>
-            <a:lvl4pPr marL="4319854" indent="0">
+            <a:lvl4pPr marL="3127385" indent="0">
               <a:buNone/>
-              <a:defRPr sz="5039" b="1"/>
+              <a:defRPr sz="3648" b="1"/>
             </a:lvl4pPr>
-            <a:lvl5pPr marL="5759806" indent="0">
+            <a:lvl5pPr marL="4169847" indent="0">
               <a:buNone/>
-              <a:defRPr sz="5039" b="1"/>
+              <a:defRPr sz="3648" b="1"/>
             </a:lvl5pPr>
-            <a:lvl6pPr marL="7199757" indent="0">
+            <a:lvl6pPr marL="5212309" indent="0">
               <a:buNone/>
-              <a:defRPr sz="5039" b="1"/>
+              <a:defRPr sz="3648" b="1"/>
             </a:lvl6pPr>
-            <a:lvl7pPr marL="8639708" indent="0">
+            <a:lvl7pPr marL="6254770" indent="0">
               <a:buNone/>
-              <a:defRPr sz="5039" b="1"/>
+              <a:defRPr sz="3648" b="1"/>
             </a:lvl7pPr>
-            <a:lvl8pPr marL="10079660" indent="0">
+            <a:lvl8pPr marL="7297232" indent="0">
               <a:buNone/>
-              <a:defRPr sz="5039" b="1"/>
+              <a:defRPr sz="3648" b="1"/>
             </a:lvl8pPr>
-            <a:lvl9pPr marL="11519611" indent="0">
+            <a:lvl9pPr marL="8339694" indent="0">
               <a:buNone/>
-              <a:defRPr sz="5039" b="1"/>
+              <a:defRPr sz="3648" b="1"/>
             </a:lvl9pPr>
           </a:lstStyle>
           <a:p>
@@ -1980,8 +1980,8 @@
         </p:nvSpPr>
         <p:spPr>
           <a:xfrm>
-            <a:off x="3471563" y="7889827"/>
-            <a:ext cx="21321539" cy="11604746"/>
+            <a:off x="3471563" y="5711803"/>
+            <a:ext cx="21321539" cy="8401202"/>
           </a:xfrm>
         </p:spPr>
         <p:txBody>
@@ -2037,8 +2037,8 @@
         </p:nvSpPr>
         <p:spPr>
           <a:xfrm>
-            <a:off x="25514975" y="5294885"/>
-            <a:ext cx="21426543" cy="2594941"/>
+            <a:off x="25514975" y="3833207"/>
+            <a:ext cx="21426543" cy="1878596"/>
           </a:xfrm>
         </p:spPr>
         <p:txBody>
@@ -2046,39 +2046,39 @@
           <a:lstStyle>
             <a:lvl1pPr marL="0" indent="0">
               <a:buNone/>
-              <a:defRPr sz="7559" b="1"/>
+              <a:defRPr sz="5472" b="1"/>
             </a:lvl1pPr>
-            <a:lvl2pPr marL="1439951" indent="0">
+            <a:lvl2pPr marL="1042462" indent="0">
               <a:buNone/>
-              <a:defRPr sz="6299" b="1"/>
+              <a:defRPr sz="4560" b="1"/>
             </a:lvl2pPr>
-            <a:lvl3pPr marL="2879903" indent="0">
+            <a:lvl3pPr marL="2084923" indent="0">
               <a:buNone/>
-              <a:defRPr sz="5669" b="1"/>
+              <a:defRPr sz="4104" b="1"/>
             </a:lvl3pPr>
-            <a:lvl4pPr marL="4319854" indent="0">
+            <a:lvl4pPr marL="3127385" indent="0">
               <a:buNone/>
-              <a:defRPr sz="5039" b="1"/>
+              <a:defRPr sz="3648" b="1"/>
             </a:lvl4pPr>
-            <a:lvl5pPr marL="5759806" indent="0">
+            <a:lvl5pPr marL="4169847" indent="0">
               <a:buNone/>
-              <a:defRPr sz="5039" b="1"/>
+              <a:defRPr sz="3648" b="1"/>
             </a:lvl5pPr>
-            <a:lvl6pPr marL="7199757" indent="0">
+            <a:lvl6pPr marL="5212309" indent="0">
               <a:buNone/>
-              <a:defRPr sz="5039" b="1"/>
+              <a:defRPr sz="3648" b="1"/>
             </a:lvl6pPr>
-            <a:lvl7pPr marL="8639708" indent="0">
+            <a:lvl7pPr marL="6254770" indent="0">
               <a:buNone/>
-              <a:defRPr sz="5039" b="1"/>
+              <a:defRPr sz="3648" b="1"/>
             </a:lvl7pPr>
-            <a:lvl8pPr marL="10079660" indent="0">
+            <a:lvl8pPr marL="7297232" indent="0">
               <a:buNone/>
-              <a:defRPr sz="5039" b="1"/>
+              <a:defRPr sz="3648" b="1"/>
             </a:lvl8pPr>
-            <a:lvl9pPr marL="11519611" indent="0">
+            <a:lvl9pPr marL="8339694" indent="0">
               <a:buNone/>
-              <a:defRPr sz="5039" b="1"/>
+              <a:defRPr sz="3648" b="1"/>
             </a:lvl9pPr>
           </a:lstStyle>
           <a:p>
@@ -2102,8 +2102,8 @@
         </p:nvSpPr>
         <p:spPr>
           <a:xfrm>
-            <a:off x="25514975" y="7889827"/>
-            <a:ext cx="21426543" cy="11604746"/>
+            <a:off x="25514975" y="5711803"/>
+            <a:ext cx="21426543" cy="8401202"/>
           </a:xfrm>
         </p:spPr>
         <p:txBody>
@@ -2215,7 +2215,7 @@
     </p:spTree>
     <p:extLst>
       <p:ext uri="{BB962C8B-B14F-4D97-AF65-F5344CB8AC3E}">
-        <p14:creationId xmlns:p14="http://schemas.microsoft.com/office/powerpoint/2010/main" val="2726490139"/>
+        <p14:creationId xmlns:p14="http://schemas.microsoft.com/office/powerpoint/2010/main" val="2537957646"/>
       </p:ext>
     </p:extLst>
   </p:cSld>
@@ -2333,7 +2333,7 @@
     </p:spTree>
     <p:extLst>
       <p:ext uri="{BB962C8B-B14F-4D97-AF65-F5344CB8AC3E}">
-        <p14:creationId xmlns:p14="http://schemas.microsoft.com/office/powerpoint/2010/main" val="3835092185"/>
+        <p14:creationId xmlns:p14="http://schemas.microsoft.com/office/powerpoint/2010/main" val="809104720"/>
       </p:ext>
     </p:extLst>
   </p:cSld>
@@ -2428,7 +2428,7 @@
     </p:spTree>
     <p:extLst>
       <p:ext uri="{BB962C8B-B14F-4D97-AF65-F5344CB8AC3E}">
-        <p14:creationId xmlns:p14="http://schemas.microsoft.com/office/powerpoint/2010/main" val="959473382"/>
+        <p14:creationId xmlns:p14="http://schemas.microsoft.com/office/powerpoint/2010/main" val="1522400379"/>
       </p:ext>
     </p:extLst>
   </p:cSld>
@@ -2467,15 +2467,15 @@
         </p:nvSpPr>
         <p:spPr>
           <a:xfrm>
-            <a:off x="3471563" y="1439968"/>
-            <a:ext cx="16255294" cy="5039889"/>
+            <a:off x="3471563" y="1042458"/>
+            <a:ext cx="16255294" cy="3648604"/>
           </a:xfrm>
         </p:spPr>
         <p:txBody>
           <a:bodyPr anchor="b"/>
           <a:lstStyle>
             <a:lvl1pPr>
-              <a:defRPr sz="10078"/>
+              <a:defRPr sz="7296"/>
             </a:lvl1pPr>
           </a:lstStyle>
           <a:p>
@@ -2499,39 +2499,39 @@
         </p:nvSpPr>
         <p:spPr>
           <a:xfrm>
-            <a:off x="21426543" y="3109933"/>
-            <a:ext cx="25514975" cy="15349662"/>
+            <a:off x="21426543" y="2251422"/>
+            <a:ext cx="25514975" cy="11112316"/>
           </a:xfrm>
         </p:spPr>
         <p:txBody>
           <a:bodyPr/>
           <a:lstStyle>
             <a:lvl1pPr>
-              <a:defRPr sz="10078"/>
+              <a:defRPr sz="7296"/>
             </a:lvl1pPr>
             <a:lvl2pPr>
-              <a:defRPr sz="8819"/>
+              <a:defRPr sz="6384"/>
             </a:lvl2pPr>
             <a:lvl3pPr>
-              <a:defRPr sz="7559"/>
+              <a:defRPr sz="5472"/>
             </a:lvl3pPr>
             <a:lvl4pPr>
-              <a:defRPr sz="6299"/>
+              <a:defRPr sz="4560"/>
             </a:lvl4pPr>
             <a:lvl5pPr>
-              <a:defRPr sz="6299"/>
+              <a:defRPr sz="4560"/>
             </a:lvl5pPr>
             <a:lvl6pPr>
-              <a:defRPr sz="6299"/>
+              <a:defRPr sz="4560"/>
             </a:lvl6pPr>
             <a:lvl7pPr>
-              <a:defRPr sz="6299"/>
+              <a:defRPr sz="4560"/>
             </a:lvl7pPr>
             <a:lvl8pPr>
-              <a:defRPr sz="6299"/>
+              <a:defRPr sz="4560"/>
             </a:lvl8pPr>
             <a:lvl9pPr>
-              <a:defRPr sz="6299"/>
+              <a:defRPr sz="4560"/>
             </a:lvl9pPr>
           </a:lstStyle>
           <a:p>
@@ -2584,8 +2584,8 @@
         </p:nvSpPr>
         <p:spPr>
           <a:xfrm>
-            <a:off x="3471563" y="6479857"/>
-            <a:ext cx="16255294" cy="12004738"/>
+            <a:off x="3471563" y="4691062"/>
+            <a:ext cx="16255294" cy="8690774"/>
           </a:xfrm>
         </p:spPr>
         <p:txBody>
@@ -2593,39 +2593,39 @@
           <a:lstStyle>
             <a:lvl1pPr marL="0" indent="0">
               <a:buNone/>
-              <a:defRPr sz="5039"/>
+              <a:defRPr sz="3648"/>
             </a:lvl1pPr>
-            <a:lvl2pPr marL="1439951" indent="0">
+            <a:lvl2pPr marL="1042462" indent="0">
               <a:buNone/>
-              <a:defRPr sz="4409"/>
+              <a:defRPr sz="3192"/>
             </a:lvl2pPr>
-            <a:lvl3pPr marL="2879903" indent="0">
+            <a:lvl3pPr marL="2084923" indent="0">
               <a:buNone/>
-              <a:defRPr sz="3779"/>
+              <a:defRPr sz="2736"/>
             </a:lvl3pPr>
-            <a:lvl4pPr marL="4319854" indent="0">
+            <a:lvl4pPr marL="3127385" indent="0">
               <a:buNone/>
-              <a:defRPr sz="3150"/>
+              <a:defRPr sz="2280"/>
             </a:lvl4pPr>
-            <a:lvl5pPr marL="5759806" indent="0">
+            <a:lvl5pPr marL="4169847" indent="0">
               <a:buNone/>
-              <a:defRPr sz="3150"/>
+              <a:defRPr sz="2280"/>
             </a:lvl5pPr>
-            <a:lvl6pPr marL="7199757" indent="0">
+            <a:lvl6pPr marL="5212309" indent="0">
               <a:buNone/>
-              <a:defRPr sz="3150"/>
+              <a:defRPr sz="2280"/>
             </a:lvl6pPr>
-            <a:lvl7pPr marL="8639708" indent="0">
+            <a:lvl7pPr marL="6254770" indent="0">
               <a:buNone/>
-              <a:defRPr sz="3150"/>
+              <a:defRPr sz="2280"/>
             </a:lvl7pPr>
-            <a:lvl8pPr marL="10079660" indent="0">
+            <a:lvl8pPr marL="7297232" indent="0">
               <a:buNone/>
-              <a:defRPr sz="3150"/>
+              <a:defRPr sz="2280"/>
             </a:lvl8pPr>
-            <a:lvl9pPr marL="11519611" indent="0">
+            <a:lvl9pPr marL="8339694" indent="0">
               <a:buNone/>
-              <a:defRPr sz="3150"/>
+              <a:defRPr sz="2280"/>
             </a:lvl9pPr>
           </a:lstStyle>
           <a:p>
@@ -2705,7 +2705,7 @@
     </p:spTree>
     <p:extLst>
       <p:ext uri="{BB962C8B-B14F-4D97-AF65-F5344CB8AC3E}">
-        <p14:creationId xmlns:p14="http://schemas.microsoft.com/office/powerpoint/2010/main" val="3832139107"/>
+        <p14:creationId xmlns:p14="http://schemas.microsoft.com/office/powerpoint/2010/main" val="9413650"/>
       </p:ext>
     </p:extLst>
   </p:cSld>
@@ -2744,15 +2744,15 @@
         </p:nvSpPr>
         <p:spPr>
           <a:xfrm>
-            <a:off x="3471563" y="1439968"/>
-            <a:ext cx="16255294" cy="5039889"/>
+            <a:off x="3471563" y="1042458"/>
+            <a:ext cx="16255294" cy="3648604"/>
           </a:xfrm>
         </p:spPr>
         <p:txBody>
           <a:bodyPr anchor="b"/>
           <a:lstStyle>
             <a:lvl1pPr>
-              <a:defRPr sz="10078"/>
+              <a:defRPr sz="7296"/>
             </a:lvl1pPr>
           </a:lstStyle>
           <a:p>
@@ -2776,8 +2776,8 @@
         </p:nvSpPr>
         <p:spPr>
           <a:xfrm>
-            <a:off x="21426543" y="3109933"/>
-            <a:ext cx="25514975" cy="15349662"/>
+            <a:off x="21426543" y="2251422"/>
+            <a:ext cx="25514975" cy="11112316"/>
           </a:xfrm>
         </p:spPr>
         <p:txBody>
@@ -2785,39 +2785,39 @@
           <a:lstStyle>
             <a:lvl1pPr marL="0" indent="0">
               <a:buNone/>
-              <a:defRPr sz="10078"/>
+              <a:defRPr sz="7296"/>
             </a:lvl1pPr>
-            <a:lvl2pPr marL="1439951" indent="0">
+            <a:lvl2pPr marL="1042462" indent="0">
               <a:buNone/>
-              <a:defRPr sz="8819"/>
+              <a:defRPr sz="6384"/>
             </a:lvl2pPr>
-            <a:lvl3pPr marL="2879903" indent="0">
+            <a:lvl3pPr marL="2084923" indent="0">
               <a:buNone/>
-              <a:defRPr sz="7559"/>
+              <a:defRPr sz="5472"/>
             </a:lvl3pPr>
-            <a:lvl4pPr marL="4319854" indent="0">
+            <a:lvl4pPr marL="3127385" indent="0">
               <a:buNone/>
-              <a:defRPr sz="6299"/>
+              <a:defRPr sz="4560"/>
             </a:lvl4pPr>
-            <a:lvl5pPr marL="5759806" indent="0">
+            <a:lvl5pPr marL="4169847" indent="0">
               <a:buNone/>
-              <a:defRPr sz="6299"/>
+              <a:defRPr sz="4560"/>
             </a:lvl5pPr>
-            <a:lvl6pPr marL="7199757" indent="0">
+            <a:lvl6pPr marL="5212309" indent="0">
               <a:buNone/>
-              <a:defRPr sz="6299"/>
+              <a:defRPr sz="4560"/>
             </a:lvl6pPr>
-            <a:lvl7pPr marL="8639708" indent="0">
+            <a:lvl7pPr marL="6254770" indent="0">
               <a:buNone/>
-              <a:defRPr sz="6299"/>
+              <a:defRPr sz="4560"/>
             </a:lvl7pPr>
-            <a:lvl8pPr marL="10079660" indent="0">
+            <a:lvl8pPr marL="7297232" indent="0">
               <a:buNone/>
-              <a:defRPr sz="6299"/>
+              <a:defRPr sz="4560"/>
             </a:lvl8pPr>
-            <a:lvl9pPr marL="11519611" indent="0">
+            <a:lvl9pPr marL="8339694" indent="0">
               <a:buNone/>
-              <a:defRPr sz="6299"/>
+              <a:defRPr sz="4560"/>
             </a:lvl9pPr>
           </a:lstStyle>
           <a:p>
@@ -2841,8 +2841,8 @@
         </p:nvSpPr>
         <p:spPr>
           <a:xfrm>
-            <a:off x="3471563" y="6479857"/>
-            <a:ext cx="16255294" cy="12004738"/>
+            <a:off x="3471563" y="4691062"/>
+            <a:ext cx="16255294" cy="8690774"/>
           </a:xfrm>
         </p:spPr>
         <p:txBody>
@@ -2850,39 +2850,39 @@
           <a:lstStyle>
             <a:lvl1pPr marL="0" indent="0">
               <a:buNone/>
-              <a:defRPr sz="5039"/>
+              <a:defRPr sz="3648"/>
             </a:lvl1pPr>
-            <a:lvl2pPr marL="1439951" indent="0">
+            <a:lvl2pPr marL="1042462" indent="0">
               <a:buNone/>
-              <a:defRPr sz="4409"/>
+              <a:defRPr sz="3192"/>
             </a:lvl2pPr>
-            <a:lvl3pPr marL="2879903" indent="0">
+            <a:lvl3pPr marL="2084923" indent="0">
               <a:buNone/>
-              <a:defRPr sz="3779"/>
+              <a:defRPr sz="2736"/>
             </a:lvl3pPr>
-            <a:lvl4pPr marL="4319854" indent="0">
+            <a:lvl4pPr marL="3127385" indent="0">
               <a:buNone/>
-              <a:defRPr sz="3150"/>
+              <a:defRPr sz="2280"/>
             </a:lvl4pPr>
-            <a:lvl5pPr marL="5759806" indent="0">
+            <a:lvl5pPr marL="4169847" indent="0">
               <a:buNone/>
-              <a:defRPr sz="3150"/>
+              <a:defRPr sz="2280"/>
             </a:lvl5pPr>
-            <a:lvl6pPr marL="7199757" indent="0">
+            <a:lvl6pPr marL="5212309" indent="0">
               <a:buNone/>
-              <a:defRPr sz="3150"/>
+              <a:defRPr sz="2280"/>
             </a:lvl6pPr>
-            <a:lvl7pPr marL="8639708" indent="0">
+            <a:lvl7pPr marL="6254770" indent="0">
               <a:buNone/>
-              <a:defRPr sz="3150"/>
+              <a:defRPr sz="2280"/>
             </a:lvl7pPr>
-            <a:lvl8pPr marL="10079660" indent="0">
+            <a:lvl8pPr marL="7297232" indent="0">
               <a:buNone/>
-              <a:defRPr sz="3150"/>
+              <a:defRPr sz="2280"/>
             </a:lvl8pPr>
-            <a:lvl9pPr marL="11519611" indent="0">
+            <a:lvl9pPr marL="8339694" indent="0">
               <a:buNone/>
-              <a:defRPr sz="3150"/>
+              <a:defRPr sz="2280"/>
             </a:lvl9pPr>
           </a:lstStyle>
           <a:p>
@@ -2962,7 +2962,7 @@
     </p:spTree>
     <p:extLst>
       <p:ext uri="{BB962C8B-B14F-4D97-AF65-F5344CB8AC3E}">
-        <p14:creationId xmlns:p14="http://schemas.microsoft.com/office/powerpoint/2010/main" val="429038154"/>
+        <p14:creationId xmlns:p14="http://schemas.microsoft.com/office/powerpoint/2010/main" val="254187240"/>
       </p:ext>
     </p:extLst>
   </p:cSld>
@@ -3006,8 +3006,8 @@
         </p:nvSpPr>
         <p:spPr>
           <a:xfrm>
-            <a:off x="3464997" y="1149976"/>
-            <a:ext cx="43469957" cy="4174910"/>
+            <a:off x="3464997" y="832520"/>
+            <a:ext cx="43469957" cy="3022406"/>
           </a:xfrm>
           <a:prstGeom prst="rect">
             <a:avLst/>
@@ -3039,8 +3039,8 @@
         </p:nvSpPr>
         <p:spPr>
           <a:xfrm>
-            <a:off x="3464997" y="5749874"/>
-            <a:ext cx="43469957" cy="13704700"/>
+            <a:off x="3464997" y="4162594"/>
+            <a:ext cx="43469957" cy="9921454"/>
           </a:xfrm>
           <a:prstGeom prst="rect">
             <a:avLst/>
@@ -3101,8 +3101,8 @@
         </p:nvSpPr>
         <p:spPr>
           <a:xfrm>
-            <a:off x="3464996" y="20019561"/>
-            <a:ext cx="11339989" cy="1149975"/>
+            <a:off x="3464996" y="14493068"/>
+            <a:ext cx="11339989" cy="832519"/>
           </a:xfrm>
           <a:prstGeom prst="rect">
             <a:avLst/>
@@ -3112,7 +3112,7 @@
           <a:bodyPr vert="horz" lIns="91440" tIns="45720" rIns="91440" bIns="45720" rtlCol="0" anchor="ctr"/>
           <a:lstStyle>
             <a:lvl1pPr algn="l">
-              <a:defRPr sz="3779">
+              <a:defRPr sz="2736">
                 <a:solidFill>
                   <a:schemeClr val="tx1">
                     <a:tint val="82000"/>
@@ -3142,8 +3142,8 @@
         </p:nvSpPr>
         <p:spPr>
           <a:xfrm>
-            <a:off x="16694984" y="20019561"/>
-            <a:ext cx="17009983" cy="1149975"/>
+            <a:off x="16694984" y="14493068"/>
+            <a:ext cx="17009983" cy="832519"/>
           </a:xfrm>
           <a:prstGeom prst="rect">
             <a:avLst/>
@@ -3153,7 +3153,7 @@
           <a:bodyPr vert="horz" lIns="91440" tIns="45720" rIns="91440" bIns="45720" rtlCol="0" anchor="ctr"/>
           <a:lstStyle>
             <a:lvl1pPr algn="ctr">
-              <a:defRPr sz="3779">
+              <a:defRPr sz="2736">
                 <a:solidFill>
                   <a:schemeClr val="tx1">
                     <a:tint val="82000"/>
@@ -3179,8 +3179,8 @@
         </p:nvSpPr>
         <p:spPr>
           <a:xfrm>
-            <a:off x="35594965" y="20019561"/>
-            <a:ext cx="11339989" cy="1149975"/>
+            <a:off x="35594965" y="14493068"/>
+            <a:ext cx="11339989" cy="832519"/>
           </a:xfrm>
           <a:prstGeom prst="rect">
             <a:avLst/>
@@ -3190,7 +3190,7 @@
           <a:bodyPr vert="horz" lIns="91440" tIns="45720" rIns="91440" bIns="45720" rtlCol="0" anchor="ctr"/>
           <a:lstStyle>
             <a:lvl1pPr algn="r">
-              <a:defRPr sz="3779">
+              <a:defRPr sz="2736">
                 <a:solidFill>
                   <a:schemeClr val="tx1">
                     <a:tint val="82000"/>
@@ -3211,27 +3211,27 @@
     </p:spTree>
     <p:extLst>
       <p:ext uri="{BB962C8B-B14F-4D97-AF65-F5344CB8AC3E}">
-        <p14:creationId xmlns:p14="http://schemas.microsoft.com/office/powerpoint/2010/main" val="1175582136"/>
+        <p14:creationId xmlns:p14="http://schemas.microsoft.com/office/powerpoint/2010/main" val="1089098968"/>
       </p:ext>
     </p:extLst>
   </p:cSld>
   <p:clrMap bg1="lt1" tx1="dk1" bg2="lt2" tx2="dk2" accent1="accent1" accent2="accent2" accent3="accent3" accent4="accent4" accent5="accent5" accent6="accent6" hlink="hlink" folHlink="folHlink"/>
   <p:sldLayoutIdLst>
-    <p:sldLayoutId id="2147483721" r:id="rId1"/>
-    <p:sldLayoutId id="2147483722" r:id="rId2"/>
-    <p:sldLayoutId id="2147483723" r:id="rId3"/>
-    <p:sldLayoutId id="2147483724" r:id="rId4"/>
-    <p:sldLayoutId id="2147483725" r:id="rId5"/>
-    <p:sldLayoutId id="2147483726" r:id="rId6"/>
-    <p:sldLayoutId id="2147483727" r:id="rId7"/>
-    <p:sldLayoutId id="2147483728" r:id="rId8"/>
-    <p:sldLayoutId id="2147483729" r:id="rId9"/>
-    <p:sldLayoutId id="2147483730" r:id="rId10"/>
-    <p:sldLayoutId id="2147483731" r:id="rId11"/>
+    <p:sldLayoutId id="2147483745" r:id="rId1"/>
+    <p:sldLayoutId id="2147483746" r:id="rId2"/>
+    <p:sldLayoutId id="2147483747" r:id="rId3"/>
+    <p:sldLayoutId id="2147483748" r:id="rId4"/>
+    <p:sldLayoutId id="2147483749" r:id="rId5"/>
+    <p:sldLayoutId id="2147483750" r:id="rId6"/>
+    <p:sldLayoutId id="2147483751" r:id="rId7"/>
+    <p:sldLayoutId id="2147483752" r:id="rId8"/>
+    <p:sldLayoutId id="2147483753" r:id="rId9"/>
+    <p:sldLayoutId id="2147483754" r:id="rId10"/>
+    <p:sldLayoutId id="2147483755" r:id="rId11"/>
   </p:sldLayoutIdLst>
   <p:txStyles>
     <p:titleStyle>
-      <a:lvl1pPr algn="l" defTabSz="2879903" rtl="0" eaLnBrk="1" latinLnBrk="0" hangingPunct="1">
+      <a:lvl1pPr algn="l" defTabSz="2084923" rtl="0" eaLnBrk="1" latinLnBrk="0" hangingPunct="1">
         <a:lnSpc>
           <a:spcPct val="90000"/>
         </a:lnSpc>
@@ -3239,7 +3239,7 @@
           <a:spcPct val="0"/>
         </a:spcBef>
         <a:buNone/>
-        <a:defRPr sz="13858" kern="1200">
+        <a:defRPr sz="10032" kern="1200">
           <a:solidFill>
             <a:schemeClr val="tx1"/>
           </a:solidFill>
@@ -3250,16 +3250,16 @@
       </a:lvl1pPr>
     </p:titleStyle>
     <p:bodyStyle>
-      <a:lvl1pPr marL="719976" indent="-719976" algn="l" defTabSz="2879903" rtl="0" eaLnBrk="1" latinLnBrk="0" hangingPunct="1">
+      <a:lvl1pPr marL="521231" indent="-521231" algn="l" defTabSz="2084923" rtl="0" eaLnBrk="1" latinLnBrk="0" hangingPunct="1">
         <a:lnSpc>
           <a:spcPct val="90000"/>
         </a:lnSpc>
         <a:spcBef>
-          <a:spcPts val="3150"/>
+          <a:spcPts val="2280"/>
         </a:spcBef>
         <a:buFont typeface="Arial" panose="020B0604020202020204" pitchFamily="34" charset="0"/>
         <a:buChar char="•"/>
-        <a:defRPr sz="8819" kern="1200">
+        <a:defRPr sz="6384" kern="1200">
           <a:solidFill>
             <a:schemeClr val="tx1"/>
           </a:solidFill>
@@ -3268,16 +3268,16 @@
           <a:cs typeface="+mn-cs"/>
         </a:defRPr>
       </a:lvl1pPr>
-      <a:lvl2pPr marL="2159927" indent="-719976" algn="l" defTabSz="2879903" rtl="0" eaLnBrk="1" latinLnBrk="0" hangingPunct="1">
+      <a:lvl2pPr marL="1563693" indent="-521231" algn="l" defTabSz="2084923" rtl="0" eaLnBrk="1" latinLnBrk="0" hangingPunct="1">
         <a:lnSpc>
           <a:spcPct val="90000"/>
         </a:lnSpc>
         <a:spcBef>
-          <a:spcPts val="1575"/>
+          <a:spcPts val="1140"/>
         </a:spcBef>
         <a:buFont typeface="Arial" panose="020B0604020202020204" pitchFamily="34" charset="0"/>
         <a:buChar char="•"/>
-        <a:defRPr sz="7559" kern="1200">
+        <a:defRPr sz="5472" kern="1200">
           <a:solidFill>
             <a:schemeClr val="tx1"/>
           </a:solidFill>
@@ -3286,16 +3286,16 @@
           <a:cs typeface="+mn-cs"/>
         </a:defRPr>
       </a:lvl2pPr>
-      <a:lvl3pPr marL="3599879" indent="-719976" algn="l" defTabSz="2879903" rtl="0" eaLnBrk="1" latinLnBrk="0" hangingPunct="1">
+      <a:lvl3pPr marL="2606154" indent="-521231" algn="l" defTabSz="2084923" rtl="0" eaLnBrk="1" latinLnBrk="0" hangingPunct="1">
         <a:lnSpc>
           <a:spcPct val="90000"/>
         </a:lnSpc>
         <a:spcBef>
-          <a:spcPts val="1575"/>
+          <a:spcPts val="1140"/>
         </a:spcBef>
         <a:buFont typeface="Arial" panose="020B0604020202020204" pitchFamily="34" charset="0"/>
         <a:buChar char="•"/>
-        <a:defRPr sz="6299" kern="1200">
+        <a:defRPr sz="4560" kern="1200">
           <a:solidFill>
             <a:schemeClr val="tx1"/>
           </a:solidFill>
@@ -3304,16 +3304,16 @@
           <a:cs typeface="+mn-cs"/>
         </a:defRPr>
       </a:lvl3pPr>
-      <a:lvl4pPr marL="5039830" indent="-719976" algn="l" defTabSz="2879903" rtl="0" eaLnBrk="1" latinLnBrk="0" hangingPunct="1">
+      <a:lvl4pPr marL="3648616" indent="-521231" algn="l" defTabSz="2084923" rtl="0" eaLnBrk="1" latinLnBrk="0" hangingPunct="1">
         <a:lnSpc>
           <a:spcPct val="90000"/>
         </a:lnSpc>
         <a:spcBef>
-          <a:spcPts val="1575"/>
+          <a:spcPts val="1140"/>
         </a:spcBef>
         <a:buFont typeface="Arial" panose="020B0604020202020204" pitchFamily="34" charset="0"/>
         <a:buChar char="•"/>
-        <a:defRPr sz="5669" kern="1200">
+        <a:defRPr sz="4104" kern="1200">
           <a:solidFill>
             <a:schemeClr val="tx1"/>
           </a:solidFill>
@@ -3322,16 +3322,16 @@
           <a:cs typeface="+mn-cs"/>
         </a:defRPr>
       </a:lvl4pPr>
-      <a:lvl5pPr marL="6479781" indent="-719976" algn="l" defTabSz="2879903" rtl="0" eaLnBrk="1" latinLnBrk="0" hangingPunct="1">
+      <a:lvl5pPr marL="4691078" indent="-521231" algn="l" defTabSz="2084923" rtl="0" eaLnBrk="1" latinLnBrk="0" hangingPunct="1">
         <a:lnSpc>
           <a:spcPct val="90000"/>
         </a:lnSpc>
         <a:spcBef>
-          <a:spcPts val="1575"/>
+          <a:spcPts val="1140"/>
         </a:spcBef>
         <a:buFont typeface="Arial" panose="020B0604020202020204" pitchFamily="34" charset="0"/>
         <a:buChar char="•"/>
-        <a:defRPr sz="5669" kern="1200">
+        <a:defRPr sz="4104" kern="1200">
           <a:solidFill>
             <a:schemeClr val="tx1"/>
           </a:solidFill>
@@ -3340,16 +3340,16 @@
           <a:cs typeface="+mn-cs"/>
         </a:defRPr>
       </a:lvl5pPr>
-      <a:lvl6pPr marL="7919733" indent="-719976" algn="l" defTabSz="2879903" rtl="0" eaLnBrk="1" latinLnBrk="0" hangingPunct="1">
+      <a:lvl6pPr marL="5733539" indent="-521231" algn="l" defTabSz="2084923" rtl="0" eaLnBrk="1" latinLnBrk="0" hangingPunct="1">
         <a:lnSpc>
           <a:spcPct val="90000"/>
         </a:lnSpc>
         <a:spcBef>
-          <a:spcPts val="1575"/>
+          <a:spcPts val="1140"/>
         </a:spcBef>
         <a:buFont typeface="Arial" panose="020B0604020202020204" pitchFamily="34" charset="0"/>
         <a:buChar char="•"/>
-        <a:defRPr sz="5669" kern="1200">
+        <a:defRPr sz="4104" kern="1200">
           <a:solidFill>
             <a:schemeClr val="tx1"/>
           </a:solidFill>
@@ -3358,16 +3358,16 @@
           <a:cs typeface="+mn-cs"/>
         </a:defRPr>
       </a:lvl6pPr>
-      <a:lvl7pPr marL="9359684" indent="-719976" algn="l" defTabSz="2879903" rtl="0" eaLnBrk="1" latinLnBrk="0" hangingPunct="1">
+      <a:lvl7pPr marL="6776001" indent="-521231" algn="l" defTabSz="2084923" rtl="0" eaLnBrk="1" latinLnBrk="0" hangingPunct="1">
         <a:lnSpc>
           <a:spcPct val="90000"/>
         </a:lnSpc>
         <a:spcBef>
-          <a:spcPts val="1575"/>
+          <a:spcPts val="1140"/>
         </a:spcBef>
         <a:buFont typeface="Arial" panose="020B0604020202020204" pitchFamily="34" charset="0"/>
         <a:buChar char="•"/>
-        <a:defRPr sz="5669" kern="1200">
+        <a:defRPr sz="4104" kern="1200">
           <a:solidFill>
             <a:schemeClr val="tx1"/>
           </a:solidFill>
@@ -3376,16 +3376,16 @@
           <a:cs typeface="+mn-cs"/>
         </a:defRPr>
       </a:lvl7pPr>
-      <a:lvl8pPr marL="10799636" indent="-719976" algn="l" defTabSz="2879903" rtl="0" eaLnBrk="1" latinLnBrk="0" hangingPunct="1">
+      <a:lvl8pPr marL="7818463" indent="-521231" algn="l" defTabSz="2084923" rtl="0" eaLnBrk="1" latinLnBrk="0" hangingPunct="1">
         <a:lnSpc>
           <a:spcPct val="90000"/>
         </a:lnSpc>
         <a:spcBef>
-          <a:spcPts val="1575"/>
+          <a:spcPts val="1140"/>
         </a:spcBef>
         <a:buFont typeface="Arial" panose="020B0604020202020204" pitchFamily="34" charset="0"/>
         <a:buChar char="•"/>
-        <a:defRPr sz="5669" kern="1200">
+        <a:defRPr sz="4104" kern="1200">
           <a:solidFill>
             <a:schemeClr val="tx1"/>
           </a:solidFill>
@@ -3394,16 +3394,16 @@
           <a:cs typeface="+mn-cs"/>
         </a:defRPr>
       </a:lvl8pPr>
-      <a:lvl9pPr marL="12239587" indent="-719976" algn="l" defTabSz="2879903" rtl="0" eaLnBrk="1" latinLnBrk="0" hangingPunct="1">
+      <a:lvl9pPr marL="8860925" indent="-521231" algn="l" defTabSz="2084923" rtl="0" eaLnBrk="1" latinLnBrk="0" hangingPunct="1">
         <a:lnSpc>
           <a:spcPct val="90000"/>
         </a:lnSpc>
         <a:spcBef>
-          <a:spcPts val="1575"/>
+          <a:spcPts val="1140"/>
         </a:spcBef>
         <a:buFont typeface="Arial" panose="020B0604020202020204" pitchFamily="34" charset="0"/>
         <a:buChar char="•"/>
-        <a:defRPr sz="5669" kern="1200">
+        <a:defRPr sz="4104" kern="1200">
           <a:solidFill>
             <a:schemeClr val="tx1"/>
           </a:solidFill>
@@ -3417,8 +3417,8 @@
       <a:defPPr>
         <a:defRPr lang="en-US"/>
       </a:defPPr>
-      <a:lvl1pPr marL="0" algn="l" defTabSz="2879903" rtl="0" eaLnBrk="1" latinLnBrk="0" hangingPunct="1">
-        <a:defRPr sz="5669" kern="1200">
+      <a:lvl1pPr marL="0" algn="l" defTabSz="2084923" rtl="0" eaLnBrk="1" latinLnBrk="0" hangingPunct="1">
+        <a:defRPr sz="4104" kern="1200">
           <a:solidFill>
             <a:schemeClr val="tx1"/>
           </a:solidFill>
@@ -3427,8 +3427,8 @@
           <a:cs typeface="+mn-cs"/>
         </a:defRPr>
       </a:lvl1pPr>
-      <a:lvl2pPr marL="1439951" algn="l" defTabSz="2879903" rtl="0" eaLnBrk="1" latinLnBrk="0" hangingPunct="1">
-        <a:defRPr sz="5669" kern="1200">
+      <a:lvl2pPr marL="1042462" algn="l" defTabSz="2084923" rtl="0" eaLnBrk="1" latinLnBrk="0" hangingPunct="1">
+        <a:defRPr sz="4104" kern="1200">
           <a:solidFill>
             <a:schemeClr val="tx1"/>
           </a:solidFill>
@@ -3437,8 +3437,8 @@
           <a:cs typeface="+mn-cs"/>
         </a:defRPr>
       </a:lvl2pPr>
-      <a:lvl3pPr marL="2879903" algn="l" defTabSz="2879903" rtl="0" eaLnBrk="1" latinLnBrk="0" hangingPunct="1">
-        <a:defRPr sz="5669" kern="1200">
+      <a:lvl3pPr marL="2084923" algn="l" defTabSz="2084923" rtl="0" eaLnBrk="1" latinLnBrk="0" hangingPunct="1">
+        <a:defRPr sz="4104" kern="1200">
           <a:solidFill>
             <a:schemeClr val="tx1"/>
           </a:solidFill>
@@ -3447,8 +3447,8 @@
           <a:cs typeface="+mn-cs"/>
         </a:defRPr>
       </a:lvl3pPr>
-      <a:lvl4pPr marL="4319854" algn="l" defTabSz="2879903" rtl="0" eaLnBrk="1" latinLnBrk="0" hangingPunct="1">
-        <a:defRPr sz="5669" kern="1200">
+      <a:lvl4pPr marL="3127385" algn="l" defTabSz="2084923" rtl="0" eaLnBrk="1" latinLnBrk="0" hangingPunct="1">
+        <a:defRPr sz="4104" kern="1200">
           <a:solidFill>
             <a:schemeClr val="tx1"/>
           </a:solidFill>
@@ -3457,8 +3457,8 @@
           <a:cs typeface="+mn-cs"/>
         </a:defRPr>
       </a:lvl4pPr>
-      <a:lvl5pPr marL="5759806" algn="l" defTabSz="2879903" rtl="0" eaLnBrk="1" latinLnBrk="0" hangingPunct="1">
-        <a:defRPr sz="5669" kern="1200">
+      <a:lvl5pPr marL="4169847" algn="l" defTabSz="2084923" rtl="0" eaLnBrk="1" latinLnBrk="0" hangingPunct="1">
+        <a:defRPr sz="4104" kern="1200">
           <a:solidFill>
             <a:schemeClr val="tx1"/>
           </a:solidFill>
@@ -3467,8 +3467,8 @@
           <a:cs typeface="+mn-cs"/>
         </a:defRPr>
       </a:lvl5pPr>
-      <a:lvl6pPr marL="7199757" algn="l" defTabSz="2879903" rtl="0" eaLnBrk="1" latinLnBrk="0" hangingPunct="1">
-        <a:defRPr sz="5669" kern="1200">
+      <a:lvl6pPr marL="5212309" algn="l" defTabSz="2084923" rtl="0" eaLnBrk="1" latinLnBrk="0" hangingPunct="1">
+        <a:defRPr sz="4104" kern="1200">
           <a:solidFill>
             <a:schemeClr val="tx1"/>
           </a:solidFill>
@@ -3477,8 +3477,8 @@
           <a:cs typeface="+mn-cs"/>
         </a:defRPr>
       </a:lvl6pPr>
-      <a:lvl7pPr marL="8639708" algn="l" defTabSz="2879903" rtl="0" eaLnBrk="1" latinLnBrk="0" hangingPunct="1">
-        <a:defRPr sz="5669" kern="1200">
+      <a:lvl7pPr marL="6254770" algn="l" defTabSz="2084923" rtl="0" eaLnBrk="1" latinLnBrk="0" hangingPunct="1">
+        <a:defRPr sz="4104" kern="1200">
           <a:solidFill>
             <a:schemeClr val="tx1"/>
           </a:solidFill>
@@ -3487,8 +3487,8 @@
           <a:cs typeface="+mn-cs"/>
         </a:defRPr>
       </a:lvl7pPr>
-      <a:lvl8pPr marL="10079660" algn="l" defTabSz="2879903" rtl="0" eaLnBrk="1" latinLnBrk="0" hangingPunct="1">
-        <a:defRPr sz="5669" kern="1200">
+      <a:lvl8pPr marL="7297232" algn="l" defTabSz="2084923" rtl="0" eaLnBrk="1" latinLnBrk="0" hangingPunct="1">
+        <a:defRPr sz="4104" kern="1200">
           <a:solidFill>
             <a:schemeClr val="tx1"/>
           </a:solidFill>
@@ -3497,8 +3497,8 @@
           <a:cs typeface="+mn-cs"/>
         </a:defRPr>
       </a:lvl8pPr>
-      <a:lvl9pPr marL="11519611" algn="l" defTabSz="2879903" rtl="0" eaLnBrk="1" latinLnBrk="0" hangingPunct="1">
-        <a:defRPr sz="5669" kern="1200">
+      <a:lvl9pPr marL="8339694" algn="l" defTabSz="2084923" rtl="0" eaLnBrk="1" latinLnBrk="0" hangingPunct="1">
+        <a:defRPr sz="4104" kern="1200">
           <a:solidFill>
             <a:schemeClr val="tx1"/>
           </a:solidFill>
@@ -3625,7 +3625,7 @@
         </p:nvCxnSpPr>
         <p:spPr>
           <a:xfrm>
-            <a:off x="10330385" y="7393150"/>
+            <a:off x="10330387" y="4411825"/>
             <a:ext cx="5601691" cy="0"/>
           </a:xfrm>
           <a:prstGeom prst="line">
@@ -3661,8 +3661,8 @@
         </p:nvSpPr>
         <p:spPr>
           <a:xfrm>
-            <a:off x="15447995" y="6436890"/>
-            <a:ext cx="370542" cy="940335"/>
+            <a:off x="15447999" y="3455568"/>
+            <a:ext cx="370541" cy="940335"/>
           </a:xfrm>
           <a:prstGeom prst="rect">
             <a:avLst/>
@@ -3709,7 +3709,7 @@
         </p:nvCxnSpPr>
         <p:spPr>
           <a:xfrm>
-            <a:off x="14194893" y="7176100"/>
+            <a:off x="14194893" y="4194775"/>
             <a:ext cx="608106" cy="0"/>
           </a:xfrm>
           <a:prstGeom prst="line">
@@ -3751,8 +3751,8 @@
         </p:nvSpPr>
         <p:spPr>
           <a:xfrm>
-            <a:off x="15000463" y="7212689"/>
-            <a:ext cx="168298" cy="168298"/>
+            <a:off x="15000464" y="4231365"/>
+            <a:ext cx="168299" cy="168299"/>
           </a:xfrm>
           <a:prstGeom prst="ellipse">
             <a:avLst/>
@@ -3797,7 +3797,7 @@
         </p:nvSpPr>
         <p:spPr>
           <a:xfrm>
-            <a:off x="10464472" y="6914626"/>
+            <a:off x="10464472" y="3933300"/>
             <a:ext cx="464094" cy="464094"/>
           </a:xfrm>
           <a:prstGeom prst="ellipse">
@@ -3843,8 +3843,8 @@
         </p:nvSpPr>
         <p:spPr>
           <a:xfrm>
-            <a:off x="14900262" y="7021323"/>
-            <a:ext cx="355689" cy="355689"/>
+            <a:off x="14900264" y="4040000"/>
+            <a:ext cx="355688" cy="355688"/>
           </a:xfrm>
           <a:prstGeom prst="ellipse">
             <a:avLst/>
@@ -3895,8 +3895,8 @@
         </p:nvCxnSpPr>
         <p:spPr>
           <a:xfrm flipV="1">
-            <a:off x="15068566" y="7025291"/>
-            <a:ext cx="0" cy="178778"/>
+            <a:off x="15068566" y="4043968"/>
+            <a:ext cx="0" cy="178779"/>
           </a:xfrm>
           <a:prstGeom prst="straightConnector1">
             <a:avLst/>
@@ -3940,8 +3940,8 @@
         </p:nvCxnSpPr>
         <p:spPr>
           <a:xfrm rot="-1200000" flipH="1" flipV="1">
-            <a:off x="14932475" y="7105207"/>
-            <a:ext cx="91839" cy="146292"/>
+            <a:off x="14932478" y="4123885"/>
+            <a:ext cx="91839" cy="146291"/>
           </a:xfrm>
           <a:prstGeom prst="straightConnector1">
             <a:avLst/>
@@ -3985,8 +3985,8 @@
         </p:nvCxnSpPr>
         <p:spPr>
           <a:xfrm rot="1200000" flipV="1">
-            <a:off x="15173258" y="7070084"/>
-            <a:ext cx="0" cy="178778"/>
+            <a:off x="15173258" y="4088761"/>
+            <a:ext cx="0" cy="178779"/>
           </a:xfrm>
           <a:prstGeom prst="straightConnector1">
             <a:avLst/>
@@ -4028,8 +4028,8 @@
         </p:nvSpPr>
         <p:spPr>
           <a:xfrm>
-            <a:off x="13712443" y="7021323"/>
-            <a:ext cx="355689" cy="355689"/>
+            <a:off x="13712444" y="4040000"/>
+            <a:ext cx="355688" cy="355688"/>
           </a:xfrm>
           <a:prstGeom prst="ellipse">
             <a:avLst/>
@@ -4078,8 +4078,8 @@
         </p:nvSpPr>
         <p:spPr>
           <a:xfrm>
-            <a:off x="10326584" y="6653859"/>
-            <a:ext cx="739298" cy="739298"/>
+            <a:off x="10326587" y="3672536"/>
+            <a:ext cx="739299" cy="739299"/>
           </a:xfrm>
           <a:prstGeom prst="ellipse">
             <a:avLst/>
@@ -4130,8 +4130,8 @@
         </p:nvCxnSpPr>
         <p:spPr>
           <a:xfrm flipH="1" flipV="1">
-            <a:off x="10680329" y="6669760"/>
-            <a:ext cx="4420" cy="233997"/>
+            <a:off x="10680330" y="3688437"/>
+            <a:ext cx="4420" cy="233996"/>
           </a:xfrm>
           <a:prstGeom prst="straightConnector1">
             <a:avLst/>
@@ -4175,8 +4175,8 @@
         </p:nvCxnSpPr>
         <p:spPr>
           <a:xfrm rot="3000000" flipH="1" flipV="1">
-            <a:off x="10928366" y="6793224"/>
-            <a:ext cx="4420" cy="197998"/>
+            <a:off x="10928367" y="3811903"/>
+            <a:ext cx="4420" cy="197997"/>
           </a:xfrm>
           <a:prstGeom prst="straightConnector1">
             <a:avLst/>
@@ -4220,8 +4220,8 @@
         </p:nvCxnSpPr>
         <p:spPr>
           <a:xfrm rot="-3000000" flipH="1" flipV="1">
-            <a:off x="10462265" y="6801177"/>
-            <a:ext cx="4420" cy="197998"/>
+            <a:off x="10462265" y="3819855"/>
+            <a:ext cx="4420" cy="197997"/>
           </a:xfrm>
           <a:prstGeom prst="straightConnector1">
             <a:avLst/>
@@ -4265,7 +4265,7 @@
         </p:nvCxnSpPr>
         <p:spPr>
           <a:xfrm>
-            <a:off x="10326578" y="9194615"/>
+            <a:off x="10326581" y="6213290"/>
             <a:ext cx="5601691" cy="0"/>
           </a:xfrm>
           <a:prstGeom prst="line">
@@ -4301,8 +4301,8 @@
         </p:nvSpPr>
         <p:spPr>
           <a:xfrm>
-            <a:off x="15444188" y="8238354"/>
-            <a:ext cx="370542" cy="940335"/>
+            <a:off x="15444191" y="5257031"/>
+            <a:ext cx="370541" cy="940335"/>
           </a:xfrm>
           <a:prstGeom prst="rect">
             <a:avLst/>
@@ -4347,8 +4347,8 @@
         </p:nvSpPr>
         <p:spPr>
           <a:xfrm>
-            <a:off x="12109056" y="8007769"/>
-            <a:ext cx="1786965" cy="985828"/>
+            <a:off x="12109059" y="5026446"/>
+            <a:ext cx="1786965" cy="985829"/>
           </a:xfrm>
           <a:custGeom>
             <a:avLst/>
@@ -4434,8 +4434,8 @@
         </p:nvCxnSpPr>
         <p:spPr>
           <a:xfrm>
-            <a:off x="13896013" y="8977564"/>
-            <a:ext cx="903176" cy="0"/>
+            <a:off x="13896016" y="5996239"/>
+            <a:ext cx="903175" cy="0"/>
           </a:xfrm>
           <a:prstGeom prst="line">
             <a:avLst/>
@@ -4477,8 +4477,8 @@
         </p:nvCxnSpPr>
         <p:spPr>
           <a:xfrm>
-            <a:off x="14194884" y="8882405"/>
-            <a:ext cx="508887" cy="0"/>
+            <a:off x="14194885" y="5901081"/>
+            <a:ext cx="508886" cy="0"/>
           </a:xfrm>
           <a:prstGeom prst="straightConnector1">
             <a:avLst/>
@@ -4522,8 +4522,8 @@
         </p:nvCxnSpPr>
         <p:spPr>
           <a:xfrm rot="10800000">
-            <a:off x="14194884" y="9059410"/>
-            <a:ext cx="508887" cy="0"/>
+            <a:off x="14194885" y="6078085"/>
+            <a:ext cx="508886" cy="0"/>
           </a:xfrm>
           <a:prstGeom prst="straightConnector1">
             <a:avLst/>
@@ -4568,7 +4568,7 @@
         </p:nvCxnSpPr>
         <p:spPr>
           <a:xfrm flipH="1" flipV="1">
-            <a:off x="11531209" y="8977575"/>
+            <a:off x="11531209" y="5996253"/>
             <a:ext cx="577846" cy="16033"/>
           </a:xfrm>
           <a:prstGeom prst="straightConnector1">
@@ -4610,8 +4610,8 @@
         </p:nvSpPr>
         <p:spPr>
           <a:xfrm>
-            <a:off x="14896456" y="8822781"/>
-            <a:ext cx="355689" cy="355689"/>
+            <a:off x="14896458" y="5841458"/>
+            <a:ext cx="355688" cy="355688"/>
           </a:xfrm>
           <a:prstGeom prst="ellipse">
             <a:avLst/>
@@ -4665,8 +4665,8 @@
         </p:nvSpPr>
         <p:spPr>
           <a:xfrm>
-            <a:off x="13708637" y="8822781"/>
-            <a:ext cx="355689" cy="355689"/>
+            <a:off x="13708638" y="5841458"/>
+            <a:ext cx="355688" cy="355688"/>
           </a:xfrm>
           <a:prstGeom prst="ellipse">
             <a:avLst/>
@@ -4715,8 +4715,8 @@
         </p:nvSpPr>
         <p:spPr>
           <a:xfrm>
-            <a:off x="11165155" y="8822781"/>
-            <a:ext cx="355689" cy="355689"/>
+            <a:off x="11165157" y="5841458"/>
+            <a:ext cx="355688" cy="355688"/>
           </a:xfrm>
           <a:prstGeom prst="ellipse">
             <a:avLst/>
@@ -4765,8 +4765,8 @@
         </p:nvSpPr>
         <p:spPr>
           <a:xfrm>
-            <a:off x="10322777" y="8455317"/>
-            <a:ext cx="739298" cy="739298"/>
+            <a:off x="10322779" y="5473994"/>
+            <a:ext cx="739299" cy="739299"/>
           </a:xfrm>
           <a:prstGeom prst="ellipse">
             <a:avLst/>
@@ -4822,7 +4822,7 @@
         </p:nvCxnSpPr>
         <p:spPr>
           <a:xfrm>
-            <a:off x="4517550" y="7393150"/>
+            <a:off x="4517553" y="4411825"/>
             <a:ext cx="5601691" cy="0"/>
           </a:xfrm>
           <a:prstGeom prst="line">
@@ -4858,8 +4858,8 @@
         </p:nvSpPr>
         <p:spPr>
           <a:xfrm>
-            <a:off x="7019531" y="6436890"/>
-            <a:ext cx="370542" cy="940335"/>
+            <a:off x="7019534" y="3455568"/>
+            <a:ext cx="370541" cy="940335"/>
           </a:xfrm>
           <a:prstGeom prst="rect">
             <a:avLst/>
@@ -4906,7 +4906,7 @@
         </p:nvCxnSpPr>
         <p:spPr>
           <a:xfrm>
-            <a:off x="8382064" y="7176100"/>
+            <a:off x="8382065" y="4194775"/>
             <a:ext cx="608106" cy="0"/>
           </a:xfrm>
           <a:prstGeom prst="line">
@@ -4948,8 +4948,8 @@
         </p:nvSpPr>
         <p:spPr>
           <a:xfrm>
-            <a:off x="9187621" y="7212689"/>
-            <a:ext cx="168298" cy="168298"/>
+            <a:off x="9187622" y="4231365"/>
+            <a:ext cx="168299" cy="168299"/>
           </a:xfrm>
           <a:prstGeom prst="ellipse">
             <a:avLst/>
@@ -4994,7 +4994,7 @@
         </p:nvSpPr>
         <p:spPr>
           <a:xfrm>
-            <a:off x="4651644" y="6914626"/>
+            <a:off x="4651644" y="3933300"/>
             <a:ext cx="464094" cy="464094"/>
           </a:xfrm>
           <a:prstGeom prst="ellipse">
@@ -5040,8 +5040,8 @@
         </p:nvSpPr>
         <p:spPr>
           <a:xfrm>
-            <a:off x="9087427" y="7021323"/>
-            <a:ext cx="355689" cy="355689"/>
+            <a:off x="9087429" y="4040000"/>
+            <a:ext cx="355688" cy="355688"/>
           </a:xfrm>
           <a:prstGeom prst="ellipse">
             <a:avLst/>
@@ -5092,8 +5092,8 @@
         </p:nvCxnSpPr>
         <p:spPr>
           <a:xfrm flipV="1">
-            <a:off x="9255724" y="7025291"/>
-            <a:ext cx="0" cy="178778"/>
+            <a:off x="9255724" y="4043968"/>
+            <a:ext cx="0" cy="178779"/>
           </a:xfrm>
           <a:prstGeom prst="straightConnector1">
             <a:avLst/>
@@ -5137,8 +5137,8 @@
         </p:nvCxnSpPr>
         <p:spPr>
           <a:xfrm rot="-1200000" flipH="1" flipV="1">
-            <a:off x="9119640" y="7105207"/>
-            <a:ext cx="91839" cy="146292"/>
+            <a:off x="9119643" y="4123885"/>
+            <a:ext cx="91839" cy="146291"/>
           </a:xfrm>
           <a:prstGeom prst="straightConnector1">
             <a:avLst/>
@@ -5182,8 +5182,8 @@
         </p:nvCxnSpPr>
         <p:spPr>
           <a:xfrm rot="1200000" flipV="1">
-            <a:off x="9360422" y="7070084"/>
-            <a:ext cx="0" cy="178778"/>
+            <a:off x="9360423" y="4088761"/>
+            <a:ext cx="0" cy="178779"/>
           </a:xfrm>
           <a:prstGeom prst="straightConnector1">
             <a:avLst/>
@@ -5225,8 +5225,8 @@
         </p:nvSpPr>
         <p:spPr>
           <a:xfrm>
-            <a:off x="7899601" y="7021323"/>
-            <a:ext cx="355689" cy="355689"/>
+            <a:off x="7899602" y="4040000"/>
+            <a:ext cx="355688" cy="355688"/>
           </a:xfrm>
           <a:prstGeom prst="ellipse">
             <a:avLst/>
@@ -5275,8 +5275,8 @@
         </p:nvSpPr>
         <p:spPr>
           <a:xfrm>
-            <a:off x="4513748" y="6653859"/>
-            <a:ext cx="739298" cy="739298"/>
+            <a:off x="4513751" y="3672536"/>
+            <a:ext cx="739299" cy="739299"/>
           </a:xfrm>
           <a:prstGeom prst="ellipse">
             <a:avLst/>
@@ -5327,8 +5327,8 @@
         </p:nvCxnSpPr>
         <p:spPr>
           <a:xfrm flipH="1" flipV="1">
-            <a:off x="4867487" y="6669760"/>
-            <a:ext cx="4420" cy="233997"/>
+            <a:off x="4867488" y="3688437"/>
+            <a:ext cx="4420" cy="233996"/>
           </a:xfrm>
           <a:prstGeom prst="straightConnector1">
             <a:avLst/>
@@ -5372,8 +5372,8 @@
         </p:nvCxnSpPr>
         <p:spPr>
           <a:xfrm rot="3000000" flipH="1" flipV="1">
-            <a:off x="5115538" y="6793224"/>
-            <a:ext cx="4420" cy="197998"/>
+            <a:off x="5115539" y="3811903"/>
+            <a:ext cx="4420" cy="197997"/>
           </a:xfrm>
           <a:prstGeom prst="straightConnector1">
             <a:avLst/>
@@ -5417,8 +5417,8 @@
         </p:nvCxnSpPr>
         <p:spPr>
           <a:xfrm rot="-3000000" flipH="1" flipV="1">
-            <a:off x="4649423" y="6801177"/>
-            <a:ext cx="4420" cy="197998"/>
+            <a:off x="4649423" y="3819855"/>
+            <a:ext cx="4420" cy="197997"/>
           </a:xfrm>
           <a:prstGeom prst="straightConnector1">
             <a:avLst/>
@@ -5462,7 +5462,7 @@
         </p:nvCxnSpPr>
         <p:spPr>
           <a:xfrm>
-            <a:off x="4513743" y="9194615"/>
+            <a:off x="4513745" y="6213290"/>
             <a:ext cx="5601691" cy="0"/>
           </a:xfrm>
           <a:prstGeom prst="line">
@@ -5498,8 +5498,8 @@
         </p:nvSpPr>
         <p:spPr>
           <a:xfrm>
-            <a:off x="7015724" y="8238354"/>
-            <a:ext cx="370542" cy="940335"/>
+            <a:off x="7015728" y="5257031"/>
+            <a:ext cx="370541" cy="940335"/>
           </a:xfrm>
           <a:prstGeom prst="rect">
             <a:avLst/>
@@ -5544,8 +5544,8 @@
         </p:nvSpPr>
         <p:spPr>
           <a:xfrm>
-            <a:off x="6296214" y="8007769"/>
-            <a:ext cx="1786965" cy="985828"/>
+            <a:off x="6296217" y="5026446"/>
+            <a:ext cx="1786965" cy="985829"/>
           </a:xfrm>
           <a:custGeom>
             <a:avLst/>
@@ -5631,8 +5631,8 @@
         </p:nvCxnSpPr>
         <p:spPr>
           <a:xfrm>
-            <a:off x="8083171" y="8977564"/>
-            <a:ext cx="903176" cy="0"/>
+            <a:off x="8083175" y="5996239"/>
+            <a:ext cx="903175" cy="0"/>
           </a:xfrm>
           <a:prstGeom prst="line">
             <a:avLst/>
@@ -5674,8 +5674,8 @@
         </p:nvCxnSpPr>
         <p:spPr>
           <a:xfrm>
-            <a:off x="8382049" y="8882405"/>
-            <a:ext cx="508887" cy="0"/>
+            <a:off x="8382051" y="5901081"/>
+            <a:ext cx="508886" cy="0"/>
           </a:xfrm>
           <a:prstGeom prst="straightConnector1">
             <a:avLst/>
@@ -5719,8 +5719,8 @@
         </p:nvCxnSpPr>
         <p:spPr>
           <a:xfrm rot="10800000">
-            <a:off x="8382049" y="9059410"/>
-            <a:ext cx="508887" cy="0"/>
+            <a:off x="8382051" y="6078085"/>
+            <a:ext cx="508886" cy="0"/>
           </a:xfrm>
           <a:prstGeom prst="straightConnector1">
             <a:avLst/>
@@ -5765,7 +5765,7 @@
         </p:nvCxnSpPr>
         <p:spPr>
           <a:xfrm flipH="1" flipV="1">
-            <a:off x="5718367" y="8977575"/>
+            <a:off x="5718367" y="5996253"/>
             <a:ext cx="577846" cy="16033"/>
           </a:xfrm>
           <a:prstGeom prst="straightConnector1">
@@ -5807,8 +5807,8 @@
         </p:nvSpPr>
         <p:spPr>
           <a:xfrm>
-            <a:off x="9083620" y="8822781"/>
-            <a:ext cx="355689" cy="355689"/>
+            <a:off x="9083622" y="5841458"/>
+            <a:ext cx="355688" cy="355688"/>
           </a:xfrm>
           <a:prstGeom prst="ellipse">
             <a:avLst/>
@@ -5862,8 +5862,8 @@
         </p:nvSpPr>
         <p:spPr>
           <a:xfrm>
-            <a:off x="7895795" y="8822781"/>
-            <a:ext cx="355689" cy="355689"/>
+            <a:off x="7895797" y="5841458"/>
+            <a:ext cx="355688" cy="355688"/>
           </a:xfrm>
           <a:prstGeom prst="ellipse">
             <a:avLst/>
@@ -5912,8 +5912,8 @@
         </p:nvSpPr>
         <p:spPr>
           <a:xfrm>
-            <a:off x="5352312" y="8822781"/>
-            <a:ext cx="355689" cy="355689"/>
+            <a:off x="5352313" y="5841458"/>
+            <a:ext cx="355688" cy="355688"/>
           </a:xfrm>
           <a:prstGeom prst="ellipse">
             <a:avLst/>
@@ -5962,8 +5962,8 @@
         </p:nvSpPr>
         <p:spPr>
           <a:xfrm>
-            <a:off x="4509942" y="8455317"/>
-            <a:ext cx="739298" cy="739298"/>
+            <a:off x="4509944" y="5473994"/>
+            <a:ext cx="739299" cy="739299"/>
           </a:xfrm>
           <a:prstGeom prst="ellipse">
             <a:avLst/>
@@ -6019,7 +6019,7 @@
         </p:nvCxnSpPr>
         <p:spPr>
           <a:xfrm>
-            <a:off x="4527514" y="13101120"/>
+            <a:off x="4527517" y="10119794"/>
             <a:ext cx="5601691" cy="0"/>
           </a:xfrm>
           <a:prstGeom prst="line">
@@ -6055,8 +6055,8 @@
         </p:nvSpPr>
         <p:spPr>
           <a:xfrm>
-            <a:off x="6309986" y="11914275"/>
-            <a:ext cx="1786965" cy="985828"/>
+            <a:off x="6309988" y="8932952"/>
+            <a:ext cx="1786965" cy="985829"/>
           </a:xfrm>
           <a:custGeom>
             <a:avLst/>
@@ -6142,8 +6142,8 @@
         </p:nvCxnSpPr>
         <p:spPr>
           <a:xfrm>
-            <a:off x="8096943" y="12884069"/>
-            <a:ext cx="903176" cy="0"/>
+            <a:off x="8096946" y="9902744"/>
+            <a:ext cx="903175" cy="0"/>
           </a:xfrm>
           <a:prstGeom prst="line">
             <a:avLst/>
@@ -6185,8 +6185,8 @@
         </p:nvCxnSpPr>
         <p:spPr>
           <a:xfrm>
-            <a:off x="8395820" y="12788911"/>
-            <a:ext cx="508887" cy="0"/>
+            <a:off x="8395820" y="9807585"/>
+            <a:ext cx="508886" cy="0"/>
           </a:xfrm>
           <a:prstGeom prst="straightConnector1">
             <a:avLst/>
@@ -6230,8 +6230,8 @@
         </p:nvCxnSpPr>
         <p:spPr>
           <a:xfrm rot="10800000">
-            <a:off x="8395820" y="12965915"/>
-            <a:ext cx="508887" cy="0"/>
+            <a:off x="8395820" y="9984589"/>
+            <a:ext cx="508886" cy="0"/>
           </a:xfrm>
           <a:prstGeom prst="straightConnector1">
             <a:avLst/>
@@ -6276,7 +6276,7 @@
         </p:nvCxnSpPr>
         <p:spPr>
           <a:xfrm flipH="1" flipV="1">
-            <a:off x="5732138" y="12884081"/>
+            <a:off x="5732138" y="9902759"/>
             <a:ext cx="577846" cy="16033"/>
           </a:xfrm>
           <a:prstGeom prst="straightConnector1">
@@ -6318,8 +6318,8 @@
         </p:nvSpPr>
         <p:spPr>
           <a:xfrm>
-            <a:off x="9097391" y="12729286"/>
-            <a:ext cx="355689" cy="355689"/>
+            <a:off x="9097393" y="9747962"/>
+            <a:ext cx="355688" cy="355688"/>
           </a:xfrm>
           <a:prstGeom prst="ellipse">
             <a:avLst/>
@@ -6373,8 +6373,8 @@
         </p:nvSpPr>
         <p:spPr>
           <a:xfrm>
-            <a:off x="5366084" y="12729286"/>
-            <a:ext cx="355689" cy="355689"/>
+            <a:off x="5366086" y="9747962"/>
+            <a:ext cx="355688" cy="355688"/>
           </a:xfrm>
           <a:prstGeom prst="ellipse">
             <a:avLst/>
@@ -6423,8 +6423,8 @@
         </p:nvSpPr>
         <p:spPr>
           <a:xfrm>
-            <a:off x="4523713" y="12361822"/>
-            <a:ext cx="739298" cy="739298"/>
+            <a:off x="4523716" y="9380500"/>
+            <a:ext cx="739299" cy="739299"/>
           </a:xfrm>
           <a:prstGeom prst="ellipse">
             <a:avLst/>
@@ -6480,7 +6480,7 @@
         </p:nvCxnSpPr>
         <p:spPr>
           <a:xfrm>
-            <a:off x="4527514" y="11110951"/>
+            <a:off x="4527517" y="8129625"/>
             <a:ext cx="5601691" cy="0"/>
           </a:xfrm>
           <a:prstGeom prst="line">
@@ -6516,8 +6516,8 @@
         </p:nvSpPr>
         <p:spPr>
           <a:xfrm>
-            <a:off x="9097391" y="10739117"/>
-            <a:ext cx="355689" cy="355689"/>
+            <a:off x="9097393" y="7757794"/>
+            <a:ext cx="355688" cy="355688"/>
           </a:xfrm>
           <a:prstGeom prst="ellipse">
             <a:avLst/>
@@ -6571,8 +6571,8 @@
         </p:nvSpPr>
         <p:spPr>
           <a:xfrm>
-            <a:off x="5366084" y="10739117"/>
-            <a:ext cx="355689" cy="355689"/>
+            <a:off x="5366086" y="7757794"/>
+            <a:ext cx="355688" cy="355688"/>
           </a:xfrm>
           <a:prstGeom prst="ellipse">
             <a:avLst/>
@@ -6621,8 +6621,8 @@
         </p:nvSpPr>
         <p:spPr>
           <a:xfrm>
-            <a:off x="4523713" y="10371660"/>
-            <a:ext cx="739298" cy="739298"/>
+            <a:off x="4523716" y="7390337"/>
+            <a:ext cx="739299" cy="739299"/>
           </a:xfrm>
           <a:prstGeom prst="ellipse">
             <a:avLst/>
@@ -6678,7 +6678,7 @@
         </p:nvCxnSpPr>
         <p:spPr>
           <a:xfrm flipH="1">
-            <a:off x="5844755" y="10916954"/>
+            <a:off x="5844758" y="7935630"/>
             <a:ext cx="3143621" cy="0"/>
           </a:xfrm>
           <a:prstGeom prst="straightConnector1">
@@ -6717,7 +6717,7 @@
         </p:nvSpPr>
         <p:spPr>
           <a:xfrm>
-            <a:off x="4866515" y="3826748"/>
+            <a:off x="4866518" y="845423"/>
             <a:ext cx="5128327" cy="707886"/>
           </a:xfrm>
           <a:prstGeom prst="rect">
@@ -6755,7 +6755,7 @@
         </p:nvSpPr>
         <p:spPr>
           <a:xfrm>
-            <a:off x="10815149" y="3823114"/>
+            <a:off x="10815151" y="841790"/>
             <a:ext cx="3932487" cy="707886"/>
           </a:xfrm>
           <a:prstGeom prst="rect">
@@ -6793,7 +6793,7 @@
         </p:nvSpPr>
         <p:spPr>
           <a:xfrm>
-            <a:off x="4784529" y="4385201"/>
+            <a:off x="4784532" y="1403877"/>
             <a:ext cx="5484771" cy="707886"/>
           </a:xfrm>
           <a:prstGeom prst="rect">
@@ -6831,7 +6831,7 @@
         </p:nvSpPr>
         <p:spPr>
           <a:xfrm>
-            <a:off x="10446656" y="4380421"/>
+            <a:off x="10446657" y="1399096"/>
             <a:ext cx="5997732" cy="707886"/>
           </a:xfrm>
           <a:prstGeom prst="rect">
@@ -6869,7 +6869,7 @@
         </p:nvSpPr>
         <p:spPr>
           <a:xfrm>
-            <a:off x="18949232" y="1753380"/>
+            <a:off x="18949232" y="-1227944"/>
             <a:ext cx="9950224" cy="707886"/>
           </a:xfrm>
           <a:prstGeom prst="rect">
@@ -6907,7 +6907,7 @@
         </p:nvSpPr>
         <p:spPr>
           <a:xfrm>
-            <a:off x="5182864" y="2626326"/>
+            <a:off x="5182866" y="-354997"/>
             <a:ext cx="10021590" cy="1323439"/>
           </a:xfrm>
           <a:prstGeom prst="rect">
@@ -6958,7 +6958,7 @@
         </p:nvCxnSpPr>
         <p:spPr>
           <a:xfrm>
-            <a:off x="22941264" y="7451603"/>
+            <a:off x="22941266" y="4470278"/>
             <a:ext cx="5601691" cy="0"/>
           </a:xfrm>
           <a:prstGeom prst="line">
@@ -6994,8 +6994,8 @@
         </p:nvSpPr>
         <p:spPr>
           <a:xfrm>
-            <a:off x="28058873" y="6495342"/>
-            <a:ext cx="370542" cy="940335"/>
+            <a:off x="28058876" y="3514019"/>
+            <a:ext cx="370541" cy="940335"/>
           </a:xfrm>
           <a:prstGeom prst="rect">
             <a:avLst/>
@@ -7042,7 +7042,7 @@
         </p:nvCxnSpPr>
         <p:spPr>
           <a:xfrm>
-            <a:off x="26805779" y="7234546"/>
+            <a:off x="26805779" y="4253221"/>
             <a:ext cx="608106" cy="0"/>
           </a:xfrm>
           <a:prstGeom prst="line">
@@ -7084,8 +7084,8 @@
         </p:nvSpPr>
         <p:spPr>
           <a:xfrm>
-            <a:off x="26323322" y="7079769"/>
-            <a:ext cx="355689" cy="355689"/>
+            <a:off x="26323324" y="4098446"/>
+            <a:ext cx="355688" cy="355688"/>
           </a:xfrm>
           <a:prstGeom prst="ellipse">
             <a:avLst/>
@@ -7136,7 +7136,7 @@
         </p:nvCxnSpPr>
         <p:spPr>
           <a:xfrm>
-            <a:off x="22937457" y="9253061"/>
+            <a:off x="22937460" y="6271736"/>
             <a:ext cx="5601691" cy="0"/>
           </a:xfrm>
           <a:prstGeom prst="line">
@@ -7172,8 +7172,8 @@
         </p:nvSpPr>
         <p:spPr>
           <a:xfrm>
-            <a:off x="28055067" y="8296800"/>
-            <a:ext cx="370542" cy="940335"/>
+            <a:off x="28055070" y="5315477"/>
+            <a:ext cx="370541" cy="940335"/>
           </a:xfrm>
           <a:prstGeom prst="rect">
             <a:avLst/>
@@ -7218,8 +7218,8 @@
         </p:nvSpPr>
         <p:spPr>
           <a:xfrm>
-            <a:off x="24719935" y="8066215"/>
-            <a:ext cx="1786965" cy="985828"/>
+            <a:off x="24719937" y="5084892"/>
+            <a:ext cx="1786965" cy="985829"/>
           </a:xfrm>
           <a:custGeom>
             <a:avLst/>
@@ -7305,8 +7305,8 @@
         </p:nvCxnSpPr>
         <p:spPr>
           <a:xfrm>
-            <a:off x="26506892" y="9036010"/>
-            <a:ext cx="903176" cy="0"/>
+            <a:off x="26506896" y="6054685"/>
+            <a:ext cx="903175" cy="0"/>
           </a:xfrm>
           <a:prstGeom prst="line">
             <a:avLst/>
@@ -7349,7 +7349,7 @@
         </p:nvCxnSpPr>
         <p:spPr>
           <a:xfrm flipH="1" flipV="1">
-            <a:off x="24142088" y="9036021"/>
+            <a:off x="24142088" y="6054699"/>
             <a:ext cx="577846" cy="16033"/>
           </a:xfrm>
           <a:prstGeom prst="straightConnector1">
@@ -7391,8 +7391,8 @@
         </p:nvSpPr>
         <p:spPr>
           <a:xfrm>
-            <a:off x="27507334" y="8881226"/>
-            <a:ext cx="355689" cy="355689"/>
+            <a:off x="27507336" y="5899902"/>
+            <a:ext cx="355688" cy="355688"/>
           </a:xfrm>
           <a:prstGeom prst="ellipse">
             <a:avLst/>
@@ -7446,8 +7446,8 @@
         </p:nvSpPr>
         <p:spPr>
           <a:xfrm>
-            <a:off x="26319516" y="8881226"/>
-            <a:ext cx="355689" cy="355689"/>
+            <a:off x="26319518" y="5899902"/>
+            <a:ext cx="355688" cy="355688"/>
           </a:xfrm>
           <a:prstGeom prst="ellipse">
             <a:avLst/>
@@ -7496,8 +7496,8 @@
         </p:nvSpPr>
         <p:spPr>
           <a:xfrm>
-            <a:off x="23776033" y="8881226"/>
-            <a:ext cx="355689" cy="355689"/>
+            <a:off x="23776036" y="5899902"/>
+            <a:ext cx="355688" cy="355688"/>
           </a:xfrm>
           <a:prstGeom prst="ellipse">
             <a:avLst/>
@@ -7546,8 +7546,8 @@
         </p:nvSpPr>
         <p:spPr>
           <a:xfrm>
-            <a:off x="22933656" y="8513770"/>
-            <a:ext cx="739298" cy="739298"/>
+            <a:off x="22933659" y="5532447"/>
+            <a:ext cx="739299" cy="739299"/>
           </a:xfrm>
           <a:prstGeom prst="ellipse">
             <a:avLst/>
@@ -7603,7 +7603,7 @@
         </p:nvCxnSpPr>
         <p:spPr>
           <a:xfrm>
-            <a:off x="17128428" y="7451603"/>
+            <a:off x="17128430" y="4470278"/>
             <a:ext cx="5601691" cy="0"/>
           </a:xfrm>
           <a:prstGeom prst="line">
@@ -7639,8 +7639,8 @@
         </p:nvSpPr>
         <p:spPr>
           <a:xfrm>
-            <a:off x="19630410" y="6495342"/>
-            <a:ext cx="370542" cy="940335"/>
+            <a:off x="19630414" y="3514019"/>
+            <a:ext cx="370541" cy="940335"/>
           </a:xfrm>
           <a:prstGeom prst="rect">
             <a:avLst/>
@@ -7687,7 +7687,7 @@
         </p:nvCxnSpPr>
         <p:spPr>
           <a:xfrm>
-            <a:off x="20992936" y="7234546"/>
+            <a:off x="20992935" y="4253221"/>
             <a:ext cx="608106" cy="0"/>
           </a:xfrm>
           <a:prstGeom prst="line">
@@ -7729,8 +7729,8 @@
         </p:nvSpPr>
         <p:spPr>
           <a:xfrm>
-            <a:off x="20510487" y="7079769"/>
-            <a:ext cx="355689" cy="355689"/>
+            <a:off x="20510488" y="4098446"/>
+            <a:ext cx="355688" cy="355688"/>
           </a:xfrm>
           <a:prstGeom prst="ellipse">
             <a:avLst/>
@@ -7781,7 +7781,7 @@
         </p:nvCxnSpPr>
         <p:spPr>
           <a:xfrm>
-            <a:off x="17124622" y="9253061"/>
+            <a:off x="17124624" y="6271736"/>
             <a:ext cx="5601691" cy="0"/>
           </a:xfrm>
           <a:prstGeom prst="line">
@@ -7817,8 +7817,8 @@
         </p:nvSpPr>
         <p:spPr>
           <a:xfrm>
-            <a:off x="19626610" y="8296800"/>
-            <a:ext cx="370542" cy="940335"/>
+            <a:off x="19626614" y="5315477"/>
+            <a:ext cx="370541" cy="940335"/>
           </a:xfrm>
           <a:prstGeom prst="rect">
             <a:avLst/>
@@ -7863,8 +7863,8 @@
         </p:nvSpPr>
         <p:spPr>
           <a:xfrm>
-            <a:off x="18907093" y="8066215"/>
-            <a:ext cx="1786965" cy="985828"/>
+            <a:off x="18907095" y="5084892"/>
+            <a:ext cx="1786965" cy="985829"/>
           </a:xfrm>
           <a:custGeom>
             <a:avLst/>
@@ -7950,8 +7950,8 @@
         </p:nvCxnSpPr>
         <p:spPr>
           <a:xfrm>
-            <a:off x="20694050" y="9036010"/>
-            <a:ext cx="903176" cy="0"/>
+            <a:off x="20694053" y="6054685"/>
+            <a:ext cx="903175" cy="0"/>
           </a:xfrm>
           <a:prstGeom prst="line">
             <a:avLst/>
@@ -7994,7 +7994,7 @@
         </p:nvCxnSpPr>
         <p:spPr>
           <a:xfrm flipH="1" flipV="1">
-            <a:off x="18329246" y="9036021"/>
+            <a:off x="18329246" y="6054699"/>
             <a:ext cx="577846" cy="16033"/>
           </a:xfrm>
           <a:prstGeom prst="straightConnector1">
@@ -8036,8 +8036,8 @@
         </p:nvSpPr>
         <p:spPr>
           <a:xfrm>
-            <a:off x="21694499" y="8881226"/>
-            <a:ext cx="355689" cy="355689"/>
+            <a:off x="21694500" y="5899902"/>
+            <a:ext cx="355688" cy="355688"/>
           </a:xfrm>
           <a:prstGeom prst="ellipse">
             <a:avLst/>
@@ -8091,8 +8091,8 @@
         </p:nvSpPr>
         <p:spPr>
           <a:xfrm>
-            <a:off x="20506680" y="8881226"/>
-            <a:ext cx="355689" cy="355689"/>
+            <a:off x="20506682" y="5899902"/>
+            <a:ext cx="355688" cy="355688"/>
           </a:xfrm>
           <a:prstGeom prst="ellipse">
             <a:avLst/>
@@ -8141,8 +8141,8 @@
         </p:nvSpPr>
         <p:spPr>
           <a:xfrm>
-            <a:off x="17963191" y="8881226"/>
-            <a:ext cx="355689" cy="355689"/>
+            <a:off x="17963193" y="5899902"/>
+            <a:ext cx="355688" cy="355688"/>
           </a:xfrm>
           <a:prstGeom prst="ellipse">
             <a:avLst/>
@@ -8191,8 +8191,8 @@
         </p:nvSpPr>
         <p:spPr>
           <a:xfrm>
-            <a:off x="17120820" y="8513770"/>
-            <a:ext cx="739298" cy="739298"/>
+            <a:off x="17120823" y="5532447"/>
+            <a:ext cx="739299" cy="739299"/>
           </a:xfrm>
           <a:prstGeom prst="ellipse">
             <a:avLst/>
@@ -8248,7 +8248,7 @@
         </p:nvCxnSpPr>
         <p:spPr>
           <a:xfrm>
-            <a:off x="17156587" y="13445692"/>
+            <a:off x="17156590" y="10464366"/>
             <a:ext cx="5601691" cy="0"/>
           </a:xfrm>
           <a:prstGeom prst="line">
@@ -8284,8 +8284,8 @@
         </p:nvSpPr>
         <p:spPr>
           <a:xfrm>
-            <a:off x="18939058" y="12258847"/>
-            <a:ext cx="1786965" cy="985828"/>
+            <a:off x="18939060" y="9277524"/>
+            <a:ext cx="1786965" cy="985829"/>
           </a:xfrm>
           <a:custGeom>
             <a:avLst/>
@@ -8371,8 +8371,8 @@
         </p:nvCxnSpPr>
         <p:spPr>
           <a:xfrm>
-            <a:off x="20726022" y="13228641"/>
-            <a:ext cx="903176" cy="0"/>
+            <a:off x="20726026" y="10247316"/>
+            <a:ext cx="903175" cy="0"/>
           </a:xfrm>
           <a:prstGeom prst="line">
             <a:avLst/>
@@ -8415,7 +8415,7 @@
         </p:nvCxnSpPr>
         <p:spPr>
           <a:xfrm flipH="1" flipV="1">
-            <a:off x="18361211" y="13228652"/>
+            <a:off x="18361212" y="10247330"/>
             <a:ext cx="577846" cy="16033"/>
           </a:xfrm>
           <a:prstGeom prst="straightConnector1">
@@ -8457,8 +8457,8 @@
         </p:nvSpPr>
         <p:spPr>
           <a:xfrm>
-            <a:off x="21726464" y="13073864"/>
-            <a:ext cx="355689" cy="355689"/>
+            <a:off x="21726466" y="10092541"/>
+            <a:ext cx="355688" cy="355688"/>
           </a:xfrm>
           <a:prstGeom prst="ellipse">
             <a:avLst/>
@@ -8512,8 +8512,8 @@
         </p:nvSpPr>
         <p:spPr>
           <a:xfrm>
-            <a:off x="17995163" y="13073858"/>
-            <a:ext cx="355689" cy="355689"/>
+            <a:off x="17995164" y="10092534"/>
+            <a:ext cx="355688" cy="355688"/>
           </a:xfrm>
           <a:prstGeom prst="ellipse">
             <a:avLst/>
@@ -8562,8 +8562,8 @@
         </p:nvSpPr>
         <p:spPr>
           <a:xfrm>
-            <a:off x="17152786" y="12706401"/>
-            <a:ext cx="739298" cy="739298"/>
+            <a:off x="17152788" y="9725078"/>
+            <a:ext cx="739299" cy="739299"/>
           </a:xfrm>
           <a:prstGeom prst="ellipse">
             <a:avLst/>
@@ -8619,7 +8619,7 @@
         </p:nvCxnSpPr>
         <p:spPr>
           <a:xfrm>
-            <a:off x="17156587" y="11455523"/>
+            <a:off x="17156590" y="8474197"/>
             <a:ext cx="5601691" cy="0"/>
           </a:xfrm>
           <a:prstGeom prst="line">
@@ -8655,8 +8655,8 @@
         </p:nvSpPr>
         <p:spPr>
           <a:xfrm>
-            <a:off x="21726464" y="11083695"/>
-            <a:ext cx="355689" cy="355689"/>
+            <a:off x="21726466" y="8102372"/>
+            <a:ext cx="355688" cy="355688"/>
           </a:xfrm>
           <a:prstGeom prst="ellipse">
             <a:avLst/>
@@ -8710,8 +8710,8 @@
         </p:nvSpPr>
         <p:spPr>
           <a:xfrm>
-            <a:off x="17995163" y="11083695"/>
-            <a:ext cx="355689" cy="355689"/>
+            <a:off x="17995164" y="8102372"/>
+            <a:ext cx="355688" cy="355688"/>
           </a:xfrm>
           <a:prstGeom prst="ellipse">
             <a:avLst/>
@@ -8760,8 +8760,8 @@
         </p:nvSpPr>
         <p:spPr>
           <a:xfrm>
-            <a:off x="17152786" y="10716232"/>
-            <a:ext cx="739298" cy="739298"/>
+            <a:off x="17152788" y="7734909"/>
+            <a:ext cx="739299" cy="739299"/>
           </a:xfrm>
           <a:prstGeom prst="ellipse">
             <a:avLst/>
@@ -8817,7 +8817,7 @@
         </p:nvCxnSpPr>
         <p:spPr>
           <a:xfrm flipH="1">
-            <a:off x="18473834" y="11261532"/>
+            <a:off x="18473837" y="8280206"/>
             <a:ext cx="3143621" cy="0"/>
           </a:xfrm>
           <a:prstGeom prst="straightConnector1">
@@ -8856,8 +8856,8 @@
         </p:nvSpPr>
         <p:spPr>
           <a:xfrm>
-            <a:off x="17130647" y="6707545"/>
-            <a:ext cx="739298" cy="739298"/>
+            <a:off x="17130650" y="3726223"/>
+            <a:ext cx="739299" cy="739299"/>
           </a:xfrm>
           <a:prstGeom prst="ellipse">
             <a:avLst/>
@@ -8911,8 +8911,8 @@
         </p:nvSpPr>
         <p:spPr>
           <a:xfrm>
-            <a:off x="21688612" y="7093368"/>
-            <a:ext cx="355689" cy="355689"/>
+            <a:off x="21688614" y="4112045"/>
+            <a:ext cx="355688" cy="355688"/>
           </a:xfrm>
           <a:prstGeom prst="ellipse">
             <a:avLst/>
@@ -8966,8 +8966,8 @@
         </p:nvSpPr>
         <p:spPr>
           <a:xfrm>
-            <a:off x="22941269" y="6703685"/>
-            <a:ext cx="739298" cy="739298"/>
+            <a:off x="22941271" y="3722363"/>
+            <a:ext cx="739299" cy="739299"/>
           </a:xfrm>
           <a:prstGeom prst="ellipse">
             <a:avLst/>
@@ -9021,8 +9021,8 @@
         </p:nvSpPr>
         <p:spPr>
           <a:xfrm>
-            <a:off x="27506694" y="7084475"/>
-            <a:ext cx="355689" cy="355689"/>
+            <a:off x="27506695" y="4103151"/>
+            <a:ext cx="355688" cy="355688"/>
           </a:xfrm>
           <a:prstGeom prst="ellipse">
             <a:avLst/>
@@ -9076,7 +9076,7 @@
         </p:nvSpPr>
         <p:spPr>
           <a:xfrm>
-            <a:off x="20126020" y="2689985"/>
+            <a:off x="20126024" y="-291337"/>
             <a:ext cx="7294561" cy="1323439"/>
           </a:xfrm>
           <a:prstGeom prst="rect">
@@ -9125,7 +9125,7 @@
         </p:nvSpPr>
         <p:spPr>
           <a:xfrm>
-            <a:off x="17321589" y="3953386"/>
+            <a:off x="17321592" y="972061"/>
             <a:ext cx="5128327" cy="707886"/>
           </a:xfrm>
           <a:prstGeom prst="rect">
@@ -9163,7 +9163,7 @@
         </p:nvSpPr>
         <p:spPr>
           <a:xfrm>
-            <a:off x="23270216" y="3949753"/>
+            <a:off x="23270219" y="968428"/>
             <a:ext cx="3932487" cy="707886"/>
           </a:xfrm>
           <a:prstGeom prst="rect">
@@ -9201,7 +9201,7 @@
         </p:nvSpPr>
         <p:spPr>
           <a:xfrm>
-            <a:off x="17239597" y="4511839"/>
+            <a:off x="17239600" y="1530515"/>
             <a:ext cx="5484771" cy="707886"/>
           </a:xfrm>
           <a:prstGeom prst="rect">
@@ -9239,7 +9239,7 @@
         </p:nvSpPr>
         <p:spPr>
           <a:xfrm>
-            <a:off x="22901723" y="4507053"/>
+            <a:off x="22901723" y="1525728"/>
             <a:ext cx="5997732" cy="707886"/>
           </a:xfrm>
           <a:prstGeom prst="rect">
@@ -9279,7 +9279,7 @@
         </p:nvCxnSpPr>
         <p:spPr>
           <a:xfrm>
-            <a:off x="31325845" y="7212739"/>
+            <a:off x="31325847" y="4231414"/>
             <a:ext cx="5601691" cy="0"/>
           </a:xfrm>
           <a:prstGeom prst="line">
@@ -9315,8 +9315,8 @@
         </p:nvSpPr>
         <p:spPr>
           <a:xfrm>
-            <a:off x="33827826" y="6256479"/>
-            <a:ext cx="370542" cy="940335"/>
+            <a:off x="33827829" y="3275156"/>
+            <a:ext cx="370541" cy="940335"/>
           </a:xfrm>
           <a:prstGeom prst="rect">
             <a:avLst/>
@@ -9361,8 +9361,8 @@
         </p:nvSpPr>
         <p:spPr>
           <a:xfrm>
-            <a:off x="35995916" y="7032278"/>
-            <a:ext cx="168298" cy="168298"/>
+            <a:off x="35995917" y="4050955"/>
+            <a:ext cx="168299" cy="168299"/>
           </a:xfrm>
           <a:prstGeom prst="ellipse">
             <a:avLst/>
@@ -9407,7 +9407,7 @@
         </p:nvSpPr>
         <p:spPr>
           <a:xfrm>
-            <a:off x="31459932" y="6734215"/>
+            <a:off x="31459932" y="3752890"/>
             <a:ext cx="464094" cy="464094"/>
           </a:xfrm>
           <a:prstGeom prst="ellipse">
@@ -9453,8 +9453,8 @@
         </p:nvSpPr>
         <p:spPr>
           <a:xfrm>
-            <a:off x="35895715" y="6840905"/>
-            <a:ext cx="355689" cy="355689"/>
+            <a:off x="35895717" y="3859582"/>
+            <a:ext cx="355688" cy="355688"/>
           </a:xfrm>
           <a:prstGeom prst="ellipse">
             <a:avLst/>
@@ -9505,8 +9505,8 @@
         </p:nvCxnSpPr>
         <p:spPr>
           <a:xfrm flipV="1">
-            <a:off x="36064019" y="6844880"/>
-            <a:ext cx="0" cy="178778"/>
+            <a:off x="36064020" y="3863557"/>
+            <a:ext cx="0" cy="178779"/>
           </a:xfrm>
           <a:prstGeom prst="straightConnector1">
             <a:avLst/>
@@ -9550,8 +9550,8 @@
         </p:nvCxnSpPr>
         <p:spPr>
           <a:xfrm rot="-1200000" flipH="1" flipV="1">
-            <a:off x="35927935" y="6924796"/>
-            <a:ext cx="91839" cy="146292"/>
+            <a:off x="35927939" y="3943475"/>
+            <a:ext cx="91839" cy="146291"/>
           </a:xfrm>
           <a:prstGeom prst="straightConnector1">
             <a:avLst/>
@@ -9595,8 +9595,8 @@
         </p:nvCxnSpPr>
         <p:spPr>
           <a:xfrm rot="1200000" flipV="1">
-            <a:off x="36168718" y="6889673"/>
-            <a:ext cx="0" cy="178778"/>
+            <a:off x="36168718" y="3908351"/>
+            <a:ext cx="0" cy="178779"/>
           </a:xfrm>
           <a:prstGeom prst="straightConnector1">
             <a:avLst/>
@@ -9638,8 +9638,8 @@
         </p:nvSpPr>
         <p:spPr>
           <a:xfrm>
-            <a:off x="31322037" y="6473448"/>
-            <a:ext cx="739298" cy="739298"/>
+            <a:off x="31322040" y="3492125"/>
+            <a:ext cx="739299" cy="739299"/>
           </a:xfrm>
           <a:prstGeom prst="ellipse">
             <a:avLst/>
@@ -9690,8 +9690,8 @@
         </p:nvCxnSpPr>
         <p:spPr>
           <a:xfrm flipH="1" flipV="1">
-            <a:off x="31675789" y="6489343"/>
-            <a:ext cx="4420" cy="233997"/>
+            <a:off x="31675789" y="3508019"/>
+            <a:ext cx="4420" cy="233996"/>
           </a:xfrm>
           <a:prstGeom prst="straightConnector1">
             <a:avLst/>
@@ -9735,8 +9735,8 @@
         </p:nvCxnSpPr>
         <p:spPr>
           <a:xfrm rot="3000000" flipH="1" flipV="1">
-            <a:off x="31923819" y="6612813"/>
-            <a:ext cx="4420" cy="197998"/>
+            <a:off x="31923820" y="3631491"/>
+            <a:ext cx="4420" cy="197997"/>
           </a:xfrm>
           <a:prstGeom prst="straightConnector1">
             <a:avLst/>
@@ -9780,8 +9780,8 @@
         </p:nvCxnSpPr>
         <p:spPr>
           <a:xfrm rot="-3000000" flipH="1" flipV="1">
-            <a:off x="31457719" y="6620766"/>
-            <a:ext cx="4420" cy="197998"/>
+            <a:off x="31457720" y="3639444"/>
+            <a:ext cx="4420" cy="197997"/>
           </a:xfrm>
           <a:prstGeom prst="straightConnector1">
             <a:avLst/>
@@ -9825,7 +9825,7 @@
         </p:nvCxnSpPr>
         <p:spPr>
           <a:xfrm>
-            <a:off x="31322038" y="9014197"/>
+            <a:off x="31322041" y="6032872"/>
             <a:ext cx="5601691" cy="0"/>
           </a:xfrm>
           <a:prstGeom prst="line">
@@ -9861,8 +9861,8 @@
         </p:nvSpPr>
         <p:spPr>
           <a:xfrm>
-            <a:off x="33824020" y="8057943"/>
-            <a:ext cx="370542" cy="940335"/>
+            <a:off x="33824023" y="5076621"/>
+            <a:ext cx="370541" cy="940335"/>
           </a:xfrm>
           <a:prstGeom prst="rect">
             <a:avLst/>
@@ -9907,8 +9907,8 @@
         </p:nvSpPr>
         <p:spPr>
           <a:xfrm>
-            <a:off x="33104509" y="7827352"/>
-            <a:ext cx="1786965" cy="985828"/>
+            <a:off x="33104512" y="4846029"/>
+            <a:ext cx="1786965" cy="985829"/>
           </a:xfrm>
           <a:custGeom>
             <a:avLst/>
@@ -9994,8 +9994,8 @@
         </p:nvCxnSpPr>
         <p:spPr>
           <a:xfrm>
-            <a:off x="34891466" y="8797147"/>
-            <a:ext cx="903176" cy="0"/>
+            <a:off x="34891469" y="5815823"/>
+            <a:ext cx="903175" cy="0"/>
           </a:xfrm>
           <a:prstGeom prst="line">
             <a:avLst/>
@@ -10038,7 +10038,7 @@
         </p:nvCxnSpPr>
         <p:spPr>
           <a:xfrm flipH="1" flipV="1">
-            <a:off x="32526662" y="8797158"/>
+            <a:off x="32526662" y="5815836"/>
             <a:ext cx="577846" cy="16033"/>
           </a:xfrm>
           <a:prstGeom prst="straightConnector1">
@@ -10080,8 +10080,8 @@
         </p:nvSpPr>
         <p:spPr>
           <a:xfrm>
-            <a:off x="35891915" y="8642370"/>
-            <a:ext cx="355689" cy="355689"/>
+            <a:off x="35891917" y="5661048"/>
+            <a:ext cx="355688" cy="355688"/>
           </a:xfrm>
           <a:prstGeom prst="ellipse">
             <a:avLst/>
@@ -10135,8 +10135,8 @@
         </p:nvSpPr>
         <p:spPr>
           <a:xfrm>
-            <a:off x="32160608" y="8642370"/>
-            <a:ext cx="355689" cy="355689"/>
+            <a:off x="32160610" y="5661048"/>
+            <a:ext cx="355688" cy="355688"/>
           </a:xfrm>
           <a:prstGeom prst="ellipse">
             <a:avLst/>
@@ -10185,8 +10185,8 @@
         </p:nvSpPr>
         <p:spPr>
           <a:xfrm>
-            <a:off x="31318230" y="8274906"/>
-            <a:ext cx="739298" cy="739298"/>
+            <a:off x="31318232" y="5293583"/>
+            <a:ext cx="739299" cy="739299"/>
           </a:xfrm>
           <a:prstGeom prst="ellipse">
             <a:avLst/>
@@ -10242,7 +10242,7 @@
         </p:nvCxnSpPr>
         <p:spPr>
           <a:xfrm>
-            <a:off x="31286119" y="13141440"/>
+            <a:off x="31286122" y="10160115"/>
             <a:ext cx="5601691" cy="0"/>
           </a:xfrm>
           <a:prstGeom prst="line">
@@ -10278,8 +10278,8 @@
         </p:nvSpPr>
         <p:spPr>
           <a:xfrm>
-            <a:off x="33068590" y="11954595"/>
-            <a:ext cx="1786965" cy="985828"/>
+            <a:off x="33068593" y="8973273"/>
+            <a:ext cx="1786965" cy="985829"/>
           </a:xfrm>
           <a:custGeom>
             <a:avLst/>
@@ -10365,8 +10365,8 @@
         </p:nvCxnSpPr>
         <p:spPr>
           <a:xfrm>
-            <a:off x="34855547" y="12924389"/>
-            <a:ext cx="903176" cy="0"/>
+            <a:off x="34855550" y="9943064"/>
+            <a:ext cx="903175" cy="0"/>
           </a:xfrm>
           <a:prstGeom prst="line">
             <a:avLst/>
@@ -10409,7 +10409,7 @@
         </p:nvCxnSpPr>
         <p:spPr>
           <a:xfrm flipH="1" flipV="1">
-            <a:off x="32490743" y="12924400"/>
+            <a:off x="32490744" y="9943078"/>
             <a:ext cx="577846" cy="16033"/>
           </a:xfrm>
           <a:prstGeom prst="straightConnector1">
@@ -10451,8 +10451,8 @@
         </p:nvSpPr>
         <p:spPr>
           <a:xfrm>
-            <a:off x="35855996" y="12769612"/>
-            <a:ext cx="355689" cy="355689"/>
+            <a:off x="35855998" y="9788289"/>
+            <a:ext cx="355688" cy="355688"/>
           </a:xfrm>
           <a:prstGeom prst="ellipse">
             <a:avLst/>
@@ -10506,8 +10506,8 @@
         </p:nvSpPr>
         <p:spPr>
           <a:xfrm>
-            <a:off x="32124688" y="12769606"/>
-            <a:ext cx="355689" cy="355689"/>
+            <a:off x="32124690" y="9788283"/>
+            <a:ext cx="355688" cy="355688"/>
           </a:xfrm>
           <a:prstGeom prst="ellipse">
             <a:avLst/>
@@ -10556,8 +10556,8 @@
         </p:nvSpPr>
         <p:spPr>
           <a:xfrm>
-            <a:off x="31282317" y="12402149"/>
-            <a:ext cx="739298" cy="739298"/>
+            <a:off x="31282319" y="9420826"/>
+            <a:ext cx="739299" cy="739299"/>
           </a:xfrm>
           <a:prstGeom prst="ellipse">
             <a:avLst/>
@@ -10611,8 +10611,8 @@
         </p:nvSpPr>
         <p:spPr>
           <a:xfrm>
-            <a:off x="33340942" y="8032276"/>
-            <a:ext cx="1338190" cy="985828"/>
+            <a:off x="33340945" y="5050954"/>
+            <a:ext cx="1338189" cy="985829"/>
           </a:xfrm>
           <a:prstGeom prst="rect">
             <a:avLst/>
@@ -10669,7 +10669,7 @@
         </p:nvSpPr>
         <p:spPr>
           <a:xfrm>
-            <a:off x="29998843" y="4026472"/>
+            <a:off x="29998843" y="1045148"/>
             <a:ext cx="6657592" cy="707886"/>
           </a:xfrm>
           <a:prstGeom prst="rect">
@@ -10709,7 +10709,7 @@
         </p:nvCxnSpPr>
         <p:spPr>
           <a:xfrm>
-            <a:off x="31279492" y="11288789"/>
+            <a:off x="31279495" y="8307464"/>
             <a:ext cx="5601691" cy="0"/>
           </a:xfrm>
           <a:prstGeom prst="line">
@@ -10745,8 +10745,8 @@
         </p:nvSpPr>
         <p:spPr>
           <a:xfrm>
-            <a:off x="33061963" y="10101944"/>
-            <a:ext cx="1786965" cy="985828"/>
+            <a:off x="33061965" y="7120622"/>
+            <a:ext cx="1786965" cy="985829"/>
           </a:xfrm>
           <a:custGeom>
             <a:avLst/>
@@ -10832,8 +10832,8 @@
         </p:nvCxnSpPr>
         <p:spPr>
           <a:xfrm>
-            <a:off x="34848920" y="11071739"/>
-            <a:ext cx="903176" cy="0"/>
+            <a:off x="34848923" y="8090414"/>
+            <a:ext cx="903175" cy="0"/>
           </a:xfrm>
           <a:prstGeom prst="line">
             <a:avLst/>
@@ -10876,7 +10876,7 @@
         </p:nvCxnSpPr>
         <p:spPr>
           <a:xfrm flipH="1" flipV="1">
-            <a:off x="32484116" y="11071750"/>
+            <a:off x="32484115" y="8090429"/>
             <a:ext cx="577846" cy="16033"/>
           </a:xfrm>
           <a:prstGeom prst="straightConnector1">
@@ -10918,8 +10918,8 @@
         </p:nvSpPr>
         <p:spPr>
           <a:xfrm>
-            <a:off x="35849369" y="10916955"/>
-            <a:ext cx="355689" cy="355689"/>
+            <a:off x="35849370" y="7935632"/>
+            <a:ext cx="355688" cy="355688"/>
           </a:xfrm>
           <a:prstGeom prst="ellipse">
             <a:avLst/>
@@ -10973,8 +10973,8 @@
         </p:nvSpPr>
         <p:spPr>
           <a:xfrm>
-            <a:off x="32118061" y="10916955"/>
-            <a:ext cx="355689" cy="355689"/>
+            <a:off x="32118063" y="7935632"/>
+            <a:ext cx="355688" cy="355688"/>
           </a:xfrm>
           <a:prstGeom prst="ellipse">
             <a:avLst/>
@@ -11023,8 +11023,8 @@
         </p:nvSpPr>
         <p:spPr>
           <a:xfrm>
-            <a:off x="31275691" y="10549498"/>
-            <a:ext cx="739298" cy="739298"/>
+            <a:off x="31275693" y="7568176"/>
+            <a:ext cx="739299" cy="739299"/>
           </a:xfrm>
           <a:prstGeom prst="ellipse">
             <a:avLst/>
@@ -11078,8 +11078,8 @@
         </p:nvSpPr>
         <p:spPr>
           <a:xfrm>
-            <a:off x="33780900" y="10348462"/>
-            <a:ext cx="370542" cy="940335"/>
+            <a:off x="33780903" y="7367139"/>
+            <a:ext cx="370541" cy="940335"/>
           </a:xfrm>
           <a:prstGeom prst="rect">
             <a:avLst/>
@@ -11126,8 +11126,8 @@
         </p:nvCxnSpPr>
         <p:spPr>
           <a:xfrm>
-            <a:off x="38082159" y="7273659"/>
-            <a:ext cx="6800530" cy="0"/>
+            <a:off x="38082160" y="4292333"/>
+            <a:ext cx="6800531" cy="0"/>
           </a:xfrm>
           <a:prstGeom prst="line">
             <a:avLst/>
@@ -11162,8 +11162,8 @@
         </p:nvSpPr>
         <p:spPr>
           <a:xfrm>
-            <a:off x="41782987" y="6317398"/>
-            <a:ext cx="370542" cy="940335"/>
+            <a:off x="41782990" y="3336076"/>
+            <a:ext cx="370541" cy="940335"/>
           </a:xfrm>
           <a:prstGeom prst="rect">
             <a:avLst/>
@@ -11208,8 +11208,8 @@
         </p:nvSpPr>
         <p:spPr>
           <a:xfrm>
-            <a:off x="43951070" y="7093184"/>
-            <a:ext cx="168298" cy="168298"/>
+            <a:off x="43951072" y="4111861"/>
+            <a:ext cx="168299" cy="168299"/>
           </a:xfrm>
           <a:prstGeom prst="ellipse">
             <a:avLst/>
@@ -11254,7 +11254,7 @@
         </p:nvSpPr>
         <p:spPr>
           <a:xfrm>
-            <a:off x="38139748" y="6795141"/>
+            <a:off x="38139749" y="3813816"/>
             <a:ext cx="464094" cy="464094"/>
           </a:xfrm>
           <a:prstGeom prst="ellipse">
@@ -11300,8 +11300,8 @@
         </p:nvSpPr>
         <p:spPr>
           <a:xfrm>
-            <a:off x="43850876" y="6901824"/>
-            <a:ext cx="355689" cy="355689"/>
+            <a:off x="43850878" y="3920500"/>
+            <a:ext cx="355688" cy="355688"/>
           </a:xfrm>
           <a:prstGeom prst="ellipse">
             <a:avLst/>
@@ -11352,8 +11352,8 @@
         </p:nvCxnSpPr>
         <p:spPr>
           <a:xfrm flipV="1">
-            <a:off x="44019173" y="6905800"/>
-            <a:ext cx="0" cy="178778"/>
+            <a:off x="44019174" y="3924478"/>
+            <a:ext cx="0" cy="178779"/>
           </a:xfrm>
           <a:prstGeom prst="straightConnector1">
             <a:avLst/>
@@ -11397,8 +11397,8 @@
         </p:nvCxnSpPr>
         <p:spPr>
           <a:xfrm flipH="1" flipV="1">
-            <a:off x="43860838" y="7005839"/>
-            <a:ext cx="136338" cy="106059"/>
+            <a:off x="43860840" y="4024517"/>
+            <a:ext cx="136339" cy="106059"/>
           </a:xfrm>
           <a:prstGeom prst="straightConnector1">
             <a:avLst/>
@@ -11442,8 +11442,8 @@
         </p:nvCxnSpPr>
         <p:spPr>
           <a:xfrm flipV="1">
-            <a:off x="44093298" y="6955987"/>
-            <a:ext cx="61146" cy="167991"/>
+            <a:off x="44093301" y="3974662"/>
+            <a:ext cx="61147" cy="167992"/>
           </a:xfrm>
           <a:prstGeom prst="straightConnector1">
             <a:avLst/>
@@ -11485,8 +11485,8 @@
         </p:nvSpPr>
         <p:spPr>
           <a:xfrm>
-            <a:off x="38001846" y="6534361"/>
-            <a:ext cx="739298" cy="739298"/>
+            <a:off x="38001849" y="3553039"/>
+            <a:ext cx="739299" cy="739299"/>
           </a:xfrm>
           <a:prstGeom prst="ellipse">
             <a:avLst/>
@@ -11537,8 +11537,8 @@
         </p:nvCxnSpPr>
         <p:spPr>
           <a:xfrm flipH="1" flipV="1">
-            <a:off x="38355592" y="6550262"/>
-            <a:ext cx="4420" cy="233997"/>
+            <a:off x="38355592" y="3568939"/>
+            <a:ext cx="4420" cy="233996"/>
           </a:xfrm>
           <a:prstGeom prst="straightConnector1">
             <a:avLst/>
@@ -11582,8 +11582,8 @@
         </p:nvCxnSpPr>
         <p:spPr>
           <a:xfrm flipV="1">
-            <a:off x="38531420" y="6707402"/>
-            <a:ext cx="148838" cy="130658"/>
+            <a:off x="38531420" y="3726078"/>
+            <a:ext cx="148838" cy="130659"/>
           </a:xfrm>
           <a:prstGeom prst="straightConnector1">
             <a:avLst/>
@@ -11627,7 +11627,7 @@
         </p:nvCxnSpPr>
         <p:spPr>
           <a:xfrm flipH="1" flipV="1">
-            <a:off x="38062472" y="6718750"/>
+            <a:off x="38062472" y="3737429"/>
             <a:ext cx="154518" cy="123885"/>
           </a:xfrm>
           <a:prstGeom prst="straightConnector1">
@@ -11672,7 +11672,7 @@
         </p:nvCxnSpPr>
         <p:spPr>
           <a:xfrm>
-            <a:off x="38025330" y="9075116"/>
+            <a:off x="38025333" y="6093791"/>
             <a:ext cx="6853563" cy="0"/>
           </a:xfrm>
           <a:prstGeom prst="line">
@@ -11708,8 +11708,8 @@
         </p:nvSpPr>
         <p:spPr>
           <a:xfrm>
-            <a:off x="41779180" y="8118856"/>
-            <a:ext cx="370542" cy="940335"/>
+            <a:off x="41779183" y="5137533"/>
+            <a:ext cx="370541" cy="940335"/>
           </a:xfrm>
           <a:prstGeom prst="rect">
             <a:avLst/>
@@ -11754,8 +11754,8 @@
         </p:nvSpPr>
         <p:spPr>
           <a:xfrm>
-            <a:off x="41059663" y="7888271"/>
-            <a:ext cx="1786965" cy="985828"/>
+            <a:off x="41059666" y="4906948"/>
+            <a:ext cx="1786965" cy="985829"/>
           </a:xfrm>
           <a:custGeom>
             <a:avLst/>
@@ -11841,8 +11841,8 @@
         </p:nvCxnSpPr>
         <p:spPr>
           <a:xfrm>
-            <a:off x="42846620" y="8858066"/>
-            <a:ext cx="903176" cy="0"/>
+            <a:off x="42846623" y="5876741"/>
+            <a:ext cx="903175" cy="0"/>
           </a:xfrm>
           <a:prstGeom prst="line">
             <a:avLst/>
@@ -11885,7 +11885,7 @@
         </p:nvCxnSpPr>
         <p:spPr>
           <a:xfrm flipH="1" flipV="1">
-            <a:off x="40481816" y="8858077"/>
+            <a:off x="40481817" y="5876755"/>
             <a:ext cx="577846" cy="16033"/>
           </a:xfrm>
           <a:prstGeom prst="straightConnector1">
@@ -11927,8 +11927,8 @@
         </p:nvSpPr>
         <p:spPr>
           <a:xfrm>
-            <a:off x="43847069" y="8703289"/>
-            <a:ext cx="355689" cy="355689"/>
+            <a:off x="43847071" y="5721966"/>
+            <a:ext cx="355688" cy="355688"/>
           </a:xfrm>
           <a:prstGeom prst="ellipse">
             <a:avLst/>
@@ -11982,8 +11982,8 @@
         </p:nvSpPr>
         <p:spPr>
           <a:xfrm>
-            <a:off x="40115761" y="8703282"/>
-            <a:ext cx="355689" cy="355689"/>
+            <a:off x="40115763" y="5721958"/>
+            <a:ext cx="355688" cy="355688"/>
           </a:xfrm>
           <a:prstGeom prst="ellipse">
             <a:avLst/>
@@ -12032,8 +12032,8 @@
         </p:nvSpPr>
         <p:spPr>
           <a:xfrm>
-            <a:off x="38058199" y="8335825"/>
-            <a:ext cx="739298" cy="739298"/>
+            <a:off x="38058202" y="5354502"/>
+            <a:ext cx="739299" cy="739299"/>
           </a:xfrm>
           <a:prstGeom prst="ellipse">
             <a:avLst/>
@@ -12087,7 +12087,7 @@
         </p:nvSpPr>
         <p:spPr>
           <a:xfrm>
-            <a:off x="38014786" y="8657428"/>
+            <a:off x="38014787" y="5676103"/>
             <a:ext cx="2858698" cy="401982"/>
           </a:xfrm>
           <a:prstGeom prst="rect">
@@ -12147,7 +12147,7 @@
         </p:nvCxnSpPr>
         <p:spPr>
           <a:xfrm>
-            <a:off x="37864912" y="11334649"/>
+            <a:off x="37864914" y="8353324"/>
             <a:ext cx="6853563" cy="0"/>
           </a:xfrm>
           <a:prstGeom prst="line">
@@ -12183,8 +12183,8 @@
         </p:nvSpPr>
         <p:spPr>
           <a:xfrm>
-            <a:off x="43686651" y="10962814"/>
-            <a:ext cx="355689" cy="355689"/>
+            <a:off x="43686653" y="7981491"/>
+            <a:ext cx="355688" cy="355688"/>
           </a:xfrm>
           <a:prstGeom prst="ellipse">
             <a:avLst/>
@@ -12238,8 +12238,8 @@
         </p:nvSpPr>
         <p:spPr>
           <a:xfrm>
-            <a:off x="38692026" y="10962814"/>
-            <a:ext cx="355689" cy="355689"/>
+            <a:off x="38692027" y="7981491"/>
+            <a:ext cx="355688" cy="355688"/>
           </a:xfrm>
           <a:prstGeom prst="ellipse">
             <a:avLst/>
@@ -12288,8 +12288,8 @@
         </p:nvSpPr>
         <p:spPr>
           <a:xfrm>
-            <a:off x="37897774" y="10595358"/>
-            <a:ext cx="739298" cy="739298"/>
+            <a:off x="37897776" y="7614035"/>
+            <a:ext cx="739299" cy="739299"/>
           </a:xfrm>
           <a:prstGeom prst="ellipse">
             <a:avLst/>
@@ -12345,8 +12345,8 @@
         </p:nvCxnSpPr>
         <p:spPr>
           <a:xfrm flipH="1">
-            <a:off x="39200219" y="11110958"/>
-            <a:ext cx="4211935" cy="0"/>
+            <a:off x="39200220" y="8129633"/>
+            <a:ext cx="4211936" cy="0"/>
           </a:xfrm>
           <a:prstGeom prst="straightConnector1">
             <a:avLst/>
@@ -12386,7 +12386,7 @@
         </p:nvCxnSpPr>
         <p:spPr>
           <a:xfrm>
-            <a:off x="37808073" y="13189613"/>
+            <a:off x="37808076" y="10208288"/>
             <a:ext cx="6853563" cy="0"/>
           </a:xfrm>
           <a:prstGeom prst="line">
@@ -12422,8 +12422,8 @@
         </p:nvSpPr>
         <p:spPr>
           <a:xfrm>
-            <a:off x="43629812" y="12817785"/>
-            <a:ext cx="355689" cy="355689"/>
+            <a:off x="43629813" y="9836461"/>
+            <a:ext cx="355688" cy="355688"/>
           </a:xfrm>
           <a:prstGeom prst="ellipse">
             <a:avLst/>
@@ -12477,8 +12477,8 @@
         </p:nvSpPr>
         <p:spPr>
           <a:xfrm>
-            <a:off x="40175234" y="12817785"/>
-            <a:ext cx="355689" cy="355689"/>
+            <a:off x="40175236" y="9836461"/>
+            <a:ext cx="355688" cy="355688"/>
           </a:xfrm>
           <a:prstGeom prst="ellipse">
             <a:avLst/>
@@ -12527,8 +12527,8 @@
         </p:nvSpPr>
         <p:spPr>
           <a:xfrm>
-            <a:off x="37840942" y="12450322"/>
-            <a:ext cx="739298" cy="739298"/>
+            <a:off x="37840944" y="9468999"/>
+            <a:ext cx="739299" cy="739299"/>
           </a:xfrm>
           <a:prstGeom prst="ellipse">
             <a:avLst/>
@@ -12584,8 +12584,8 @@
         </p:nvCxnSpPr>
         <p:spPr>
           <a:xfrm flipH="1">
-            <a:off x="40608804" y="12965922"/>
-            <a:ext cx="2746520" cy="0"/>
+            <a:off x="40608806" y="9984597"/>
+            <a:ext cx="2746521" cy="0"/>
           </a:xfrm>
           <a:prstGeom prst="straightConnector1">
             <a:avLst/>
@@ -12623,7 +12623,7 @@
         </p:nvSpPr>
         <p:spPr>
           <a:xfrm>
-            <a:off x="37502544" y="4026472"/>
+            <a:off x="37502544" y="1045148"/>
             <a:ext cx="5516254" cy="707886"/>
           </a:xfrm>
           <a:prstGeom prst="rect">
@@ -12661,8 +12661,8 @@
         </p:nvSpPr>
         <p:spPr>
           <a:xfrm>
-            <a:off x="30666225" y="2633733"/>
-            <a:ext cx="13012472" cy="1323439"/>
+            <a:off x="30666227" y="-347589"/>
+            <a:ext cx="13012473" cy="1323439"/>
           </a:xfrm>
           <a:prstGeom prst="rect">
             <a:avLst/>
@@ -12712,7 +12712,7 @@
         </p:nvCxnSpPr>
         <p:spPr>
           <a:xfrm>
-            <a:off x="10252742" y="13222873"/>
+            <a:off x="10252745" y="10241547"/>
             <a:ext cx="5601691" cy="0"/>
           </a:xfrm>
           <a:prstGeom prst="line">
@@ -12748,8 +12748,8 @@
         </p:nvSpPr>
         <p:spPr>
           <a:xfrm>
-            <a:off x="12035214" y="12036028"/>
-            <a:ext cx="1786965" cy="985828"/>
+            <a:off x="12035216" y="9054705"/>
+            <a:ext cx="1786965" cy="985829"/>
           </a:xfrm>
           <a:custGeom>
             <a:avLst/>
@@ -12835,8 +12835,8 @@
         </p:nvCxnSpPr>
         <p:spPr>
           <a:xfrm>
-            <a:off x="13822171" y="13005822"/>
-            <a:ext cx="903176" cy="0"/>
+            <a:off x="13822175" y="10024497"/>
+            <a:ext cx="903175" cy="0"/>
           </a:xfrm>
           <a:prstGeom prst="line">
             <a:avLst/>
@@ -12878,8 +12878,8 @@
         </p:nvCxnSpPr>
         <p:spPr>
           <a:xfrm>
-            <a:off x="14121048" y="12910664"/>
-            <a:ext cx="508887" cy="0"/>
+            <a:off x="14121049" y="9929339"/>
+            <a:ext cx="508886" cy="0"/>
           </a:xfrm>
           <a:prstGeom prst="straightConnector1">
             <a:avLst/>
@@ -12923,8 +12923,8 @@
         </p:nvCxnSpPr>
         <p:spPr>
           <a:xfrm rot="10800000">
-            <a:off x="14121048" y="13087668"/>
-            <a:ext cx="508887" cy="0"/>
+            <a:off x="14121049" y="10106343"/>
+            <a:ext cx="508886" cy="0"/>
           </a:xfrm>
           <a:prstGeom prst="straightConnector1">
             <a:avLst/>
@@ -12969,7 +12969,7 @@
         </p:nvCxnSpPr>
         <p:spPr>
           <a:xfrm flipH="1" flipV="1">
-            <a:off x="11457366" y="13005834"/>
+            <a:off x="11457367" y="10024512"/>
             <a:ext cx="577846" cy="16033"/>
           </a:xfrm>
           <a:prstGeom prst="straightConnector1">
@@ -13011,8 +13011,8 @@
         </p:nvSpPr>
         <p:spPr>
           <a:xfrm>
-            <a:off x="14822619" y="12851039"/>
-            <a:ext cx="355689" cy="355689"/>
+            <a:off x="14822621" y="9869716"/>
+            <a:ext cx="355688" cy="355688"/>
           </a:xfrm>
           <a:prstGeom prst="ellipse">
             <a:avLst/>
@@ -13066,8 +13066,8 @@
         </p:nvSpPr>
         <p:spPr>
           <a:xfrm>
-            <a:off x="11091312" y="12851039"/>
-            <a:ext cx="355689" cy="355689"/>
+            <a:off x="11091315" y="9869716"/>
+            <a:ext cx="355688" cy="355688"/>
           </a:xfrm>
           <a:prstGeom prst="ellipse">
             <a:avLst/>
@@ -13116,8 +13116,8 @@
         </p:nvSpPr>
         <p:spPr>
           <a:xfrm>
-            <a:off x="10248941" y="12483575"/>
-            <a:ext cx="739298" cy="739298"/>
+            <a:off x="10248943" y="9502253"/>
+            <a:ext cx="739299" cy="739299"/>
           </a:xfrm>
           <a:prstGeom prst="ellipse">
             <a:avLst/>
@@ -13173,7 +13173,7 @@
         </p:nvCxnSpPr>
         <p:spPr>
           <a:xfrm>
-            <a:off x="10252742" y="11232704"/>
+            <a:off x="10252745" y="8251379"/>
             <a:ext cx="5601691" cy="0"/>
           </a:xfrm>
           <a:prstGeom prst="line">
@@ -13209,8 +13209,8 @@
         </p:nvSpPr>
         <p:spPr>
           <a:xfrm>
-            <a:off x="14822619" y="10860870"/>
-            <a:ext cx="355689" cy="355689"/>
+            <a:off x="14822621" y="7879547"/>
+            <a:ext cx="355688" cy="355688"/>
           </a:xfrm>
           <a:prstGeom prst="ellipse">
             <a:avLst/>
@@ -13264,8 +13264,8 @@
         </p:nvSpPr>
         <p:spPr>
           <a:xfrm>
-            <a:off x="11091312" y="10860870"/>
-            <a:ext cx="355689" cy="355689"/>
+            <a:off x="11091315" y="7879547"/>
+            <a:ext cx="355688" cy="355688"/>
           </a:xfrm>
           <a:prstGeom prst="ellipse">
             <a:avLst/>
@@ -13314,8 +13314,8 @@
         </p:nvSpPr>
         <p:spPr>
           <a:xfrm>
-            <a:off x="10248941" y="10493413"/>
-            <a:ext cx="739298" cy="739298"/>
+            <a:off x="10248943" y="7512090"/>
+            <a:ext cx="739299" cy="739299"/>
           </a:xfrm>
           <a:prstGeom prst="ellipse">
             <a:avLst/>
@@ -13371,7 +13371,7 @@
         </p:nvCxnSpPr>
         <p:spPr>
           <a:xfrm flipH="1">
-            <a:off x="11569983" y="11038707"/>
+            <a:off x="11569986" y="8057381"/>
             <a:ext cx="3143621" cy="0"/>
           </a:xfrm>
           <a:prstGeom prst="straightConnector1">
@@ -13412,7 +13412,7 @@
         </p:nvCxnSpPr>
         <p:spPr>
           <a:xfrm>
-            <a:off x="23129502" y="13529144"/>
+            <a:off x="23129504" y="10547819"/>
             <a:ext cx="5601691" cy="0"/>
           </a:xfrm>
           <a:prstGeom prst="line">
@@ -13448,8 +13448,8 @@
         </p:nvSpPr>
         <p:spPr>
           <a:xfrm>
-            <a:off x="24911974" y="12342299"/>
-            <a:ext cx="1786965" cy="985828"/>
+            <a:off x="24911977" y="9360976"/>
+            <a:ext cx="1786965" cy="985829"/>
           </a:xfrm>
           <a:custGeom>
             <a:avLst/>
@@ -13535,8 +13535,8 @@
         </p:nvCxnSpPr>
         <p:spPr>
           <a:xfrm>
-            <a:off x="26698931" y="13312093"/>
-            <a:ext cx="903176" cy="0"/>
+            <a:off x="26698934" y="10330768"/>
+            <a:ext cx="903175" cy="0"/>
           </a:xfrm>
           <a:prstGeom prst="line">
             <a:avLst/>
@@ -13578,8 +13578,8 @@
         </p:nvCxnSpPr>
         <p:spPr>
           <a:xfrm>
-            <a:off x="26997808" y="13216935"/>
-            <a:ext cx="508887" cy="0"/>
+            <a:off x="26997810" y="10235611"/>
+            <a:ext cx="508886" cy="0"/>
           </a:xfrm>
           <a:prstGeom prst="straightConnector1">
             <a:avLst/>
@@ -13623,8 +13623,8 @@
         </p:nvCxnSpPr>
         <p:spPr>
           <a:xfrm rot="10800000">
-            <a:off x="26997808" y="13393939"/>
-            <a:ext cx="508887" cy="0"/>
+            <a:off x="26997810" y="10412615"/>
+            <a:ext cx="508886" cy="0"/>
           </a:xfrm>
           <a:prstGeom prst="straightConnector1">
             <a:avLst/>
@@ -13669,7 +13669,7 @@
         </p:nvCxnSpPr>
         <p:spPr>
           <a:xfrm flipH="1" flipV="1">
-            <a:off x="24334126" y="13312105"/>
+            <a:off x="24334126" y="10330783"/>
             <a:ext cx="577846" cy="16033"/>
           </a:xfrm>
           <a:prstGeom prst="straightConnector1">
@@ -13711,8 +13711,8 @@
         </p:nvSpPr>
         <p:spPr>
           <a:xfrm>
-            <a:off x="27699379" y="13157310"/>
-            <a:ext cx="355689" cy="355689"/>
+            <a:off x="27699381" y="10175986"/>
+            <a:ext cx="355688" cy="355688"/>
           </a:xfrm>
           <a:prstGeom prst="ellipse">
             <a:avLst/>
@@ -13766,8 +13766,8 @@
         </p:nvSpPr>
         <p:spPr>
           <a:xfrm>
-            <a:off x="23968072" y="13157310"/>
-            <a:ext cx="355689" cy="355689"/>
+            <a:off x="23968074" y="10175986"/>
+            <a:ext cx="355688" cy="355688"/>
           </a:xfrm>
           <a:prstGeom prst="ellipse">
             <a:avLst/>
@@ -13816,8 +13816,8 @@
         </p:nvSpPr>
         <p:spPr>
           <a:xfrm>
-            <a:off x="23125701" y="12789846"/>
-            <a:ext cx="739298" cy="739298"/>
+            <a:off x="23125704" y="9808523"/>
+            <a:ext cx="739299" cy="739299"/>
           </a:xfrm>
           <a:prstGeom prst="ellipse">
             <a:avLst/>
@@ -13873,7 +13873,7 @@
         </p:nvCxnSpPr>
         <p:spPr>
           <a:xfrm>
-            <a:off x="23129502" y="11538975"/>
+            <a:off x="23129504" y="8557651"/>
             <a:ext cx="5601691" cy="0"/>
           </a:xfrm>
           <a:prstGeom prst="line">
@@ -13909,8 +13909,8 @@
         </p:nvSpPr>
         <p:spPr>
           <a:xfrm>
-            <a:off x="27699379" y="11167141"/>
-            <a:ext cx="355689" cy="355689"/>
+            <a:off x="27699381" y="8185817"/>
+            <a:ext cx="355688" cy="355688"/>
           </a:xfrm>
           <a:prstGeom prst="ellipse">
             <a:avLst/>
@@ -13964,8 +13964,8 @@
         </p:nvSpPr>
         <p:spPr>
           <a:xfrm>
-            <a:off x="23968072" y="11167141"/>
-            <a:ext cx="355689" cy="355689"/>
+            <a:off x="23968074" y="8185817"/>
+            <a:ext cx="355688" cy="355688"/>
           </a:xfrm>
           <a:prstGeom prst="ellipse">
             <a:avLst/>
@@ -14014,8 +14014,8 @@
         </p:nvSpPr>
         <p:spPr>
           <a:xfrm>
-            <a:off x="23125701" y="10799684"/>
-            <a:ext cx="739298" cy="739298"/>
+            <a:off x="23125704" y="7818361"/>
+            <a:ext cx="739299" cy="739299"/>
           </a:xfrm>
           <a:prstGeom prst="ellipse">
             <a:avLst/>
@@ -14071,7 +14071,7 @@
         </p:nvCxnSpPr>
         <p:spPr>
           <a:xfrm flipH="1">
-            <a:off x="24446743" y="11344978"/>
+            <a:off x="24446747" y="8363653"/>
             <a:ext cx="3143621" cy="0"/>
           </a:xfrm>
           <a:prstGeom prst="straightConnector1">
@@ -14124,7 +14124,7 @@
         </p:blipFill>
         <p:spPr>
           <a:xfrm>
-            <a:off x="4527514" y="14276367"/>
+            <a:off x="4527518" y="11295045"/>
             <a:ext cx="5316905" cy="5316905"/>
           </a:xfrm>
           <a:prstGeom prst="rect">
@@ -14160,7 +14160,7 @@
         </p:blipFill>
         <p:spPr>
           <a:xfrm>
-            <a:off x="10578842" y="14206375"/>
+            <a:off x="10578846" y="11225053"/>
             <a:ext cx="5349427" cy="5349427"/>
           </a:xfrm>
           <a:prstGeom prst="rect">
@@ -14196,7 +14196,7 @@
         </p:blipFill>
         <p:spPr>
           <a:xfrm>
-            <a:off x="16886129" y="14289329"/>
+            <a:off x="16886132" y="11308007"/>
             <a:ext cx="5316905" cy="5316905"/>
           </a:xfrm>
           <a:prstGeom prst="rect">
@@ -14232,7 +14232,7 @@
         </p:blipFill>
         <p:spPr>
           <a:xfrm>
-            <a:off x="22937457" y="14219337"/>
+            <a:off x="22937461" y="11238015"/>
             <a:ext cx="5349427" cy="5349427"/>
           </a:xfrm>
           <a:prstGeom prst="rect">
@@ -14268,8 +14268,8 @@
         </p:blipFill>
         <p:spPr>
           <a:xfrm>
-            <a:off x="30446915" y="14074958"/>
-            <a:ext cx="5349247" cy="5349247"/>
+            <a:off x="30446915" y="11093633"/>
+            <a:ext cx="5349248" cy="5349248"/>
           </a:xfrm>
           <a:prstGeom prst="rect">
             <a:avLst/>
@@ -14304,7 +14304,7 @@
         </p:blipFill>
         <p:spPr>
           <a:xfrm>
-            <a:off x="38852184" y="14056110"/>
+            <a:off x="38852187" y="11074788"/>
             <a:ext cx="5309427" cy="5309427"/>
           </a:xfrm>
           <a:prstGeom prst="rect">
@@ -14362,7 +14362,7 @@
         </p:nvSpPr>
         <p:spPr>
           <a:xfrm>
-            <a:off x="42137002" y="4895775"/>
+            <a:off x="41741316" y="4687821"/>
             <a:ext cx="7938917" cy="10205209"/>
           </a:xfrm>
           <a:prstGeom prst="rect">
@@ -14418,7 +14418,7 @@
         </p:nvSpPr>
         <p:spPr>
           <a:xfrm>
-            <a:off x="34212201" y="4895773"/>
+            <a:off x="33816516" y="4687820"/>
             <a:ext cx="7938917" cy="10205209"/>
           </a:xfrm>
           <a:prstGeom prst="rect">
@@ -14454,7 +14454,7 @@
           <a:lstStyle/>
           <a:p>
             <a:pPr algn="ctr"/>
-            <a:endParaRPr lang="en-US"/>
+            <a:endParaRPr lang="en-US" dirty="0"/>
           </a:p>
         </p:txBody>
       </p:sp>
@@ -14472,7 +14472,7 @@
         </p:nvSpPr>
         <p:spPr>
           <a:xfrm>
-            <a:off x="26873016" y="4895771"/>
+            <a:off x="26477327" y="4687818"/>
             <a:ext cx="7365600" cy="10205209"/>
           </a:xfrm>
           <a:prstGeom prst="rect">
@@ -14526,7 +14526,7 @@
         </p:nvSpPr>
         <p:spPr>
           <a:xfrm>
-            <a:off x="15539001" y="4893291"/>
+            <a:off x="15539004" y="4687825"/>
             <a:ext cx="7938917" cy="10205209"/>
           </a:xfrm>
           <a:prstGeom prst="rect">
@@ -14582,7 +14582,7 @@
         </p:nvSpPr>
         <p:spPr>
           <a:xfrm>
-            <a:off x="7614200" y="4893289"/>
+            <a:off x="7614204" y="4687823"/>
             <a:ext cx="7938917" cy="10205209"/>
           </a:xfrm>
           <a:prstGeom prst="rect">
@@ -14636,7 +14636,7 @@
         </p:nvSpPr>
         <p:spPr>
           <a:xfrm>
-            <a:off x="275015" y="4893287"/>
+            <a:off x="275015" y="4687820"/>
             <a:ext cx="7365600" cy="10205209"/>
           </a:xfrm>
           <a:prstGeom prst="rect">
@@ -14692,7 +14692,7 @@
         </p:nvCxnSpPr>
         <p:spPr>
           <a:xfrm>
-            <a:off x="1437464" y="7393150"/>
+            <a:off x="1437466" y="7187681"/>
             <a:ext cx="5601691" cy="0"/>
           </a:xfrm>
           <a:prstGeom prst="line">
@@ -14728,7 +14728,7 @@
         </p:nvSpPr>
         <p:spPr>
           <a:xfrm>
-            <a:off x="3939446" y="5963522"/>
+            <a:off x="3939449" y="5758056"/>
             <a:ext cx="355687" cy="1413703"/>
           </a:xfrm>
           <a:prstGeom prst="rect">
@@ -14776,7 +14776,7 @@
         </p:nvCxnSpPr>
         <p:spPr>
           <a:xfrm>
-            <a:off x="5301978" y="7176100"/>
+            <a:off x="5301978" y="6970631"/>
             <a:ext cx="608106" cy="0"/>
           </a:xfrm>
           <a:prstGeom prst="line">
@@ -14818,8 +14818,8 @@
         </p:nvSpPr>
         <p:spPr>
           <a:xfrm>
-            <a:off x="6107535" y="7212689"/>
-            <a:ext cx="168298" cy="168298"/>
+            <a:off x="6107537" y="7007221"/>
+            <a:ext cx="168299" cy="168299"/>
           </a:xfrm>
           <a:prstGeom prst="ellipse">
             <a:avLst/>
@@ -14864,7 +14864,7 @@
         </p:nvSpPr>
         <p:spPr>
           <a:xfrm>
-            <a:off x="1571558" y="6914626"/>
+            <a:off x="1571557" y="6709156"/>
             <a:ext cx="464094" cy="464094"/>
           </a:xfrm>
           <a:prstGeom prst="ellipse">
@@ -14910,8 +14910,8 @@
         </p:nvSpPr>
         <p:spPr>
           <a:xfrm>
-            <a:off x="6007341" y="7021323"/>
-            <a:ext cx="355689" cy="355689"/>
+            <a:off x="6007343" y="6815856"/>
+            <a:ext cx="355688" cy="355688"/>
           </a:xfrm>
           <a:prstGeom prst="ellipse">
             <a:avLst/>
@@ -14962,8 +14962,8 @@
         </p:nvCxnSpPr>
         <p:spPr>
           <a:xfrm flipV="1">
-            <a:off x="6175638" y="7025291"/>
-            <a:ext cx="0" cy="178778"/>
+            <a:off x="6175637" y="6819824"/>
+            <a:ext cx="0" cy="178779"/>
           </a:xfrm>
           <a:prstGeom prst="straightConnector1">
             <a:avLst/>
@@ -15007,8 +15007,8 @@
         </p:nvCxnSpPr>
         <p:spPr>
           <a:xfrm rot="-1200000" flipH="1" flipV="1">
-            <a:off x="6039554" y="7105207"/>
-            <a:ext cx="91839" cy="146292"/>
+            <a:off x="6039557" y="6899741"/>
+            <a:ext cx="91839" cy="146291"/>
           </a:xfrm>
           <a:prstGeom prst="straightConnector1">
             <a:avLst/>
@@ -15052,8 +15052,8 @@
         </p:nvCxnSpPr>
         <p:spPr>
           <a:xfrm rot="1200000" flipV="1">
-            <a:off x="6280336" y="7070084"/>
-            <a:ext cx="0" cy="178778"/>
+            <a:off x="6280336" y="6864617"/>
+            <a:ext cx="0" cy="178779"/>
           </a:xfrm>
           <a:prstGeom prst="straightConnector1">
             <a:avLst/>
@@ -15095,8 +15095,8 @@
         </p:nvSpPr>
         <p:spPr>
           <a:xfrm>
-            <a:off x="4819515" y="7021323"/>
-            <a:ext cx="355689" cy="355689"/>
+            <a:off x="4819517" y="6815856"/>
+            <a:ext cx="355688" cy="355688"/>
           </a:xfrm>
           <a:prstGeom prst="ellipse">
             <a:avLst/>
@@ -15145,8 +15145,8 @@
         </p:nvSpPr>
         <p:spPr>
           <a:xfrm>
-            <a:off x="1433662" y="6653859"/>
-            <a:ext cx="739298" cy="739298"/>
+            <a:off x="1433664" y="6448392"/>
+            <a:ext cx="739299" cy="739299"/>
           </a:xfrm>
           <a:prstGeom prst="ellipse">
             <a:avLst/>
@@ -15197,8 +15197,8 @@
         </p:nvCxnSpPr>
         <p:spPr>
           <a:xfrm flipH="1" flipV="1">
-            <a:off x="1787401" y="6669760"/>
-            <a:ext cx="4420" cy="233997"/>
+            <a:off x="1787401" y="6464293"/>
+            <a:ext cx="4420" cy="233996"/>
           </a:xfrm>
           <a:prstGeom prst="straightConnector1">
             <a:avLst/>
@@ -15242,8 +15242,8 @@
         </p:nvCxnSpPr>
         <p:spPr>
           <a:xfrm rot="3000000" flipH="1" flipV="1">
-            <a:off x="2035452" y="6793224"/>
-            <a:ext cx="4420" cy="197998"/>
+            <a:off x="2035452" y="6587759"/>
+            <a:ext cx="4420" cy="197997"/>
           </a:xfrm>
           <a:prstGeom prst="straightConnector1">
             <a:avLst/>
@@ -15287,8 +15287,8 @@
         </p:nvCxnSpPr>
         <p:spPr>
           <a:xfrm rot="-3000000" flipH="1" flipV="1">
-            <a:off x="1569337" y="6801177"/>
-            <a:ext cx="4420" cy="197998"/>
+            <a:off x="1569338" y="6595711"/>
+            <a:ext cx="4420" cy="197997"/>
           </a:xfrm>
           <a:prstGeom prst="straightConnector1">
             <a:avLst/>
@@ -15332,7 +15332,7 @@
         </p:nvCxnSpPr>
         <p:spPr>
           <a:xfrm>
-            <a:off x="1433657" y="9194615"/>
+            <a:off x="1433660" y="8989146"/>
             <a:ext cx="5601691" cy="0"/>
           </a:xfrm>
           <a:prstGeom prst="line">
@@ -15368,7 +15368,7 @@
         </p:nvSpPr>
         <p:spPr>
           <a:xfrm>
-            <a:off x="3216128" y="7528355"/>
+            <a:off x="3216130" y="7322887"/>
             <a:ext cx="1786965" cy="1465242"/>
           </a:xfrm>
           <a:custGeom>
@@ -15455,8 +15455,8 @@
         </p:nvCxnSpPr>
         <p:spPr>
           <a:xfrm>
-            <a:off x="5003085" y="8977564"/>
-            <a:ext cx="903176" cy="0"/>
+            <a:off x="5003088" y="8772095"/>
+            <a:ext cx="903175" cy="0"/>
           </a:xfrm>
           <a:prstGeom prst="line">
             <a:avLst/>
@@ -15498,8 +15498,8 @@
         </p:nvCxnSpPr>
         <p:spPr>
           <a:xfrm>
-            <a:off x="5301963" y="8882405"/>
-            <a:ext cx="508887" cy="0"/>
+            <a:off x="5301964" y="8676937"/>
+            <a:ext cx="508886" cy="0"/>
           </a:xfrm>
           <a:prstGeom prst="straightConnector1">
             <a:avLst/>
@@ -15543,8 +15543,8 @@
         </p:nvCxnSpPr>
         <p:spPr>
           <a:xfrm rot="10800000">
-            <a:off x="5301963" y="9059410"/>
-            <a:ext cx="508887" cy="0"/>
+            <a:off x="5301964" y="8853941"/>
+            <a:ext cx="508886" cy="0"/>
           </a:xfrm>
           <a:prstGeom prst="straightConnector1">
             <a:avLst/>
@@ -15589,7 +15589,7 @@
         </p:nvCxnSpPr>
         <p:spPr>
           <a:xfrm flipH="1" flipV="1">
-            <a:off x="2638281" y="8977575"/>
+            <a:off x="2638280" y="8772109"/>
             <a:ext cx="577846" cy="16023"/>
           </a:xfrm>
           <a:prstGeom prst="straightConnector1">
@@ -15631,8 +15631,8 @@
         </p:nvSpPr>
         <p:spPr>
           <a:xfrm>
-            <a:off x="6003534" y="8822781"/>
-            <a:ext cx="355689" cy="355689"/>
+            <a:off x="6003535" y="8617314"/>
+            <a:ext cx="355688" cy="355688"/>
           </a:xfrm>
           <a:prstGeom prst="ellipse">
             <a:avLst/>
@@ -15686,8 +15686,8 @@
         </p:nvSpPr>
         <p:spPr>
           <a:xfrm>
-            <a:off x="4815709" y="8822781"/>
-            <a:ext cx="355689" cy="355689"/>
+            <a:off x="4815711" y="8617314"/>
+            <a:ext cx="355688" cy="355688"/>
           </a:xfrm>
           <a:prstGeom prst="ellipse">
             <a:avLst/>
@@ -15736,8 +15736,8 @@
         </p:nvSpPr>
         <p:spPr>
           <a:xfrm>
-            <a:off x="2272226" y="8822781"/>
-            <a:ext cx="355689" cy="355689"/>
+            <a:off x="2272228" y="8617314"/>
+            <a:ext cx="355688" cy="355688"/>
           </a:xfrm>
           <a:prstGeom prst="ellipse">
             <a:avLst/>
@@ -15786,8 +15786,8 @@
         </p:nvSpPr>
         <p:spPr>
           <a:xfrm>
-            <a:off x="1429856" y="8455317"/>
-            <a:ext cx="739298" cy="739298"/>
+            <a:off x="1429858" y="8249850"/>
+            <a:ext cx="739299" cy="739299"/>
           </a:xfrm>
           <a:prstGeom prst="ellipse">
             <a:avLst/>
@@ -15841,7 +15841,7 @@
         </p:nvSpPr>
         <p:spPr>
           <a:xfrm>
-            <a:off x="3939446" y="7764767"/>
+            <a:off x="3939449" y="7559301"/>
             <a:ext cx="355687" cy="1413703"/>
           </a:xfrm>
           <a:prstGeom prst="rect">
@@ -15889,7 +15889,7 @@
         </p:nvCxnSpPr>
         <p:spPr>
           <a:xfrm>
-            <a:off x="1441264" y="11828261"/>
+            <a:off x="1441266" y="11622792"/>
             <a:ext cx="5601691" cy="0"/>
           </a:xfrm>
           <a:prstGeom prst="line">
@@ -15925,8 +15925,8 @@
         </p:nvSpPr>
         <p:spPr>
           <a:xfrm>
-            <a:off x="3223735" y="11340872"/>
-            <a:ext cx="1786965" cy="286371"/>
+            <a:off x="3223738" y="11135404"/>
+            <a:ext cx="1786965" cy="286372"/>
           </a:xfrm>
           <a:custGeom>
             <a:avLst/>
@@ -16012,8 +16012,8 @@
         </p:nvCxnSpPr>
         <p:spPr>
           <a:xfrm>
-            <a:off x="5010692" y="11611210"/>
-            <a:ext cx="903176" cy="0"/>
+            <a:off x="5010696" y="11405741"/>
+            <a:ext cx="903175" cy="0"/>
           </a:xfrm>
           <a:prstGeom prst="line">
             <a:avLst/>
@@ -16055,8 +16055,8 @@
         </p:nvCxnSpPr>
         <p:spPr>
           <a:xfrm>
-            <a:off x="5309570" y="11516051"/>
-            <a:ext cx="508887" cy="0"/>
+            <a:off x="5309572" y="11310583"/>
+            <a:ext cx="508886" cy="0"/>
           </a:xfrm>
           <a:prstGeom prst="straightConnector1">
             <a:avLst/>
@@ -16100,8 +16100,8 @@
         </p:nvCxnSpPr>
         <p:spPr>
           <a:xfrm rot="10800000">
-            <a:off x="5309570" y="11693056"/>
-            <a:ext cx="508887" cy="0"/>
+            <a:off x="5309572" y="11487587"/>
+            <a:ext cx="508886" cy="0"/>
           </a:xfrm>
           <a:prstGeom prst="straightConnector1">
             <a:avLst/>
@@ -16146,7 +16146,7 @@
         </p:nvCxnSpPr>
         <p:spPr>
           <a:xfrm flipH="1" flipV="1">
-            <a:off x="2645888" y="11611220"/>
+            <a:off x="2645888" y="11405751"/>
             <a:ext cx="577846" cy="16022"/>
           </a:xfrm>
           <a:prstGeom prst="straightConnector1">
@@ -16188,8 +16188,8 @@
         </p:nvSpPr>
         <p:spPr>
           <a:xfrm>
-            <a:off x="6011141" y="11456427"/>
-            <a:ext cx="355689" cy="355689"/>
+            <a:off x="6011143" y="11250960"/>
+            <a:ext cx="355688" cy="355688"/>
           </a:xfrm>
           <a:prstGeom prst="ellipse">
             <a:avLst/>
@@ -16243,8 +16243,8 @@
         </p:nvSpPr>
         <p:spPr>
           <a:xfrm>
-            <a:off x="4823316" y="11456427"/>
-            <a:ext cx="355689" cy="355689"/>
+            <a:off x="4823319" y="11250960"/>
+            <a:ext cx="355688" cy="355688"/>
           </a:xfrm>
           <a:prstGeom prst="ellipse">
             <a:avLst/>
@@ -16293,8 +16293,8 @@
         </p:nvSpPr>
         <p:spPr>
           <a:xfrm>
-            <a:off x="2279833" y="11456427"/>
-            <a:ext cx="355689" cy="355689"/>
+            <a:off x="2279834" y="11250960"/>
+            <a:ext cx="355688" cy="355688"/>
           </a:xfrm>
           <a:prstGeom prst="ellipse">
             <a:avLst/>
@@ -16343,8 +16343,8 @@
         </p:nvSpPr>
         <p:spPr>
           <a:xfrm>
-            <a:off x="1437463" y="11088963"/>
-            <a:ext cx="739298" cy="739298"/>
+            <a:off x="1437466" y="10883496"/>
+            <a:ext cx="739299" cy="739299"/>
           </a:xfrm>
           <a:prstGeom prst="ellipse">
             <a:avLst/>
@@ -16398,8 +16398,8 @@
         </p:nvSpPr>
         <p:spPr>
           <a:xfrm>
-            <a:off x="3947053" y="11463403"/>
-            <a:ext cx="348080" cy="348713"/>
+            <a:off x="3947055" y="11257933"/>
+            <a:ext cx="348081" cy="348714"/>
           </a:xfrm>
           <a:prstGeom prst="rect">
             <a:avLst/>
@@ -16446,7 +16446,7 @@
         </p:nvCxnSpPr>
         <p:spPr>
           <a:xfrm>
-            <a:off x="1433657" y="13888365"/>
+            <a:off x="1433660" y="13682896"/>
             <a:ext cx="5601691" cy="0"/>
           </a:xfrm>
           <a:prstGeom prst="line">
@@ -16482,7 +16482,7 @@
         </p:nvSpPr>
         <p:spPr>
           <a:xfrm>
-            <a:off x="3216128" y="12222105"/>
+            <a:off x="3216130" y="12016637"/>
             <a:ext cx="1786965" cy="1465242"/>
           </a:xfrm>
           <a:custGeom>
@@ -16569,8 +16569,8 @@
         </p:nvCxnSpPr>
         <p:spPr>
           <a:xfrm>
-            <a:off x="5003085" y="13671314"/>
-            <a:ext cx="903176" cy="0"/>
+            <a:off x="5003088" y="13465846"/>
+            <a:ext cx="903175" cy="0"/>
           </a:xfrm>
           <a:prstGeom prst="line">
             <a:avLst/>
@@ -16612,8 +16612,8 @@
         </p:nvCxnSpPr>
         <p:spPr>
           <a:xfrm>
-            <a:off x="5301963" y="13576155"/>
-            <a:ext cx="508887" cy="0"/>
+            <a:off x="5301964" y="13370685"/>
+            <a:ext cx="508886" cy="0"/>
           </a:xfrm>
           <a:prstGeom prst="straightConnector1">
             <a:avLst/>
@@ -16657,8 +16657,8 @@
         </p:nvCxnSpPr>
         <p:spPr>
           <a:xfrm rot="10800000">
-            <a:off x="5301963" y="13753160"/>
-            <a:ext cx="508887" cy="0"/>
+            <a:off x="5301964" y="13547691"/>
+            <a:ext cx="508886" cy="0"/>
           </a:xfrm>
           <a:prstGeom prst="straightConnector1">
             <a:avLst/>
@@ -16703,7 +16703,7 @@
         </p:nvCxnSpPr>
         <p:spPr>
           <a:xfrm flipH="1" flipV="1">
-            <a:off x="2638281" y="13671325"/>
+            <a:off x="2638280" y="13465860"/>
             <a:ext cx="577846" cy="16023"/>
           </a:xfrm>
           <a:prstGeom prst="straightConnector1">
@@ -16745,8 +16745,8 @@
         </p:nvSpPr>
         <p:spPr>
           <a:xfrm>
-            <a:off x="6003534" y="13516531"/>
-            <a:ext cx="355689" cy="355689"/>
+            <a:off x="6003535" y="13311064"/>
+            <a:ext cx="355688" cy="355688"/>
           </a:xfrm>
           <a:prstGeom prst="ellipse">
             <a:avLst/>
@@ -16800,8 +16800,8 @@
         </p:nvSpPr>
         <p:spPr>
           <a:xfrm>
-            <a:off x="4815709" y="13516531"/>
-            <a:ext cx="355689" cy="355689"/>
+            <a:off x="4815711" y="13311064"/>
+            <a:ext cx="355688" cy="355688"/>
           </a:xfrm>
           <a:prstGeom prst="ellipse">
             <a:avLst/>
@@ -16850,8 +16850,8 @@
         </p:nvSpPr>
         <p:spPr>
           <a:xfrm>
-            <a:off x="2272226" y="13516531"/>
-            <a:ext cx="355689" cy="355689"/>
+            <a:off x="2272228" y="13311064"/>
+            <a:ext cx="355688" cy="355688"/>
           </a:xfrm>
           <a:prstGeom prst="ellipse">
             <a:avLst/>
@@ -16900,8 +16900,8 @@
         </p:nvSpPr>
         <p:spPr>
           <a:xfrm>
-            <a:off x="1429856" y="13149067"/>
-            <a:ext cx="739298" cy="739298"/>
+            <a:off x="1429858" y="12943600"/>
+            <a:ext cx="739299" cy="739299"/>
           </a:xfrm>
           <a:prstGeom prst="ellipse">
             <a:avLst/>
@@ -16955,8 +16955,8 @@
         </p:nvSpPr>
         <p:spPr>
           <a:xfrm>
-            <a:off x="3922235" y="13539428"/>
-            <a:ext cx="348080" cy="348713"/>
+            <a:off x="3922237" y="13333959"/>
+            <a:ext cx="348081" cy="348714"/>
           </a:xfrm>
           <a:prstGeom prst="rect">
             <a:avLst/>
@@ -17003,7 +17003,7 @@
         </p:nvCxnSpPr>
         <p:spPr>
           <a:xfrm>
-            <a:off x="8629231" y="7376849"/>
+            <a:off x="8629233" y="7171379"/>
             <a:ext cx="5601691" cy="0"/>
           </a:xfrm>
           <a:prstGeom prst="line">
@@ -17039,7 +17039,7 @@
         </p:nvSpPr>
         <p:spPr>
           <a:xfrm>
-            <a:off x="13755142" y="5947221"/>
+            <a:off x="13755145" y="5741755"/>
             <a:ext cx="355687" cy="1413703"/>
           </a:xfrm>
           <a:prstGeom prst="rect">
@@ -17087,7 +17087,7 @@
         </p:nvCxnSpPr>
         <p:spPr>
           <a:xfrm>
-            <a:off x="12493745" y="7159799"/>
+            <a:off x="12493744" y="6954331"/>
             <a:ext cx="608106" cy="0"/>
           </a:xfrm>
           <a:prstGeom prst="line">
@@ -17129,8 +17129,8 @@
         </p:nvSpPr>
         <p:spPr>
           <a:xfrm>
-            <a:off x="13299302" y="7196388"/>
-            <a:ext cx="168298" cy="168298"/>
+            <a:off x="13299303" y="6990921"/>
+            <a:ext cx="168299" cy="168299"/>
           </a:xfrm>
           <a:prstGeom prst="ellipse">
             <a:avLst/>
@@ -17175,7 +17175,7 @@
         </p:nvSpPr>
         <p:spPr>
           <a:xfrm>
-            <a:off x="8763325" y="6898325"/>
+            <a:off x="8763325" y="6692856"/>
             <a:ext cx="464094" cy="464094"/>
           </a:xfrm>
           <a:prstGeom prst="ellipse">
@@ -17221,8 +17221,8 @@
         </p:nvSpPr>
         <p:spPr>
           <a:xfrm>
-            <a:off x="13199108" y="7005022"/>
-            <a:ext cx="355689" cy="355689"/>
+            <a:off x="13199109" y="6799555"/>
+            <a:ext cx="355688" cy="355688"/>
           </a:xfrm>
           <a:prstGeom prst="ellipse">
             <a:avLst/>
@@ -17273,8 +17273,8 @@
         </p:nvCxnSpPr>
         <p:spPr>
           <a:xfrm flipV="1">
-            <a:off x="13367405" y="7008990"/>
-            <a:ext cx="0" cy="178778"/>
+            <a:off x="13367405" y="6803524"/>
+            <a:ext cx="0" cy="178779"/>
           </a:xfrm>
           <a:prstGeom prst="straightConnector1">
             <a:avLst/>
@@ -17318,8 +17318,8 @@
         </p:nvCxnSpPr>
         <p:spPr>
           <a:xfrm rot="-1200000" flipH="1" flipV="1">
-            <a:off x="13231321" y="7088906"/>
-            <a:ext cx="91839" cy="146292"/>
+            <a:off x="13231324" y="6883441"/>
+            <a:ext cx="91839" cy="146291"/>
           </a:xfrm>
           <a:prstGeom prst="straightConnector1">
             <a:avLst/>
@@ -17363,8 +17363,8 @@
         </p:nvCxnSpPr>
         <p:spPr>
           <a:xfrm rot="1200000" flipV="1">
-            <a:off x="13472103" y="7053783"/>
-            <a:ext cx="0" cy="178778"/>
+            <a:off x="13472104" y="6848317"/>
+            <a:ext cx="0" cy="178779"/>
           </a:xfrm>
           <a:prstGeom prst="straightConnector1">
             <a:avLst/>
@@ -17406,8 +17406,8 @@
         </p:nvSpPr>
         <p:spPr>
           <a:xfrm>
-            <a:off x="12011282" y="7005022"/>
-            <a:ext cx="355689" cy="355689"/>
+            <a:off x="12011283" y="6799555"/>
+            <a:ext cx="355688" cy="355688"/>
           </a:xfrm>
           <a:prstGeom prst="ellipse">
             <a:avLst/>
@@ -17456,8 +17456,8 @@
         </p:nvSpPr>
         <p:spPr>
           <a:xfrm>
-            <a:off x="8625429" y="6637558"/>
-            <a:ext cx="739298" cy="739298"/>
+            <a:off x="8625432" y="6432091"/>
+            <a:ext cx="739299" cy="739299"/>
           </a:xfrm>
           <a:prstGeom prst="ellipse">
             <a:avLst/>
@@ -17508,8 +17508,8 @@
         </p:nvCxnSpPr>
         <p:spPr>
           <a:xfrm flipH="1" flipV="1">
-            <a:off x="8979168" y="6653459"/>
-            <a:ext cx="4420" cy="233997"/>
+            <a:off x="8979169" y="6447991"/>
+            <a:ext cx="4420" cy="233996"/>
           </a:xfrm>
           <a:prstGeom prst="straightConnector1">
             <a:avLst/>
@@ -17553,8 +17553,8 @@
         </p:nvCxnSpPr>
         <p:spPr>
           <a:xfrm rot="3000000" flipH="1" flipV="1">
-            <a:off x="9227219" y="6776923"/>
-            <a:ext cx="4420" cy="197998"/>
+            <a:off x="9227220" y="6571457"/>
+            <a:ext cx="4420" cy="197997"/>
           </a:xfrm>
           <a:prstGeom prst="straightConnector1">
             <a:avLst/>
@@ -17598,8 +17598,8 @@
         </p:nvCxnSpPr>
         <p:spPr>
           <a:xfrm rot="-3000000" flipH="1" flipV="1">
-            <a:off x="8761104" y="6784876"/>
-            <a:ext cx="4420" cy="197998"/>
+            <a:off x="8761104" y="6579411"/>
+            <a:ext cx="4420" cy="197997"/>
           </a:xfrm>
           <a:prstGeom prst="straightConnector1">
             <a:avLst/>
@@ -17643,7 +17643,7 @@
         </p:nvCxnSpPr>
         <p:spPr>
           <a:xfrm>
-            <a:off x="8625424" y="9178314"/>
+            <a:off x="8625427" y="8972845"/>
             <a:ext cx="5601691" cy="0"/>
           </a:xfrm>
           <a:prstGeom prst="line">
@@ -17679,7 +17679,7 @@
         </p:nvSpPr>
         <p:spPr>
           <a:xfrm>
-            <a:off x="10407895" y="7512054"/>
+            <a:off x="10407898" y="7306586"/>
             <a:ext cx="1786965" cy="1465242"/>
           </a:xfrm>
           <a:custGeom>
@@ -17766,8 +17766,8 @@
         </p:nvCxnSpPr>
         <p:spPr>
           <a:xfrm>
-            <a:off x="12194852" y="8961263"/>
-            <a:ext cx="903176" cy="0"/>
+            <a:off x="12194855" y="8755793"/>
+            <a:ext cx="903175" cy="0"/>
           </a:xfrm>
           <a:prstGeom prst="line">
             <a:avLst/>
@@ -17809,8 +17809,8 @@
         </p:nvCxnSpPr>
         <p:spPr>
           <a:xfrm>
-            <a:off x="12493730" y="8866104"/>
-            <a:ext cx="508887" cy="0"/>
+            <a:off x="12493730" y="8660635"/>
+            <a:ext cx="508886" cy="0"/>
           </a:xfrm>
           <a:prstGeom prst="straightConnector1">
             <a:avLst/>
@@ -17854,8 +17854,8 @@
         </p:nvCxnSpPr>
         <p:spPr>
           <a:xfrm rot="10800000">
-            <a:off x="12493730" y="9043109"/>
-            <a:ext cx="508887" cy="0"/>
+            <a:off x="12493730" y="8837640"/>
+            <a:ext cx="508886" cy="0"/>
           </a:xfrm>
           <a:prstGeom prst="straightConnector1">
             <a:avLst/>
@@ -17900,7 +17900,7 @@
         </p:nvCxnSpPr>
         <p:spPr>
           <a:xfrm flipH="1" flipV="1">
-            <a:off x="9830048" y="8961274"/>
+            <a:off x="9830048" y="8755809"/>
             <a:ext cx="577846" cy="16023"/>
           </a:xfrm>
           <a:prstGeom prst="straightConnector1">
@@ -17942,8 +17942,8 @@
         </p:nvSpPr>
         <p:spPr>
           <a:xfrm>
-            <a:off x="13195301" y="8806480"/>
-            <a:ext cx="355689" cy="355689"/>
+            <a:off x="13195303" y="8601013"/>
+            <a:ext cx="355688" cy="355688"/>
           </a:xfrm>
           <a:prstGeom prst="ellipse">
             <a:avLst/>
@@ -17997,8 +17997,8 @@
         </p:nvSpPr>
         <p:spPr>
           <a:xfrm>
-            <a:off x="12007476" y="8806480"/>
-            <a:ext cx="355689" cy="355689"/>
+            <a:off x="12007477" y="8601013"/>
+            <a:ext cx="355688" cy="355688"/>
           </a:xfrm>
           <a:prstGeom prst="ellipse">
             <a:avLst/>
@@ -18047,8 +18047,8 @@
         </p:nvSpPr>
         <p:spPr>
           <a:xfrm>
-            <a:off x="9463993" y="8806480"/>
-            <a:ext cx="355689" cy="355689"/>
+            <a:off x="9463994" y="8601013"/>
+            <a:ext cx="355688" cy="355688"/>
           </a:xfrm>
           <a:prstGeom prst="ellipse">
             <a:avLst/>
@@ -18097,8 +18097,8 @@
         </p:nvSpPr>
         <p:spPr>
           <a:xfrm>
-            <a:off x="8621623" y="8439016"/>
-            <a:ext cx="739298" cy="739298"/>
+            <a:off x="8621626" y="8233549"/>
+            <a:ext cx="739299" cy="739299"/>
           </a:xfrm>
           <a:prstGeom prst="ellipse">
             <a:avLst/>
@@ -18152,7 +18152,7 @@
         </p:nvSpPr>
         <p:spPr>
           <a:xfrm>
-            <a:off x="13786946" y="7748466"/>
+            <a:off x="13786949" y="7543001"/>
             <a:ext cx="355687" cy="1413703"/>
           </a:xfrm>
           <a:prstGeom prst="rect">
@@ -18200,7 +18200,7 @@
         </p:nvCxnSpPr>
         <p:spPr>
           <a:xfrm>
-            <a:off x="8625583" y="11775897"/>
+            <a:off x="8625586" y="11570427"/>
             <a:ext cx="5601691" cy="0"/>
           </a:xfrm>
           <a:prstGeom prst="line">
@@ -18236,8 +18236,8 @@
         </p:nvSpPr>
         <p:spPr>
           <a:xfrm>
-            <a:off x="10408054" y="11288508"/>
-            <a:ext cx="1786965" cy="286371"/>
+            <a:off x="10408057" y="11083040"/>
+            <a:ext cx="1786965" cy="286372"/>
           </a:xfrm>
           <a:custGeom>
             <a:avLst/>
@@ -18323,8 +18323,8 @@
         </p:nvCxnSpPr>
         <p:spPr>
           <a:xfrm>
-            <a:off x="12195011" y="11558846"/>
-            <a:ext cx="903176" cy="0"/>
+            <a:off x="12195014" y="11353377"/>
+            <a:ext cx="903175" cy="0"/>
           </a:xfrm>
           <a:prstGeom prst="line">
             <a:avLst/>
@@ -18366,8 +18366,8 @@
         </p:nvCxnSpPr>
         <p:spPr>
           <a:xfrm>
-            <a:off x="12493889" y="11463687"/>
-            <a:ext cx="508887" cy="0"/>
+            <a:off x="12493889" y="11258219"/>
+            <a:ext cx="508886" cy="0"/>
           </a:xfrm>
           <a:prstGeom prst="straightConnector1">
             <a:avLst/>
@@ -18411,8 +18411,8 @@
         </p:nvCxnSpPr>
         <p:spPr>
           <a:xfrm rot="10800000">
-            <a:off x="12493889" y="11640692"/>
-            <a:ext cx="508887" cy="0"/>
+            <a:off x="12493889" y="11435223"/>
+            <a:ext cx="508886" cy="0"/>
           </a:xfrm>
           <a:prstGeom prst="straightConnector1">
             <a:avLst/>
@@ -18457,7 +18457,7 @@
         </p:nvCxnSpPr>
         <p:spPr>
           <a:xfrm flipH="1" flipV="1">
-            <a:off x="9830207" y="11558856"/>
+            <a:off x="9830207" y="11353386"/>
             <a:ext cx="577846" cy="16022"/>
           </a:xfrm>
           <a:prstGeom prst="straightConnector1">
@@ -18499,8 +18499,8 @@
         </p:nvSpPr>
         <p:spPr>
           <a:xfrm>
-            <a:off x="13195460" y="11404063"/>
-            <a:ext cx="355689" cy="355689"/>
+            <a:off x="13195462" y="11198596"/>
+            <a:ext cx="355688" cy="355688"/>
           </a:xfrm>
           <a:prstGeom prst="ellipse">
             <a:avLst/>
@@ -18554,8 +18554,8 @@
         </p:nvSpPr>
         <p:spPr>
           <a:xfrm>
-            <a:off x="12007635" y="11404063"/>
-            <a:ext cx="355689" cy="355689"/>
+            <a:off x="12007636" y="11198596"/>
+            <a:ext cx="355688" cy="355688"/>
           </a:xfrm>
           <a:prstGeom prst="ellipse">
             <a:avLst/>
@@ -18604,8 +18604,8 @@
         </p:nvSpPr>
         <p:spPr>
           <a:xfrm>
-            <a:off x="9464152" y="11404063"/>
-            <a:ext cx="355689" cy="355689"/>
+            <a:off x="9464153" y="11198596"/>
+            <a:ext cx="355688" cy="355688"/>
           </a:xfrm>
           <a:prstGeom prst="ellipse">
             <a:avLst/>
@@ -18654,8 +18654,8 @@
         </p:nvSpPr>
         <p:spPr>
           <a:xfrm>
-            <a:off x="8621782" y="11036599"/>
-            <a:ext cx="739298" cy="739298"/>
+            <a:off x="8621785" y="10831133"/>
+            <a:ext cx="739299" cy="739299"/>
           </a:xfrm>
           <a:prstGeom prst="ellipse">
             <a:avLst/>
@@ -18709,8 +18709,8 @@
         </p:nvSpPr>
         <p:spPr>
           <a:xfrm>
-            <a:off x="13787107" y="11411039"/>
-            <a:ext cx="348080" cy="348713"/>
+            <a:off x="13787108" y="11205571"/>
+            <a:ext cx="348081" cy="348714"/>
           </a:xfrm>
           <a:prstGeom prst="rect">
             <a:avLst/>
@@ -18757,7 +18757,7 @@
         </p:nvCxnSpPr>
         <p:spPr>
           <a:xfrm>
-            <a:off x="8617976" y="13836001"/>
+            <a:off x="8617978" y="13630532"/>
             <a:ext cx="5601691" cy="0"/>
           </a:xfrm>
           <a:prstGeom prst="line">
@@ -18793,7 +18793,7 @@
         </p:nvSpPr>
         <p:spPr>
           <a:xfrm>
-            <a:off x="10400447" y="12169741"/>
+            <a:off x="10400449" y="11964273"/>
             <a:ext cx="1786965" cy="1465242"/>
           </a:xfrm>
           <a:custGeom>
@@ -18880,8 +18880,8 @@
         </p:nvCxnSpPr>
         <p:spPr>
           <a:xfrm>
-            <a:off x="12187404" y="13618950"/>
-            <a:ext cx="903176" cy="0"/>
+            <a:off x="12187407" y="13413481"/>
+            <a:ext cx="903175" cy="0"/>
           </a:xfrm>
           <a:prstGeom prst="line">
             <a:avLst/>
@@ -18923,8 +18923,8 @@
         </p:nvCxnSpPr>
         <p:spPr>
           <a:xfrm>
-            <a:off x="12486282" y="13523791"/>
-            <a:ext cx="508887" cy="0"/>
+            <a:off x="12486283" y="13318321"/>
+            <a:ext cx="508886" cy="0"/>
           </a:xfrm>
           <a:prstGeom prst="straightConnector1">
             <a:avLst/>
@@ -18968,8 +18968,8 @@
         </p:nvCxnSpPr>
         <p:spPr>
           <a:xfrm rot="10800000">
-            <a:off x="12486282" y="13700796"/>
-            <a:ext cx="508887" cy="0"/>
+            <a:off x="12486283" y="13495327"/>
+            <a:ext cx="508886" cy="0"/>
           </a:xfrm>
           <a:prstGeom prst="straightConnector1">
             <a:avLst/>
@@ -19014,7 +19014,7 @@
         </p:nvCxnSpPr>
         <p:spPr>
           <a:xfrm flipH="1" flipV="1">
-            <a:off x="9822600" y="13618961"/>
+            <a:off x="9822600" y="13413495"/>
             <a:ext cx="577846" cy="16023"/>
           </a:xfrm>
           <a:prstGeom prst="straightConnector1">
@@ -19056,8 +19056,8 @@
         </p:nvSpPr>
         <p:spPr>
           <a:xfrm>
-            <a:off x="13187853" y="13464167"/>
-            <a:ext cx="355689" cy="355689"/>
+            <a:off x="13187854" y="13258700"/>
+            <a:ext cx="355688" cy="355688"/>
           </a:xfrm>
           <a:prstGeom prst="ellipse">
             <a:avLst/>
@@ -19111,8 +19111,8 @@
         </p:nvSpPr>
         <p:spPr>
           <a:xfrm>
-            <a:off x="12000028" y="13464167"/>
-            <a:ext cx="355689" cy="355689"/>
+            <a:off x="12000030" y="13258700"/>
+            <a:ext cx="355688" cy="355688"/>
           </a:xfrm>
           <a:prstGeom prst="ellipse">
             <a:avLst/>
@@ -19161,8 +19161,8 @@
         </p:nvSpPr>
         <p:spPr>
           <a:xfrm>
-            <a:off x="9456545" y="13464167"/>
-            <a:ext cx="355689" cy="355689"/>
+            <a:off x="9456547" y="13258700"/>
+            <a:ext cx="355688" cy="355688"/>
           </a:xfrm>
           <a:prstGeom prst="ellipse">
             <a:avLst/>
@@ -19211,8 +19211,8 @@
         </p:nvSpPr>
         <p:spPr>
           <a:xfrm>
-            <a:off x="8614175" y="13096703"/>
-            <a:ext cx="739298" cy="739298"/>
+            <a:off x="8614177" y="12891236"/>
+            <a:ext cx="739299" cy="739299"/>
           </a:xfrm>
           <a:prstGeom prst="ellipse">
             <a:avLst/>
@@ -19266,8 +19266,8 @@
         </p:nvSpPr>
         <p:spPr>
           <a:xfrm>
-            <a:off x="13762289" y="13487064"/>
-            <a:ext cx="348080" cy="348713"/>
+            <a:off x="13762290" y="13281594"/>
+            <a:ext cx="348081" cy="348714"/>
           </a:xfrm>
           <a:prstGeom prst="rect">
             <a:avLst/>
@@ -19314,7 +19314,7 @@
         </p:nvCxnSpPr>
         <p:spPr>
           <a:xfrm>
-            <a:off x="16304319" y="7376849"/>
+            <a:off x="16304322" y="7171379"/>
             <a:ext cx="5601691" cy="0"/>
           </a:xfrm>
           <a:prstGeom prst="line">
@@ -19350,7 +19350,7 @@
         </p:nvSpPr>
         <p:spPr>
           <a:xfrm>
-            <a:off x="21430230" y="5947221"/>
+            <a:off x="21430233" y="5741755"/>
             <a:ext cx="355687" cy="1413703"/>
           </a:xfrm>
           <a:prstGeom prst="rect">
@@ -19398,7 +19398,7 @@
         </p:nvCxnSpPr>
         <p:spPr>
           <a:xfrm>
-            <a:off x="20168833" y="7159799"/>
+            <a:off x="20168832" y="6954331"/>
             <a:ext cx="608106" cy="0"/>
           </a:xfrm>
           <a:prstGeom prst="line">
@@ -19440,8 +19440,8 @@
         </p:nvSpPr>
         <p:spPr>
           <a:xfrm>
-            <a:off x="20974390" y="7196388"/>
-            <a:ext cx="168298" cy="168298"/>
+            <a:off x="20974391" y="6990921"/>
+            <a:ext cx="168299" cy="168299"/>
           </a:xfrm>
           <a:prstGeom prst="ellipse">
             <a:avLst/>
@@ -19486,7 +19486,7 @@
         </p:nvSpPr>
         <p:spPr>
           <a:xfrm>
-            <a:off x="16438413" y="6898325"/>
+            <a:off x="16438413" y="6692856"/>
             <a:ext cx="464094" cy="464094"/>
           </a:xfrm>
           <a:prstGeom prst="ellipse">
@@ -19532,8 +19532,8 @@
         </p:nvSpPr>
         <p:spPr>
           <a:xfrm>
-            <a:off x="20874196" y="7005022"/>
-            <a:ext cx="355689" cy="355689"/>
+            <a:off x="20874197" y="6799555"/>
+            <a:ext cx="355688" cy="355688"/>
           </a:xfrm>
           <a:prstGeom prst="ellipse">
             <a:avLst/>
@@ -19584,8 +19584,8 @@
         </p:nvCxnSpPr>
         <p:spPr>
           <a:xfrm flipV="1">
-            <a:off x="21042493" y="7008990"/>
-            <a:ext cx="0" cy="178778"/>
+            <a:off x="21042493" y="6803524"/>
+            <a:ext cx="0" cy="178779"/>
           </a:xfrm>
           <a:prstGeom prst="straightConnector1">
             <a:avLst/>
@@ -19629,8 +19629,8 @@
         </p:nvCxnSpPr>
         <p:spPr>
           <a:xfrm rot="-1200000" flipH="1" flipV="1">
-            <a:off x="20906409" y="7088906"/>
-            <a:ext cx="91839" cy="146292"/>
+            <a:off x="20906412" y="6883441"/>
+            <a:ext cx="91839" cy="146291"/>
           </a:xfrm>
           <a:prstGeom prst="straightConnector1">
             <a:avLst/>
@@ -19674,8 +19674,8 @@
         </p:nvCxnSpPr>
         <p:spPr>
           <a:xfrm rot="1200000" flipV="1">
-            <a:off x="21147191" y="7053783"/>
-            <a:ext cx="0" cy="178778"/>
+            <a:off x="21147192" y="6848317"/>
+            <a:ext cx="0" cy="178779"/>
           </a:xfrm>
           <a:prstGeom prst="straightConnector1">
             <a:avLst/>
@@ -19717,8 +19717,8 @@
         </p:nvSpPr>
         <p:spPr>
           <a:xfrm>
-            <a:off x="19686370" y="7005022"/>
-            <a:ext cx="355689" cy="355689"/>
+            <a:off x="19686371" y="6799555"/>
+            <a:ext cx="355688" cy="355688"/>
           </a:xfrm>
           <a:prstGeom prst="ellipse">
             <a:avLst/>
@@ -19767,8 +19767,8 @@
         </p:nvSpPr>
         <p:spPr>
           <a:xfrm>
-            <a:off x="16300517" y="6637558"/>
-            <a:ext cx="739298" cy="739298"/>
+            <a:off x="16300520" y="6432091"/>
+            <a:ext cx="739299" cy="739299"/>
           </a:xfrm>
           <a:prstGeom prst="ellipse">
             <a:avLst/>
@@ -19819,8 +19819,8 @@
         </p:nvCxnSpPr>
         <p:spPr>
           <a:xfrm flipH="1" flipV="1">
-            <a:off x="16654256" y="6653459"/>
-            <a:ext cx="4420" cy="233997"/>
+            <a:off x="16654257" y="6447991"/>
+            <a:ext cx="4420" cy="233996"/>
           </a:xfrm>
           <a:prstGeom prst="straightConnector1">
             <a:avLst/>
@@ -19864,8 +19864,8 @@
         </p:nvCxnSpPr>
         <p:spPr>
           <a:xfrm rot="3000000" flipH="1" flipV="1">
-            <a:off x="16902307" y="6776923"/>
-            <a:ext cx="4420" cy="197998"/>
+            <a:off x="16902308" y="6571457"/>
+            <a:ext cx="4420" cy="197997"/>
           </a:xfrm>
           <a:prstGeom prst="straightConnector1">
             <a:avLst/>
@@ -19909,8 +19909,8 @@
         </p:nvCxnSpPr>
         <p:spPr>
           <a:xfrm rot="-3000000" flipH="1" flipV="1">
-            <a:off x="16436192" y="6784876"/>
-            <a:ext cx="4420" cy="197998"/>
+            <a:off x="16436192" y="6579411"/>
+            <a:ext cx="4420" cy="197997"/>
           </a:xfrm>
           <a:prstGeom prst="straightConnector1">
             <a:avLst/>
@@ -19954,7 +19954,7 @@
         </p:nvCxnSpPr>
         <p:spPr>
           <a:xfrm>
-            <a:off x="16300512" y="9178314"/>
+            <a:off x="16300514" y="8972845"/>
             <a:ext cx="5601691" cy="0"/>
           </a:xfrm>
           <a:prstGeom prst="line">
@@ -19990,7 +19990,7 @@
         </p:nvSpPr>
         <p:spPr>
           <a:xfrm>
-            <a:off x="18082983" y="7512054"/>
+            <a:off x="18082986" y="7306586"/>
             <a:ext cx="1786965" cy="1465242"/>
           </a:xfrm>
           <a:custGeom>
@@ -20077,8 +20077,8 @@
         </p:nvCxnSpPr>
         <p:spPr>
           <a:xfrm>
-            <a:off x="19869940" y="8961263"/>
-            <a:ext cx="903176" cy="0"/>
+            <a:off x="19869944" y="8755793"/>
+            <a:ext cx="903175" cy="0"/>
           </a:xfrm>
           <a:prstGeom prst="line">
             <a:avLst/>
@@ -20120,8 +20120,8 @@
         </p:nvCxnSpPr>
         <p:spPr>
           <a:xfrm>
-            <a:off x="20168818" y="8866104"/>
-            <a:ext cx="508887" cy="0"/>
+            <a:off x="20168820" y="8660635"/>
+            <a:ext cx="508886" cy="0"/>
           </a:xfrm>
           <a:prstGeom prst="straightConnector1">
             <a:avLst/>
@@ -20165,8 +20165,8 @@
         </p:nvCxnSpPr>
         <p:spPr>
           <a:xfrm rot="10800000">
-            <a:off x="20168818" y="9043109"/>
-            <a:ext cx="508887" cy="0"/>
+            <a:off x="20168820" y="8837640"/>
+            <a:ext cx="508886" cy="0"/>
           </a:xfrm>
           <a:prstGeom prst="straightConnector1">
             <a:avLst/>
@@ -20211,7 +20211,7 @@
         </p:nvCxnSpPr>
         <p:spPr>
           <a:xfrm flipH="1" flipV="1">
-            <a:off x="17505136" y="8961274"/>
+            <a:off x="17505136" y="8755809"/>
             <a:ext cx="577846" cy="16023"/>
           </a:xfrm>
           <a:prstGeom prst="straightConnector1">
@@ -20253,8 +20253,8 @@
         </p:nvSpPr>
         <p:spPr>
           <a:xfrm>
-            <a:off x="20870389" y="8806480"/>
-            <a:ext cx="355689" cy="355689"/>
+            <a:off x="20870391" y="8601013"/>
+            <a:ext cx="355688" cy="355688"/>
           </a:xfrm>
           <a:prstGeom prst="ellipse">
             <a:avLst/>
@@ -20308,8 +20308,8 @@
         </p:nvSpPr>
         <p:spPr>
           <a:xfrm>
-            <a:off x="19682564" y="8806480"/>
-            <a:ext cx="355689" cy="355689"/>
+            <a:off x="19682567" y="8601013"/>
+            <a:ext cx="355688" cy="355688"/>
           </a:xfrm>
           <a:prstGeom prst="ellipse">
             <a:avLst/>
@@ -20358,8 +20358,8 @@
         </p:nvSpPr>
         <p:spPr>
           <a:xfrm>
-            <a:off x="17139081" y="8806480"/>
-            <a:ext cx="355689" cy="355689"/>
+            <a:off x="17139082" y="8601013"/>
+            <a:ext cx="355688" cy="355688"/>
           </a:xfrm>
           <a:prstGeom prst="ellipse">
             <a:avLst/>
@@ -20408,8 +20408,8 @@
         </p:nvSpPr>
         <p:spPr>
           <a:xfrm>
-            <a:off x="16296711" y="8439016"/>
-            <a:ext cx="739298" cy="739298"/>
+            <a:off x="16296714" y="8233549"/>
+            <a:ext cx="739299" cy="739299"/>
           </a:xfrm>
           <a:prstGeom prst="ellipse">
             <a:avLst/>
@@ -20463,7 +20463,7 @@
         </p:nvSpPr>
         <p:spPr>
           <a:xfrm>
-            <a:off x="21462034" y="7748466"/>
+            <a:off x="21462037" y="7543001"/>
             <a:ext cx="355687" cy="1413703"/>
           </a:xfrm>
           <a:prstGeom prst="rect">
@@ -20511,7 +20511,7 @@
         </p:nvCxnSpPr>
         <p:spPr>
           <a:xfrm>
-            <a:off x="16376238" y="11885700"/>
+            <a:off x="16376240" y="11680231"/>
             <a:ext cx="5601691" cy="0"/>
           </a:xfrm>
           <a:prstGeom prst="line">
@@ -20547,8 +20547,8 @@
         </p:nvSpPr>
         <p:spPr>
           <a:xfrm>
-            <a:off x="18158709" y="11398311"/>
-            <a:ext cx="1786965" cy="286371"/>
+            <a:off x="18158712" y="11192842"/>
+            <a:ext cx="1786965" cy="286372"/>
           </a:xfrm>
           <a:custGeom>
             <a:avLst/>
@@ -20634,8 +20634,8 @@
         </p:nvCxnSpPr>
         <p:spPr>
           <a:xfrm>
-            <a:off x="19945666" y="11668649"/>
-            <a:ext cx="903176" cy="0"/>
+            <a:off x="19945670" y="11463179"/>
+            <a:ext cx="903175" cy="0"/>
           </a:xfrm>
           <a:prstGeom prst="line">
             <a:avLst/>
@@ -20677,8 +20677,8 @@
         </p:nvCxnSpPr>
         <p:spPr>
           <a:xfrm>
-            <a:off x="20244544" y="11573490"/>
-            <a:ext cx="508887" cy="0"/>
+            <a:off x="20244546" y="11368021"/>
+            <a:ext cx="508886" cy="0"/>
           </a:xfrm>
           <a:prstGeom prst="straightConnector1">
             <a:avLst/>
@@ -20722,8 +20722,8 @@
         </p:nvCxnSpPr>
         <p:spPr>
           <a:xfrm rot="10800000">
-            <a:off x="20244544" y="11750495"/>
-            <a:ext cx="508887" cy="0"/>
+            <a:off x="20244546" y="11545026"/>
+            <a:ext cx="508886" cy="0"/>
           </a:xfrm>
           <a:prstGeom prst="straightConnector1">
             <a:avLst/>
@@ -20768,7 +20768,7 @@
         </p:nvCxnSpPr>
         <p:spPr>
           <a:xfrm flipH="1" flipV="1">
-            <a:off x="17580862" y="11668659"/>
+            <a:off x="17580862" y="11463190"/>
             <a:ext cx="577846" cy="16022"/>
           </a:xfrm>
           <a:prstGeom prst="straightConnector1">
@@ -20810,8 +20810,8 @@
         </p:nvSpPr>
         <p:spPr>
           <a:xfrm>
-            <a:off x="20946115" y="11513866"/>
-            <a:ext cx="355689" cy="355689"/>
+            <a:off x="20946117" y="11308399"/>
+            <a:ext cx="355688" cy="355688"/>
           </a:xfrm>
           <a:prstGeom prst="ellipse">
             <a:avLst/>
@@ -20865,8 +20865,8 @@
         </p:nvSpPr>
         <p:spPr>
           <a:xfrm>
-            <a:off x="19758290" y="11513866"/>
-            <a:ext cx="355689" cy="355689"/>
+            <a:off x="19758292" y="11308399"/>
+            <a:ext cx="355688" cy="355688"/>
           </a:xfrm>
           <a:prstGeom prst="ellipse">
             <a:avLst/>
@@ -20915,8 +20915,8 @@
         </p:nvSpPr>
         <p:spPr>
           <a:xfrm>
-            <a:off x="17214807" y="11513866"/>
-            <a:ext cx="355689" cy="355689"/>
+            <a:off x="17214808" y="11308399"/>
+            <a:ext cx="355688" cy="355688"/>
           </a:xfrm>
           <a:prstGeom prst="ellipse">
             <a:avLst/>
@@ -20965,8 +20965,8 @@
         </p:nvSpPr>
         <p:spPr>
           <a:xfrm>
-            <a:off x="16372437" y="11146402"/>
-            <a:ext cx="739298" cy="739298"/>
+            <a:off x="16372439" y="10940935"/>
+            <a:ext cx="739299" cy="739299"/>
           </a:xfrm>
           <a:prstGeom prst="ellipse">
             <a:avLst/>
@@ -21020,8 +21020,8 @@
         </p:nvSpPr>
         <p:spPr>
           <a:xfrm>
-            <a:off x="18882027" y="11520842"/>
-            <a:ext cx="348080" cy="348713"/>
+            <a:off x="18882029" y="11315373"/>
+            <a:ext cx="348081" cy="348714"/>
           </a:xfrm>
           <a:prstGeom prst="rect">
             <a:avLst/>
@@ -21068,7 +21068,7 @@
         </p:nvCxnSpPr>
         <p:spPr>
           <a:xfrm>
-            <a:off x="16368631" y="13945804"/>
+            <a:off x="16368634" y="13740336"/>
             <a:ext cx="5601691" cy="0"/>
           </a:xfrm>
           <a:prstGeom prst="line">
@@ -21104,7 +21104,7 @@
         </p:nvSpPr>
         <p:spPr>
           <a:xfrm>
-            <a:off x="18151102" y="12279544"/>
+            <a:off x="18151104" y="12074075"/>
             <a:ext cx="1786965" cy="1465242"/>
           </a:xfrm>
           <a:custGeom>
@@ -21191,8 +21191,8 @@
         </p:nvCxnSpPr>
         <p:spPr>
           <a:xfrm>
-            <a:off x="19938059" y="13728753"/>
-            <a:ext cx="903176" cy="0"/>
+            <a:off x="19938062" y="13523284"/>
+            <a:ext cx="903175" cy="0"/>
           </a:xfrm>
           <a:prstGeom prst="line">
             <a:avLst/>
@@ -21234,8 +21234,8 @@
         </p:nvCxnSpPr>
         <p:spPr>
           <a:xfrm>
-            <a:off x="20236937" y="13633594"/>
-            <a:ext cx="508887" cy="0"/>
+            <a:off x="20236938" y="13428125"/>
+            <a:ext cx="508886" cy="0"/>
           </a:xfrm>
           <a:prstGeom prst="straightConnector1">
             <a:avLst/>
@@ -21279,8 +21279,8 @@
         </p:nvCxnSpPr>
         <p:spPr>
           <a:xfrm rot="10800000">
-            <a:off x="20236937" y="13810599"/>
-            <a:ext cx="508887" cy="0"/>
+            <a:off x="20236938" y="13605131"/>
+            <a:ext cx="508886" cy="0"/>
           </a:xfrm>
           <a:prstGeom prst="straightConnector1">
             <a:avLst/>
@@ -21325,7 +21325,7 @@
         </p:nvCxnSpPr>
         <p:spPr>
           <a:xfrm flipH="1" flipV="1">
-            <a:off x="17573255" y="13728764"/>
+            <a:off x="17573254" y="13523298"/>
             <a:ext cx="577846" cy="16023"/>
           </a:xfrm>
           <a:prstGeom prst="straightConnector1">
@@ -21367,8 +21367,8 @@
         </p:nvSpPr>
         <p:spPr>
           <a:xfrm>
-            <a:off x="20938508" y="13573970"/>
-            <a:ext cx="355689" cy="355689"/>
+            <a:off x="20938511" y="13368502"/>
+            <a:ext cx="355688" cy="355688"/>
           </a:xfrm>
           <a:prstGeom prst="ellipse">
             <a:avLst/>
@@ -21422,8 +21422,8 @@
         </p:nvSpPr>
         <p:spPr>
           <a:xfrm>
-            <a:off x="19750683" y="13573970"/>
-            <a:ext cx="355689" cy="355689"/>
+            <a:off x="19750685" y="13368502"/>
+            <a:ext cx="355688" cy="355688"/>
           </a:xfrm>
           <a:prstGeom prst="ellipse">
             <a:avLst/>
@@ -21472,8 +21472,8 @@
         </p:nvSpPr>
         <p:spPr>
           <a:xfrm>
-            <a:off x="17207200" y="13573970"/>
-            <a:ext cx="355689" cy="355689"/>
+            <a:off x="17207202" y="13368502"/>
+            <a:ext cx="355688" cy="355688"/>
           </a:xfrm>
           <a:prstGeom prst="ellipse">
             <a:avLst/>
@@ -21522,8 +21522,8 @@
         </p:nvSpPr>
         <p:spPr>
           <a:xfrm>
-            <a:off x="16364830" y="13206506"/>
-            <a:ext cx="739298" cy="739298"/>
+            <a:off x="16364832" y="13001040"/>
+            <a:ext cx="739299" cy="739299"/>
           </a:xfrm>
           <a:prstGeom prst="ellipse">
             <a:avLst/>
@@ -21577,8 +21577,8 @@
         </p:nvSpPr>
         <p:spPr>
           <a:xfrm>
-            <a:off x="18857209" y="13596867"/>
-            <a:ext cx="348080" cy="348713"/>
+            <a:off x="18857211" y="13391398"/>
+            <a:ext cx="348081" cy="348714"/>
           </a:xfrm>
           <a:prstGeom prst="rect">
             <a:avLst/>
@@ -21625,7 +21625,7 @@
         </p:nvCxnSpPr>
         <p:spPr>
           <a:xfrm>
-            <a:off x="43309658" y="8721027"/>
+            <a:off x="42913972" y="8676356"/>
             <a:ext cx="5601691" cy="0"/>
           </a:xfrm>
           <a:prstGeom prst="line">
@@ -21661,8 +21661,8 @@
         </p:nvSpPr>
         <p:spPr>
           <a:xfrm>
-            <a:off x="48427268" y="7764767"/>
-            <a:ext cx="370542" cy="940335"/>
+            <a:off x="48031583" y="7720098"/>
+            <a:ext cx="370541" cy="940335"/>
           </a:xfrm>
           <a:prstGeom prst="rect">
             <a:avLst/>
@@ -21709,7 +21709,7 @@
         </p:nvCxnSpPr>
         <p:spPr>
           <a:xfrm>
-            <a:off x="47174166" y="8503977"/>
+            <a:off x="46778477" y="8459305"/>
             <a:ext cx="608106" cy="0"/>
           </a:xfrm>
           <a:prstGeom prst="line">
@@ -21751,8 +21751,8 @@
         </p:nvSpPr>
         <p:spPr>
           <a:xfrm>
-            <a:off x="47979736" y="8540566"/>
-            <a:ext cx="168298" cy="168298"/>
+            <a:off x="47584048" y="8495897"/>
+            <a:ext cx="168299" cy="168299"/>
           </a:xfrm>
           <a:prstGeom prst="ellipse">
             <a:avLst/>
@@ -21797,7 +21797,7 @@
         </p:nvSpPr>
         <p:spPr>
           <a:xfrm>
-            <a:off x="43443745" y="8242503"/>
+            <a:off x="43048056" y="8197832"/>
             <a:ext cx="464094" cy="464094"/>
           </a:xfrm>
           <a:prstGeom prst="ellipse">
@@ -21843,8 +21843,8 @@
         </p:nvSpPr>
         <p:spPr>
           <a:xfrm>
-            <a:off x="47879535" y="8349200"/>
-            <a:ext cx="355689" cy="355689"/>
+            <a:off x="47483848" y="8304530"/>
+            <a:ext cx="355688" cy="355688"/>
           </a:xfrm>
           <a:prstGeom prst="ellipse">
             <a:avLst/>
@@ -21895,8 +21895,8 @@
         </p:nvCxnSpPr>
         <p:spPr>
           <a:xfrm flipV="1">
-            <a:off x="48047839" y="8353168"/>
-            <a:ext cx="0" cy="178778"/>
+            <a:off x="47652150" y="8308499"/>
+            <a:ext cx="0" cy="178779"/>
           </a:xfrm>
           <a:prstGeom prst="straightConnector1">
             <a:avLst/>
@@ -21940,8 +21940,8 @@
         </p:nvCxnSpPr>
         <p:spPr>
           <a:xfrm rot="-1200000" flipH="1" flipV="1">
-            <a:off x="47911748" y="8433084"/>
-            <a:ext cx="91839" cy="146292"/>
+            <a:off x="47516062" y="8388417"/>
+            <a:ext cx="91839" cy="146291"/>
           </a:xfrm>
           <a:prstGeom prst="straightConnector1">
             <a:avLst/>
@@ -21985,8 +21985,8 @@
         </p:nvCxnSpPr>
         <p:spPr>
           <a:xfrm rot="1200000" flipV="1">
-            <a:off x="48152531" y="8397961"/>
-            <a:ext cx="0" cy="178778"/>
+            <a:off x="47756843" y="8353293"/>
+            <a:ext cx="0" cy="178779"/>
           </a:xfrm>
           <a:prstGeom prst="straightConnector1">
             <a:avLst/>
@@ -22028,8 +22028,8 @@
         </p:nvSpPr>
         <p:spPr>
           <a:xfrm>
-            <a:off x="46691716" y="8349200"/>
-            <a:ext cx="355689" cy="355689"/>
+            <a:off x="46296028" y="8304530"/>
+            <a:ext cx="355688" cy="355688"/>
           </a:xfrm>
           <a:prstGeom prst="ellipse">
             <a:avLst/>
@@ -22078,8 +22078,8 @@
         </p:nvSpPr>
         <p:spPr>
           <a:xfrm>
-            <a:off x="43305857" y="7981736"/>
-            <a:ext cx="739298" cy="739298"/>
+            <a:off x="42910171" y="7937067"/>
+            <a:ext cx="739299" cy="739299"/>
           </a:xfrm>
           <a:prstGeom prst="ellipse">
             <a:avLst/>
@@ -22130,8 +22130,8 @@
         </p:nvCxnSpPr>
         <p:spPr>
           <a:xfrm flipH="1" flipV="1">
-            <a:off x="43659602" y="7997637"/>
-            <a:ext cx="4420" cy="233997"/>
+            <a:off x="43263914" y="7952968"/>
+            <a:ext cx="4420" cy="233996"/>
           </a:xfrm>
           <a:prstGeom prst="straightConnector1">
             <a:avLst/>
@@ -22175,8 +22175,8 @@
         </p:nvCxnSpPr>
         <p:spPr>
           <a:xfrm rot="3000000" flipH="1" flipV="1">
-            <a:off x="43907639" y="8121101"/>
-            <a:ext cx="4420" cy="197998"/>
+            <a:off x="43511951" y="8076433"/>
+            <a:ext cx="4420" cy="197997"/>
           </a:xfrm>
           <a:prstGeom prst="straightConnector1">
             <a:avLst/>
@@ -22220,8 +22220,8 @@
         </p:nvCxnSpPr>
         <p:spPr>
           <a:xfrm rot="-3000000" flipH="1" flipV="1">
-            <a:off x="43441538" y="8129054"/>
-            <a:ext cx="4420" cy="197998"/>
+            <a:off x="43045850" y="8084386"/>
+            <a:ext cx="4420" cy="197997"/>
           </a:xfrm>
           <a:prstGeom prst="straightConnector1">
             <a:avLst/>
@@ -22265,7 +22265,7 @@
         </p:nvCxnSpPr>
         <p:spPr>
           <a:xfrm>
-            <a:off x="43305851" y="10522492"/>
+            <a:off x="42910164" y="10477822"/>
             <a:ext cx="5601691" cy="0"/>
           </a:xfrm>
           <a:prstGeom prst="line">
@@ -22301,8 +22301,8 @@
         </p:nvSpPr>
         <p:spPr>
           <a:xfrm>
-            <a:off x="48423461" y="9566231"/>
-            <a:ext cx="370542" cy="940335"/>
+            <a:off x="48027775" y="9521563"/>
+            <a:ext cx="370541" cy="940335"/>
           </a:xfrm>
           <a:prstGeom prst="rect">
             <a:avLst/>
@@ -22347,8 +22347,8 @@
         </p:nvSpPr>
         <p:spPr>
           <a:xfrm>
-            <a:off x="45088329" y="9335646"/>
-            <a:ext cx="1786965" cy="985828"/>
+            <a:off x="44692643" y="9290978"/>
+            <a:ext cx="1786965" cy="985829"/>
           </a:xfrm>
           <a:custGeom>
             <a:avLst/>
@@ -22434,8 +22434,8 @@
         </p:nvCxnSpPr>
         <p:spPr>
           <a:xfrm>
-            <a:off x="46875286" y="10305441"/>
-            <a:ext cx="903176" cy="0"/>
+            <a:off x="46479600" y="10260770"/>
+            <a:ext cx="903175" cy="0"/>
           </a:xfrm>
           <a:prstGeom prst="line">
             <a:avLst/>
@@ -22477,8 +22477,8 @@
         </p:nvCxnSpPr>
         <p:spPr>
           <a:xfrm>
-            <a:off x="47174157" y="10210282"/>
-            <a:ext cx="508887" cy="0"/>
+            <a:off x="46778469" y="10165611"/>
+            <a:ext cx="508886" cy="0"/>
           </a:xfrm>
           <a:prstGeom prst="straightConnector1">
             <a:avLst/>
@@ -22522,8 +22522,8 @@
         </p:nvCxnSpPr>
         <p:spPr>
           <a:xfrm rot="10800000">
-            <a:off x="47174157" y="10387287"/>
-            <a:ext cx="508887" cy="0"/>
+            <a:off x="46778469" y="10342617"/>
+            <a:ext cx="508886" cy="0"/>
           </a:xfrm>
           <a:prstGeom prst="straightConnector1">
             <a:avLst/>
@@ -22568,7 +22568,7 @@
         </p:nvCxnSpPr>
         <p:spPr>
           <a:xfrm flipH="1" flipV="1">
-            <a:off x="44510482" y="10305452"/>
+            <a:off x="44114793" y="10260785"/>
             <a:ext cx="577846" cy="16033"/>
           </a:xfrm>
           <a:prstGeom prst="straightConnector1">
@@ -22610,8 +22610,8 @@
         </p:nvSpPr>
         <p:spPr>
           <a:xfrm>
-            <a:off x="47875729" y="10150658"/>
-            <a:ext cx="355689" cy="355689"/>
+            <a:off x="47480042" y="10105988"/>
+            <a:ext cx="355688" cy="355688"/>
           </a:xfrm>
           <a:prstGeom prst="ellipse">
             <a:avLst/>
@@ -22665,8 +22665,8 @@
         </p:nvSpPr>
         <p:spPr>
           <a:xfrm>
-            <a:off x="46687910" y="10150658"/>
-            <a:ext cx="355689" cy="355689"/>
+            <a:off x="46292222" y="10105988"/>
+            <a:ext cx="355688" cy="355688"/>
           </a:xfrm>
           <a:prstGeom prst="ellipse">
             <a:avLst/>
@@ -22715,8 +22715,8 @@
         </p:nvSpPr>
         <p:spPr>
           <a:xfrm>
-            <a:off x="44144428" y="10150658"/>
-            <a:ext cx="355689" cy="355689"/>
+            <a:off x="43748741" y="10105988"/>
+            <a:ext cx="355688" cy="355688"/>
           </a:xfrm>
           <a:prstGeom prst="ellipse">
             <a:avLst/>
@@ -22765,8 +22765,8 @@
         </p:nvSpPr>
         <p:spPr>
           <a:xfrm>
-            <a:off x="43302050" y="9783194"/>
-            <a:ext cx="739298" cy="739298"/>
+            <a:off x="42906363" y="9738525"/>
+            <a:ext cx="739299" cy="739299"/>
           </a:xfrm>
           <a:prstGeom prst="ellipse">
             <a:avLst/>
@@ -22822,7 +22822,7 @@
         </p:nvCxnSpPr>
         <p:spPr>
           <a:xfrm>
-            <a:off x="27944538" y="8744889"/>
+            <a:off x="27548851" y="8700218"/>
             <a:ext cx="5601691" cy="0"/>
           </a:xfrm>
           <a:prstGeom prst="line">
@@ -22858,8 +22858,8 @@
         </p:nvSpPr>
         <p:spPr>
           <a:xfrm>
-            <a:off x="30446519" y="7788629"/>
-            <a:ext cx="370542" cy="940335"/>
+            <a:off x="30050833" y="7743961"/>
+            <a:ext cx="370541" cy="940335"/>
           </a:xfrm>
           <a:prstGeom prst="rect">
             <a:avLst/>
@@ -22906,7 +22906,7 @@
         </p:nvCxnSpPr>
         <p:spPr>
           <a:xfrm>
-            <a:off x="31809052" y="8527839"/>
+            <a:off x="31413363" y="8483168"/>
             <a:ext cx="608106" cy="0"/>
           </a:xfrm>
           <a:prstGeom prst="line">
@@ -22948,8 +22948,8 @@
         </p:nvSpPr>
         <p:spPr>
           <a:xfrm>
-            <a:off x="32614609" y="8564428"/>
-            <a:ext cx="168298" cy="168298"/>
+            <a:off x="32218922" y="8519758"/>
+            <a:ext cx="168299" cy="168299"/>
           </a:xfrm>
           <a:prstGeom prst="ellipse">
             <a:avLst/>
@@ -22994,7 +22994,7 @@
         </p:nvSpPr>
         <p:spPr>
           <a:xfrm>
-            <a:off x="28078632" y="8266365"/>
+            <a:off x="27682942" y="8221695"/>
             <a:ext cx="464094" cy="464094"/>
           </a:xfrm>
           <a:prstGeom prst="ellipse">
@@ -23040,8 +23040,8 @@
         </p:nvSpPr>
         <p:spPr>
           <a:xfrm>
-            <a:off x="32514415" y="8373062"/>
-            <a:ext cx="355689" cy="355689"/>
+            <a:off x="32118728" y="8328393"/>
+            <a:ext cx="355688" cy="355688"/>
           </a:xfrm>
           <a:prstGeom prst="ellipse">
             <a:avLst/>
@@ -23092,8 +23092,8 @@
         </p:nvCxnSpPr>
         <p:spPr>
           <a:xfrm flipV="1">
-            <a:off x="32682712" y="8377030"/>
-            <a:ext cx="0" cy="178778"/>
+            <a:off x="32287022" y="8332361"/>
+            <a:ext cx="0" cy="178779"/>
           </a:xfrm>
           <a:prstGeom prst="straightConnector1">
             <a:avLst/>
@@ -23137,8 +23137,8 @@
         </p:nvCxnSpPr>
         <p:spPr>
           <a:xfrm rot="-1200000" flipH="1" flipV="1">
-            <a:off x="32546628" y="8456946"/>
-            <a:ext cx="91839" cy="146292"/>
+            <a:off x="32150943" y="8412278"/>
+            <a:ext cx="91839" cy="146291"/>
           </a:xfrm>
           <a:prstGeom prst="straightConnector1">
             <a:avLst/>
@@ -23182,8 +23182,8 @@
         </p:nvCxnSpPr>
         <p:spPr>
           <a:xfrm rot="1200000" flipV="1">
-            <a:off x="32787410" y="8421823"/>
-            <a:ext cx="0" cy="178778"/>
+            <a:off x="32391721" y="8377154"/>
+            <a:ext cx="0" cy="178779"/>
           </a:xfrm>
           <a:prstGeom prst="straightConnector1">
             <a:avLst/>
@@ -23225,8 +23225,8 @@
         </p:nvSpPr>
         <p:spPr>
           <a:xfrm>
-            <a:off x="31326589" y="8373062"/>
-            <a:ext cx="355689" cy="355689"/>
+            <a:off x="30930902" y="8328393"/>
+            <a:ext cx="355688" cy="355688"/>
           </a:xfrm>
           <a:prstGeom prst="ellipse">
             <a:avLst/>
@@ -23275,8 +23275,8 @@
         </p:nvSpPr>
         <p:spPr>
           <a:xfrm>
-            <a:off x="27940736" y="8005598"/>
-            <a:ext cx="739298" cy="739298"/>
+            <a:off x="27545049" y="7960930"/>
+            <a:ext cx="739299" cy="739299"/>
           </a:xfrm>
           <a:prstGeom prst="ellipse">
             <a:avLst/>
@@ -23327,8 +23327,8 @@
         </p:nvCxnSpPr>
         <p:spPr>
           <a:xfrm flipH="1" flipV="1">
-            <a:off x="28294475" y="8021499"/>
-            <a:ext cx="4420" cy="233997"/>
+            <a:off x="27898787" y="7976830"/>
+            <a:ext cx="4420" cy="233996"/>
           </a:xfrm>
           <a:prstGeom prst="straightConnector1">
             <a:avLst/>
@@ -23372,8 +23372,8 @@
         </p:nvCxnSpPr>
         <p:spPr>
           <a:xfrm rot="3000000" flipH="1" flipV="1">
-            <a:off x="28542526" y="8144963"/>
-            <a:ext cx="4420" cy="197998"/>
+            <a:off x="28146837" y="8100296"/>
+            <a:ext cx="4420" cy="197997"/>
           </a:xfrm>
           <a:prstGeom prst="straightConnector1">
             <a:avLst/>
@@ -23417,8 +23417,8 @@
         </p:nvCxnSpPr>
         <p:spPr>
           <a:xfrm rot="-3000000" flipH="1" flipV="1">
-            <a:off x="28076411" y="8152916"/>
-            <a:ext cx="4420" cy="197998"/>
+            <a:off x="27680723" y="8108248"/>
+            <a:ext cx="4420" cy="197997"/>
           </a:xfrm>
           <a:prstGeom prst="straightConnector1">
             <a:avLst/>
@@ -23462,7 +23462,7 @@
         </p:nvCxnSpPr>
         <p:spPr>
           <a:xfrm>
-            <a:off x="27940731" y="10546354"/>
+            <a:off x="27545045" y="10501682"/>
             <a:ext cx="5601691" cy="0"/>
           </a:xfrm>
           <a:prstGeom prst="line">
@@ -23498,8 +23498,8 @@
         </p:nvSpPr>
         <p:spPr>
           <a:xfrm>
-            <a:off x="30442712" y="9590093"/>
-            <a:ext cx="370542" cy="940335"/>
+            <a:off x="30047026" y="9545425"/>
+            <a:ext cx="370541" cy="940335"/>
           </a:xfrm>
           <a:prstGeom prst="rect">
             <a:avLst/>
@@ -23544,8 +23544,8 @@
         </p:nvSpPr>
         <p:spPr>
           <a:xfrm>
-            <a:off x="29723202" y="9359508"/>
-            <a:ext cx="1786965" cy="985828"/>
+            <a:off x="29327515" y="9314839"/>
+            <a:ext cx="1786965" cy="985829"/>
           </a:xfrm>
           <a:custGeom>
             <a:avLst/>
@@ -23631,8 +23631,8 @@
         </p:nvCxnSpPr>
         <p:spPr>
           <a:xfrm>
-            <a:off x="31510159" y="10329303"/>
-            <a:ext cx="903176" cy="0"/>
+            <a:off x="31114473" y="10284632"/>
+            <a:ext cx="903175" cy="0"/>
           </a:xfrm>
           <a:prstGeom prst="line">
             <a:avLst/>
@@ -23674,8 +23674,8 @@
         </p:nvCxnSpPr>
         <p:spPr>
           <a:xfrm>
-            <a:off x="31809037" y="10234144"/>
-            <a:ext cx="508887" cy="0"/>
+            <a:off x="31413349" y="10189474"/>
+            <a:ext cx="508886" cy="0"/>
           </a:xfrm>
           <a:prstGeom prst="straightConnector1">
             <a:avLst/>
@@ -23719,8 +23719,8 @@
         </p:nvCxnSpPr>
         <p:spPr>
           <a:xfrm rot="10800000">
-            <a:off x="31809037" y="10411149"/>
-            <a:ext cx="508887" cy="0"/>
+            <a:off x="31413349" y="10366477"/>
+            <a:ext cx="508886" cy="0"/>
           </a:xfrm>
           <a:prstGeom prst="straightConnector1">
             <a:avLst/>
@@ -23765,7 +23765,7 @@
         </p:nvCxnSpPr>
         <p:spPr>
           <a:xfrm flipH="1" flipV="1">
-            <a:off x="29145355" y="10329314"/>
+            <a:off x="28749667" y="10284646"/>
             <a:ext cx="577846" cy="16033"/>
           </a:xfrm>
           <a:prstGeom prst="straightConnector1">
@@ -23807,8 +23807,8 @@
         </p:nvSpPr>
         <p:spPr>
           <a:xfrm>
-            <a:off x="32510608" y="10174520"/>
-            <a:ext cx="355689" cy="355689"/>
+            <a:off x="32114921" y="10129851"/>
+            <a:ext cx="355688" cy="355688"/>
           </a:xfrm>
           <a:prstGeom prst="ellipse">
             <a:avLst/>
@@ -23862,8 +23862,8 @@
         </p:nvSpPr>
         <p:spPr>
           <a:xfrm>
-            <a:off x="31322783" y="10174520"/>
-            <a:ext cx="355689" cy="355689"/>
+            <a:off x="30927096" y="10129851"/>
+            <a:ext cx="355688" cy="355688"/>
           </a:xfrm>
           <a:prstGeom prst="ellipse">
             <a:avLst/>
@@ -23912,8 +23912,8 @@
         </p:nvSpPr>
         <p:spPr>
           <a:xfrm>
-            <a:off x="28779300" y="10174520"/>
-            <a:ext cx="355689" cy="355689"/>
+            <a:off x="28383613" y="10129851"/>
+            <a:ext cx="355688" cy="355688"/>
           </a:xfrm>
           <a:prstGeom prst="ellipse">
             <a:avLst/>
@@ -23962,8 +23962,8 @@
         </p:nvSpPr>
         <p:spPr>
           <a:xfrm>
-            <a:off x="27936930" y="9807056"/>
-            <a:ext cx="739298" cy="739298"/>
+            <a:off x="27541243" y="9762388"/>
+            <a:ext cx="739299" cy="739299"/>
           </a:xfrm>
           <a:prstGeom prst="ellipse">
             <a:avLst/>
@@ -24031,8 +24031,8 @@
         </p:blipFill>
         <p:spPr>
           <a:xfrm>
-            <a:off x="29839661" y="5479544"/>
-            <a:ext cx="1563058" cy="1563058"/>
+            <a:off x="29872320" y="5339390"/>
+            <a:ext cx="1563059" cy="1563059"/>
           </a:xfrm>
           <a:prstGeom prst="rect">
             <a:avLst/>
@@ -24055,7 +24055,7 @@
         </p:nvCxnSpPr>
         <p:spPr>
           <a:xfrm>
-            <a:off x="35745417" y="8679481"/>
+            <a:off x="35349730" y="8634810"/>
             <a:ext cx="5601691" cy="0"/>
           </a:xfrm>
           <a:prstGeom prst="line">
@@ -24091,8 +24091,8 @@
         </p:nvSpPr>
         <p:spPr>
           <a:xfrm>
-            <a:off x="38247398" y="7723221"/>
-            <a:ext cx="370542" cy="940335"/>
+            <a:off x="37851712" y="7678553"/>
+            <a:ext cx="370541" cy="940335"/>
           </a:xfrm>
           <a:prstGeom prst="rect">
             <a:avLst/>
@@ -24139,7 +24139,7 @@
         </p:nvCxnSpPr>
         <p:spPr>
           <a:xfrm>
-            <a:off x="39609931" y="8462431"/>
+            <a:off x="39214242" y="8417760"/>
             <a:ext cx="608106" cy="0"/>
           </a:xfrm>
           <a:prstGeom prst="line">
@@ -24181,8 +24181,8 @@
         </p:nvSpPr>
         <p:spPr>
           <a:xfrm>
-            <a:off x="40415488" y="8499020"/>
-            <a:ext cx="168298" cy="168298"/>
+            <a:off x="40019800" y="8454350"/>
+            <a:ext cx="168299" cy="168299"/>
           </a:xfrm>
           <a:prstGeom prst="ellipse">
             <a:avLst/>
@@ -24227,7 +24227,7 @@
         </p:nvSpPr>
         <p:spPr>
           <a:xfrm>
-            <a:off x="35879511" y="8200957"/>
+            <a:off x="35483823" y="8156287"/>
             <a:ext cx="464094" cy="464094"/>
           </a:xfrm>
           <a:prstGeom prst="ellipse">
@@ -24273,8 +24273,8 @@
         </p:nvSpPr>
         <p:spPr>
           <a:xfrm>
-            <a:off x="40315294" y="8307654"/>
-            <a:ext cx="355689" cy="355689"/>
+            <a:off x="39919606" y="8262985"/>
+            <a:ext cx="355688" cy="355688"/>
           </a:xfrm>
           <a:prstGeom prst="ellipse">
             <a:avLst/>
@@ -24325,8 +24325,8 @@
         </p:nvCxnSpPr>
         <p:spPr>
           <a:xfrm flipV="1">
-            <a:off x="40483591" y="8311622"/>
-            <a:ext cx="0" cy="178778"/>
+            <a:off x="40087903" y="8266953"/>
+            <a:ext cx="0" cy="178779"/>
           </a:xfrm>
           <a:prstGeom prst="straightConnector1">
             <a:avLst/>
@@ -24370,8 +24370,8 @@
         </p:nvCxnSpPr>
         <p:spPr>
           <a:xfrm rot="-1200000" flipH="1" flipV="1">
-            <a:off x="40347507" y="8391538"/>
-            <a:ext cx="91839" cy="146292"/>
+            <a:off x="39951822" y="8346870"/>
+            <a:ext cx="91839" cy="146291"/>
           </a:xfrm>
           <a:prstGeom prst="straightConnector1">
             <a:avLst/>
@@ -24415,8 +24415,8 @@
         </p:nvCxnSpPr>
         <p:spPr>
           <a:xfrm rot="1200000" flipV="1">
-            <a:off x="40588289" y="8356415"/>
-            <a:ext cx="0" cy="178778"/>
+            <a:off x="40192600" y="8311746"/>
+            <a:ext cx="0" cy="178779"/>
           </a:xfrm>
           <a:prstGeom prst="straightConnector1">
             <a:avLst/>
@@ -24458,8 +24458,8 @@
         </p:nvSpPr>
         <p:spPr>
           <a:xfrm>
-            <a:off x="39127468" y="8307654"/>
-            <a:ext cx="355689" cy="355689"/>
+            <a:off x="38731781" y="8262985"/>
+            <a:ext cx="355688" cy="355688"/>
           </a:xfrm>
           <a:prstGeom prst="ellipse">
             <a:avLst/>
@@ -24508,8 +24508,8 @@
         </p:nvSpPr>
         <p:spPr>
           <a:xfrm>
-            <a:off x="35741615" y="7940190"/>
-            <a:ext cx="739298" cy="739298"/>
+            <a:off x="35345928" y="7895522"/>
+            <a:ext cx="739299" cy="739299"/>
           </a:xfrm>
           <a:prstGeom prst="ellipse">
             <a:avLst/>
@@ -24560,8 +24560,8 @@
         </p:nvCxnSpPr>
         <p:spPr>
           <a:xfrm flipH="1" flipV="1">
-            <a:off x="36095354" y="7956091"/>
-            <a:ext cx="4420" cy="233997"/>
+            <a:off x="35699666" y="7911422"/>
+            <a:ext cx="4420" cy="233996"/>
           </a:xfrm>
           <a:prstGeom prst="straightConnector1">
             <a:avLst/>
@@ -24605,8 +24605,8 @@
         </p:nvCxnSpPr>
         <p:spPr>
           <a:xfrm rot="3000000" flipH="1" flipV="1">
-            <a:off x="36343405" y="8079555"/>
-            <a:ext cx="4420" cy="197998"/>
+            <a:off x="35947718" y="8034888"/>
+            <a:ext cx="4420" cy="197997"/>
           </a:xfrm>
           <a:prstGeom prst="straightConnector1">
             <a:avLst/>
@@ -24650,8 +24650,8 @@
         </p:nvCxnSpPr>
         <p:spPr>
           <a:xfrm rot="-3000000" flipH="1" flipV="1">
-            <a:off x="35877290" y="8087508"/>
-            <a:ext cx="4420" cy="197998"/>
+            <a:off x="35481602" y="8042840"/>
+            <a:ext cx="4420" cy="197997"/>
           </a:xfrm>
           <a:prstGeom prst="straightConnector1">
             <a:avLst/>
@@ -24695,7 +24695,7 @@
         </p:nvCxnSpPr>
         <p:spPr>
           <a:xfrm>
-            <a:off x="35741610" y="10480946"/>
+            <a:off x="35345924" y="10436274"/>
             <a:ext cx="5601691" cy="0"/>
           </a:xfrm>
           <a:prstGeom prst="line">
@@ -24731,8 +24731,8 @@
         </p:nvSpPr>
         <p:spPr>
           <a:xfrm>
-            <a:off x="38243591" y="9524685"/>
-            <a:ext cx="370542" cy="940335"/>
+            <a:off x="37847905" y="9480017"/>
+            <a:ext cx="370541" cy="940335"/>
           </a:xfrm>
           <a:prstGeom prst="rect">
             <a:avLst/>
@@ -24777,8 +24777,8 @@
         </p:nvSpPr>
         <p:spPr>
           <a:xfrm>
-            <a:off x="37524081" y="9294100"/>
-            <a:ext cx="1786965" cy="985828"/>
+            <a:off x="37128395" y="9249431"/>
+            <a:ext cx="1786965" cy="985829"/>
           </a:xfrm>
           <a:custGeom>
             <a:avLst/>
@@ -24864,8 +24864,8 @@
         </p:nvCxnSpPr>
         <p:spPr>
           <a:xfrm>
-            <a:off x="39311038" y="10263895"/>
-            <a:ext cx="903176" cy="0"/>
+            <a:off x="38915352" y="10219224"/>
+            <a:ext cx="903175" cy="0"/>
           </a:xfrm>
           <a:prstGeom prst="line">
             <a:avLst/>
@@ -24907,8 +24907,8 @@
         </p:nvCxnSpPr>
         <p:spPr>
           <a:xfrm>
-            <a:off x="39609916" y="10168736"/>
-            <a:ext cx="508887" cy="0"/>
+            <a:off x="39214228" y="10124066"/>
+            <a:ext cx="508886" cy="0"/>
           </a:xfrm>
           <a:prstGeom prst="straightConnector1">
             <a:avLst/>
@@ -24952,8 +24952,8 @@
         </p:nvCxnSpPr>
         <p:spPr>
           <a:xfrm rot="10800000">
-            <a:off x="39609916" y="10345741"/>
-            <a:ext cx="508887" cy="0"/>
+            <a:off x="39214228" y="10301069"/>
+            <a:ext cx="508886" cy="0"/>
           </a:xfrm>
           <a:prstGeom prst="straightConnector1">
             <a:avLst/>
@@ -24998,7 +24998,7 @@
         </p:nvCxnSpPr>
         <p:spPr>
           <a:xfrm flipH="1" flipV="1">
-            <a:off x="36946234" y="10263906"/>
+            <a:off x="36550546" y="10219238"/>
             <a:ext cx="577846" cy="16033"/>
           </a:xfrm>
           <a:prstGeom prst="straightConnector1">
@@ -25040,8 +25040,8 @@
         </p:nvSpPr>
         <p:spPr>
           <a:xfrm>
-            <a:off x="40311487" y="10109112"/>
-            <a:ext cx="355689" cy="355689"/>
+            <a:off x="39915800" y="10064443"/>
+            <a:ext cx="355688" cy="355688"/>
           </a:xfrm>
           <a:prstGeom prst="ellipse">
             <a:avLst/>
@@ -25095,8 +25095,8 @@
         </p:nvSpPr>
         <p:spPr>
           <a:xfrm>
-            <a:off x="39123662" y="10109112"/>
-            <a:ext cx="355689" cy="355689"/>
+            <a:off x="38727974" y="10064443"/>
+            <a:ext cx="355688" cy="355688"/>
           </a:xfrm>
           <a:prstGeom prst="ellipse">
             <a:avLst/>
@@ -25145,8 +25145,8 @@
         </p:nvSpPr>
         <p:spPr>
           <a:xfrm>
-            <a:off x="36580179" y="10109112"/>
-            <a:ext cx="355689" cy="355689"/>
+            <a:off x="36184492" y="10064443"/>
+            <a:ext cx="355688" cy="355688"/>
           </a:xfrm>
           <a:prstGeom prst="ellipse">
             <a:avLst/>
@@ -25195,8 +25195,8 @@
         </p:nvSpPr>
         <p:spPr>
           <a:xfrm>
-            <a:off x="35737809" y="9741648"/>
-            <a:ext cx="739298" cy="739298"/>
+            <a:off x="35342123" y="9696980"/>
+            <a:ext cx="739299" cy="739299"/>
           </a:xfrm>
           <a:prstGeom prst="ellipse">
             <a:avLst/>
@@ -25264,7 +25264,7 @@
         </p:blipFill>
         <p:spPr>
           <a:xfrm>
-            <a:off x="37478016" y="5462750"/>
+            <a:off x="37478019" y="5355256"/>
             <a:ext cx="1608779" cy="1608779"/>
           </a:xfrm>
           <a:prstGeom prst="rect">
@@ -25288,7 +25288,7 @@
         </p:nvCxnSpPr>
         <p:spPr>
           <a:xfrm>
-            <a:off x="27839848" y="14324620"/>
+            <a:off x="27444162" y="14279949"/>
             <a:ext cx="5601691" cy="0"/>
           </a:xfrm>
           <a:prstGeom prst="line">
@@ -25324,8 +25324,8 @@
         </p:nvSpPr>
         <p:spPr>
           <a:xfrm>
-            <a:off x="29622320" y="13137775"/>
-            <a:ext cx="1786965" cy="985828"/>
+            <a:off x="29226633" y="13093107"/>
+            <a:ext cx="1786965" cy="985829"/>
           </a:xfrm>
           <a:custGeom>
             <a:avLst/>
@@ -25411,8 +25411,8 @@
         </p:nvCxnSpPr>
         <p:spPr>
           <a:xfrm>
-            <a:off x="31399752" y="14107569"/>
-            <a:ext cx="903176" cy="0"/>
+            <a:off x="31004066" y="14062899"/>
+            <a:ext cx="903175" cy="0"/>
           </a:xfrm>
           <a:prstGeom prst="line">
             <a:avLst/>
@@ -25454,8 +25454,8 @@
         </p:nvCxnSpPr>
         <p:spPr>
           <a:xfrm>
-            <a:off x="31708154" y="14012411"/>
-            <a:ext cx="508887" cy="0"/>
+            <a:off x="31312466" y="13967740"/>
+            <a:ext cx="508886" cy="0"/>
           </a:xfrm>
           <a:prstGeom prst="straightConnector1">
             <a:avLst/>
@@ -25499,8 +25499,8 @@
         </p:nvCxnSpPr>
         <p:spPr>
           <a:xfrm rot="10800000">
-            <a:off x="31708154" y="14189415"/>
-            <a:ext cx="508887" cy="0"/>
+            <a:off x="31312466" y="14144744"/>
+            <a:ext cx="508886" cy="0"/>
           </a:xfrm>
           <a:prstGeom prst="straightConnector1">
             <a:avLst/>
@@ -25545,7 +25545,7 @@
         </p:nvCxnSpPr>
         <p:spPr>
           <a:xfrm flipH="1" flipV="1">
-            <a:off x="29044472" y="14107581"/>
+            <a:off x="28648782" y="14062914"/>
             <a:ext cx="577846" cy="16033"/>
           </a:xfrm>
           <a:prstGeom prst="straightConnector1">
@@ -25587,8 +25587,8 @@
         </p:nvSpPr>
         <p:spPr>
           <a:xfrm>
-            <a:off x="32409725" y="13952786"/>
-            <a:ext cx="355689" cy="355689"/>
+            <a:off x="32014037" y="13908117"/>
+            <a:ext cx="355688" cy="355688"/>
           </a:xfrm>
           <a:prstGeom prst="ellipse">
             <a:avLst/>
@@ -25642,8 +25642,8 @@
         </p:nvSpPr>
         <p:spPr>
           <a:xfrm>
-            <a:off x="28678418" y="13952786"/>
-            <a:ext cx="355689" cy="355689"/>
+            <a:off x="28282730" y="13908117"/>
+            <a:ext cx="355688" cy="355688"/>
           </a:xfrm>
           <a:prstGeom prst="ellipse">
             <a:avLst/>
@@ -25692,8 +25692,8 @@
         </p:nvSpPr>
         <p:spPr>
           <a:xfrm>
-            <a:off x="27836047" y="13585322"/>
-            <a:ext cx="739298" cy="739298"/>
+            <a:off x="27440360" y="13540653"/>
+            <a:ext cx="739299" cy="739299"/>
           </a:xfrm>
           <a:prstGeom prst="ellipse">
             <a:avLst/>
@@ -25749,7 +25749,7 @@
         </p:nvCxnSpPr>
         <p:spPr>
           <a:xfrm>
-            <a:off x="27839848" y="12334451"/>
+            <a:off x="27444162" y="12289780"/>
             <a:ext cx="5601691" cy="0"/>
           </a:xfrm>
           <a:prstGeom prst="line">
@@ -25785,8 +25785,8 @@
         </p:nvSpPr>
         <p:spPr>
           <a:xfrm>
-            <a:off x="32409725" y="11962617"/>
-            <a:ext cx="355689" cy="355689"/>
+            <a:off x="32014037" y="11917948"/>
+            <a:ext cx="355688" cy="355688"/>
           </a:xfrm>
           <a:prstGeom prst="ellipse">
             <a:avLst/>
@@ -25840,8 +25840,8 @@
         </p:nvSpPr>
         <p:spPr>
           <a:xfrm>
-            <a:off x="28678418" y="11962617"/>
-            <a:ext cx="355689" cy="355689"/>
+            <a:off x="28282730" y="11917948"/>
+            <a:ext cx="355688" cy="355688"/>
           </a:xfrm>
           <a:prstGeom prst="ellipse">
             <a:avLst/>
@@ -25890,8 +25890,8 @@
         </p:nvSpPr>
         <p:spPr>
           <a:xfrm>
-            <a:off x="27836047" y="11595160"/>
-            <a:ext cx="739298" cy="739298"/>
+            <a:off x="27440360" y="11550492"/>
+            <a:ext cx="739299" cy="739299"/>
           </a:xfrm>
           <a:prstGeom prst="ellipse">
             <a:avLst/>
@@ -25947,7 +25947,7 @@
         </p:nvCxnSpPr>
         <p:spPr>
           <a:xfrm flipH="1">
-            <a:off x="29157089" y="12140454"/>
+            <a:off x="28761403" y="12095783"/>
             <a:ext cx="3143621" cy="0"/>
           </a:xfrm>
           <a:prstGeom prst="straightConnector1">
@@ -25988,7 +25988,7 @@
         </p:nvCxnSpPr>
         <p:spPr>
           <a:xfrm>
-            <a:off x="35400686" y="14322311"/>
+            <a:off x="35334496" y="14182403"/>
             <a:ext cx="5601691" cy="0"/>
           </a:xfrm>
           <a:prstGeom prst="line">
@@ -26024,8 +26024,8 @@
         </p:nvSpPr>
         <p:spPr>
           <a:xfrm>
-            <a:off x="37183158" y="13135466"/>
-            <a:ext cx="1786965" cy="985828"/>
+            <a:off x="37116969" y="12995561"/>
+            <a:ext cx="1786965" cy="985829"/>
           </a:xfrm>
           <a:custGeom>
             <a:avLst/>
@@ -26111,8 +26111,8 @@
         </p:nvCxnSpPr>
         <p:spPr>
           <a:xfrm>
-            <a:off x="38970115" y="14105260"/>
-            <a:ext cx="903176" cy="0"/>
+            <a:off x="38903927" y="13965353"/>
+            <a:ext cx="903175" cy="0"/>
           </a:xfrm>
           <a:prstGeom prst="line">
             <a:avLst/>
@@ -26154,8 +26154,8 @@
         </p:nvCxnSpPr>
         <p:spPr>
           <a:xfrm>
-            <a:off x="39268992" y="14010102"/>
-            <a:ext cx="508887" cy="0"/>
+            <a:off x="39202801" y="13870194"/>
+            <a:ext cx="508886" cy="0"/>
           </a:xfrm>
           <a:prstGeom prst="straightConnector1">
             <a:avLst/>
@@ -26199,8 +26199,8 @@
         </p:nvCxnSpPr>
         <p:spPr>
           <a:xfrm rot="10800000">
-            <a:off x="39268992" y="14187106"/>
-            <a:ext cx="508887" cy="0"/>
+            <a:off x="39202801" y="14047198"/>
+            <a:ext cx="508886" cy="0"/>
           </a:xfrm>
           <a:prstGeom prst="straightConnector1">
             <a:avLst/>
@@ -26245,7 +26245,7 @@
         </p:nvCxnSpPr>
         <p:spPr>
           <a:xfrm flipH="1" flipV="1">
-            <a:off x="36605310" y="14105272"/>
+            <a:off x="36539117" y="13965368"/>
             <a:ext cx="577846" cy="16033"/>
           </a:xfrm>
           <a:prstGeom prst="straightConnector1">
@@ -26287,8 +26287,8 @@
         </p:nvSpPr>
         <p:spPr>
           <a:xfrm>
-            <a:off x="39970563" y="13950477"/>
-            <a:ext cx="355689" cy="355689"/>
+            <a:off x="39904372" y="13810571"/>
+            <a:ext cx="355688" cy="355688"/>
           </a:xfrm>
           <a:prstGeom prst="ellipse">
             <a:avLst/>
@@ -26342,8 +26342,8 @@
         </p:nvSpPr>
         <p:spPr>
           <a:xfrm>
-            <a:off x="36239256" y="13950477"/>
-            <a:ext cx="355689" cy="355689"/>
+            <a:off x="36173065" y="13810571"/>
+            <a:ext cx="355688" cy="355688"/>
           </a:xfrm>
           <a:prstGeom prst="ellipse">
             <a:avLst/>
@@ -26392,8 +26392,8 @@
         </p:nvSpPr>
         <p:spPr>
           <a:xfrm>
-            <a:off x="35396885" y="13583013"/>
-            <a:ext cx="739298" cy="739298"/>
+            <a:off x="35330695" y="13443107"/>
+            <a:ext cx="739299" cy="739299"/>
           </a:xfrm>
           <a:prstGeom prst="ellipse">
             <a:avLst/>
@@ -26449,7 +26449,7 @@
         </p:nvCxnSpPr>
         <p:spPr>
           <a:xfrm>
-            <a:off x="35400686" y="12332142"/>
+            <a:off x="35343061" y="12325581"/>
             <a:ext cx="5601691" cy="0"/>
           </a:xfrm>
           <a:prstGeom prst="line">
@@ -26485,8 +26485,8 @@
         </p:nvSpPr>
         <p:spPr>
           <a:xfrm>
-            <a:off x="39970563" y="11960308"/>
-            <a:ext cx="355689" cy="355689"/>
+            <a:off x="39912937" y="11953749"/>
+            <a:ext cx="355688" cy="355688"/>
           </a:xfrm>
           <a:prstGeom prst="ellipse">
             <a:avLst/>
@@ -26540,8 +26540,8 @@
         </p:nvSpPr>
         <p:spPr>
           <a:xfrm>
-            <a:off x="36239256" y="11960308"/>
-            <a:ext cx="355689" cy="355689"/>
+            <a:off x="36181630" y="11953749"/>
+            <a:ext cx="355688" cy="355688"/>
           </a:xfrm>
           <a:prstGeom prst="ellipse">
             <a:avLst/>
@@ -26590,8 +26590,8 @@
         </p:nvSpPr>
         <p:spPr>
           <a:xfrm>
-            <a:off x="35396885" y="11592851"/>
-            <a:ext cx="739298" cy="739298"/>
+            <a:off x="35339259" y="11586293"/>
+            <a:ext cx="739299" cy="739299"/>
           </a:xfrm>
           <a:prstGeom prst="ellipse">
             <a:avLst/>
@@ -26647,7 +26647,7 @@
         </p:nvCxnSpPr>
         <p:spPr>
           <a:xfrm flipH="1">
-            <a:off x="36717927" y="12138145"/>
+            <a:off x="36660302" y="12131584"/>
             <a:ext cx="3143621" cy="0"/>
           </a:xfrm>
           <a:prstGeom prst="straightConnector1">
@@ -26688,7 +26688,7 @@
         </p:nvCxnSpPr>
         <p:spPr>
           <a:xfrm>
-            <a:off x="43380002" y="14406263"/>
+            <a:off x="42984315" y="14361591"/>
             <a:ext cx="5601691" cy="0"/>
           </a:xfrm>
           <a:prstGeom prst="line">
@@ -26724,8 +26724,8 @@
         </p:nvSpPr>
         <p:spPr>
           <a:xfrm>
-            <a:off x="45162474" y="13219418"/>
-            <a:ext cx="1786965" cy="985828"/>
+            <a:off x="44766788" y="13174749"/>
+            <a:ext cx="1786965" cy="985829"/>
           </a:xfrm>
           <a:custGeom>
             <a:avLst/>
@@ -26811,8 +26811,8 @@
         </p:nvCxnSpPr>
         <p:spPr>
           <a:xfrm>
-            <a:off x="46949431" y="14189212"/>
-            <a:ext cx="903176" cy="0"/>
+            <a:off x="46553745" y="14144541"/>
+            <a:ext cx="903175" cy="0"/>
           </a:xfrm>
           <a:prstGeom prst="line">
             <a:avLst/>
@@ -26854,8 +26854,8 @@
         </p:nvCxnSpPr>
         <p:spPr>
           <a:xfrm>
-            <a:off x="47248308" y="14094054"/>
-            <a:ext cx="508887" cy="0"/>
+            <a:off x="46852620" y="14049382"/>
+            <a:ext cx="508886" cy="0"/>
           </a:xfrm>
           <a:prstGeom prst="straightConnector1">
             <a:avLst/>
@@ -26899,8 +26899,8 @@
         </p:nvCxnSpPr>
         <p:spPr>
           <a:xfrm rot="10800000">
-            <a:off x="47248308" y="14271058"/>
-            <a:ext cx="508887" cy="0"/>
+            <a:off x="46852620" y="14226386"/>
+            <a:ext cx="508886" cy="0"/>
           </a:xfrm>
           <a:prstGeom prst="straightConnector1">
             <a:avLst/>
@@ -26945,7 +26945,7 @@
         </p:nvCxnSpPr>
         <p:spPr>
           <a:xfrm flipH="1" flipV="1">
-            <a:off x="44584626" y="14189224"/>
+            <a:off x="44188937" y="14144556"/>
             <a:ext cx="577846" cy="16033"/>
           </a:xfrm>
           <a:prstGeom prst="straightConnector1">
@@ -26987,8 +26987,8 @@
         </p:nvSpPr>
         <p:spPr>
           <a:xfrm>
-            <a:off x="47949879" y="14034429"/>
-            <a:ext cx="355689" cy="355689"/>
+            <a:off x="47554191" y="13989759"/>
+            <a:ext cx="355688" cy="355688"/>
           </a:xfrm>
           <a:prstGeom prst="ellipse">
             <a:avLst/>
@@ -27042,8 +27042,8 @@
         </p:nvSpPr>
         <p:spPr>
           <a:xfrm>
-            <a:off x="44218572" y="14034429"/>
-            <a:ext cx="355689" cy="355689"/>
+            <a:off x="43822884" y="13989759"/>
+            <a:ext cx="355688" cy="355688"/>
           </a:xfrm>
           <a:prstGeom prst="ellipse">
             <a:avLst/>
@@ -27092,8 +27092,8 @@
         </p:nvSpPr>
         <p:spPr>
           <a:xfrm>
-            <a:off x="43376201" y="13666965"/>
-            <a:ext cx="739298" cy="739298"/>
+            <a:off x="42980514" y="13622297"/>
+            <a:ext cx="739299" cy="739299"/>
           </a:xfrm>
           <a:prstGeom prst="ellipse">
             <a:avLst/>
@@ -27149,7 +27149,7 @@
         </p:nvCxnSpPr>
         <p:spPr>
           <a:xfrm>
-            <a:off x="43380002" y="12416094"/>
+            <a:off x="42984315" y="12371422"/>
             <a:ext cx="5601691" cy="0"/>
           </a:xfrm>
           <a:prstGeom prst="line">
@@ -27185,8 +27185,8 @@
         </p:nvSpPr>
         <p:spPr>
           <a:xfrm>
-            <a:off x="47949879" y="12044260"/>
-            <a:ext cx="355689" cy="355689"/>
+            <a:off x="47554191" y="11999591"/>
+            <a:ext cx="355688" cy="355688"/>
           </a:xfrm>
           <a:prstGeom prst="ellipse">
             <a:avLst/>
@@ -27240,8 +27240,8 @@
         </p:nvSpPr>
         <p:spPr>
           <a:xfrm>
-            <a:off x="44218572" y="12044260"/>
-            <a:ext cx="355689" cy="355689"/>
+            <a:off x="43822884" y="11999591"/>
+            <a:ext cx="355688" cy="355688"/>
           </a:xfrm>
           <a:prstGeom prst="ellipse">
             <a:avLst/>
@@ -27290,8 +27290,8 @@
         </p:nvSpPr>
         <p:spPr>
           <a:xfrm>
-            <a:off x="43376201" y="11676803"/>
-            <a:ext cx="739298" cy="739298"/>
+            <a:off x="42980514" y="11632134"/>
+            <a:ext cx="739299" cy="739299"/>
           </a:xfrm>
           <a:prstGeom prst="ellipse">
             <a:avLst/>
@@ -27347,7 +27347,7 @@
         </p:nvCxnSpPr>
         <p:spPr>
           <a:xfrm flipH="1">
-            <a:off x="44697243" y="12222097"/>
+            <a:off x="44301557" y="12177427"/>
             <a:ext cx="3143621" cy="0"/>
           </a:xfrm>
           <a:prstGeom prst="straightConnector1">
@@ -27386,8 +27386,8 @@
         </p:nvSpPr>
         <p:spPr>
           <a:xfrm>
-            <a:off x="5559916" y="193925"/>
-            <a:ext cx="11620682" cy="1631216"/>
+            <a:off x="5559918" y="53769"/>
+            <a:ext cx="11620681" cy="1631216"/>
           </a:xfrm>
           <a:prstGeom prst="rect">
             <a:avLst/>
@@ -27425,8 +27425,8 @@
         </p:nvSpPr>
         <p:spPr>
           <a:xfrm>
-            <a:off x="33641669" y="198511"/>
-            <a:ext cx="11620682" cy="1631216"/>
+            <a:off x="33641672" y="58355"/>
+            <a:ext cx="11620681" cy="1631216"/>
           </a:xfrm>
           <a:prstGeom prst="rect">
             <a:avLst/>
@@ -27464,7 +27464,7 @@
         </p:nvSpPr>
         <p:spPr>
           <a:xfrm>
-            <a:off x="2035652" y="1924493"/>
+            <a:off x="2035655" y="1784341"/>
             <a:ext cx="17360031" cy="1323439"/>
           </a:xfrm>
           <a:prstGeom prst="rect">
@@ -27503,8 +27503,8 @@
         </p:nvSpPr>
         <p:spPr>
           <a:xfrm>
-            <a:off x="25199975" y="1861479"/>
-            <a:ext cx="27309572" cy="1323439"/>
+            <a:off x="25199977" y="1721327"/>
+            <a:ext cx="27309573" cy="1323439"/>
           </a:xfrm>
           <a:prstGeom prst="rect">
             <a:avLst/>
@@ -27542,7 +27542,7 @@
         </p:nvSpPr>
         <p:spPr>
           <a:xfrm>
-            <a:off x="291755" y="3671915"/>
+            <a:off x="291754" y="3466449"/>
             <a:ext cx="7145098" cy="1169551"/>
           </a:xfrm>
           <a:prstGeom prst="rect">
@@ -27580,7 +27580,7 @@
         </p:nvSpPr>
         <p:spPr>
           <a:xfrm>
-            <a:off x="7544795" y="3654026"/>
+            <a:off x="7544795" y="3448560"/>
             <a:ext cx="8041176" cy="1169551"/>
           </a:xfrm>
           <a:prstGeom prst="rect">
@@ -27618,7 +27618,7 @@
         </p:nvSpPr>
         <p:spPr>
           <a:xfrm>
-            <a:off x="15669619" y="3685820"/>
+            <a:off x="15669619" y="3480355"/>
             <a:ext cx="8041176" cy="1169551"/>
           </a:xfrm>
           <a:prstGeom prst="rect">
@@ -27642,222 +27642,6 @@
           </a:p>
         </p:txBody>
       </p:sp>
-      <p:pic>
-        <p:nvPicPr>
-          <p:cNvPr id="1182" name="Picture 1181">
-            <a:extLst>
-              <a:ext uri="{FF2B5EF4-FFF2-40B4-BE49-F238E27FC236}">
-                <a16:creationId xmlns:a16="http://schemas.microsoft.com/office/drawing/2014/main" id="{0ECFD803-77BF-7D80-0BF4-488DAAB2D9D6}"/>
-              </a:ext>
-            </a:extLst>
-          </p:cNvPr>
-          <p:cNvPicPr>
-            <a:picLocks noChangeAspect="1"/>
-          </p:cNvPicPr>
-          <p:nvPr/>
-        </p:nvPicPr>
-        <p:blipFill>
-          <a:blip r:embed="rId5">
-            <a:extLst>
-              <a:ext uri="{28A0092B-C50C-407E-A947-70E740481C1C}">
-                <a14:useLocalDpi xmlns:a14="http://schemas.microsoft.com/office/drawing/2010/main" val="0"/>
-              </a:ext>
-            </a:extLst>
-          </a:blip>
-          <a:stretch>
-            <a:fillRect/>
-          </a:stretch>
-        </p:blipFill>
-        <p:spPr>
-          <a:xfrm>
-            <a:off x="283408" y="15617511"/>
-            <a:ext cx="7323120" cy="5230799"/>
-          </a:xfrm>
-          <a:prstGeom prst="rect">
-            <a:avLst/>
-          </a:prstGeom>
-        </p:spPr>
-      </p:pic>
-      <p:pic>
-        <p:nvPicPr>
-          <p:cNvPr id="1184" name="Picture 1183">
-            <a:extLst>
-              <a:ext uri="{FF2B5EF4-FFF2-40B4-BE49-F238E27FC236}">
-                <a16:creationId xmlns:a16="http://schemas.microsoft.com/office/drawing/2014/main" id="{E9DCAD89-0EC6-4EB7-F3AC-5BC6E6D106BD}"/>
-              </a:ext>
-            </a:extLst>
-          </p:cNvPr>
-          <p:cNvPicPr>
-            <a:picLocks noChangeAspect="1"/>
-          </p:cNvPicPr>
-          <p:nvPr/>
-        </p:nvPicPr>
-        <p:blipFill>
-          <a:blip r:embed="rId6">
-            <a:extLst>
-              <a:ext uri="{28A0092B-C50C-407E-A947-70E740481C1C}">
-                <a14:useLocalDpi xmlns:a14="http://schemas.microsoft.com/office/drawing/2010/main" val="0"/>
-              </a:ext>
-            </a:extLst>
-          </a:blip>
-          <a:stretch>
-            <a:fillRect/>
-          </a:stretch>
-        </p:blipFill>
-        <p:spPr>
-          <a:xfrm>
-            <a:off x="8252556" y="15587299"/>
-            <a:ext cx="7323120" cy="5230799"/>
-          </a:xfrm>
-          <a:prstGeom prst="rect">
-            <a:avLst/>
-          </a:prstGeom>
-        </p:spPr>
-      </p:pic>
-      <p:pic>
-        <p:nvPicPr>
-          <p:cNvPr id="1186" name="Picture 1185">
-            <a:extLst>
-              <a:ext uri="{FF2B5EF4-FFF2-40B4-BE49-F238E27FC236}">
-                <a16:creationId xmlns:a16="http://schemas.microsoft.com/office/drawing/2014/main" id="{A46B4BC2-7F39-CF68-5803-8DCCE53F76B0}"/>
-              </a:ext>
-            </a:extLst>
-          </p:cNvPr>
-          <p:cNvPicPr>
-            <a:picLocks noChangeAspect="1"/>
-          </p:cNvPicPr>
-          <p:nvPr/>
-        </p:nvPicPr>
-        <p:blipFill>
-          <a:blip r:embed="rId7">
-            <a:extLst>
-              <a:ext uri="{28A0092B-C50C-407E-A947-70E740481C1C}">
-                <a14:useLocalDpi xmlns:a14="http://schemas.microsoft.com/office/drawing/2010/main" val="0"/>
-              </a:ext>
-            </a:extLst>
-          </a:blip>
-          <a:stretch>
-            <a:fillRect/>
-          </a:stretch>
-        </p:blipFill>
-        <p:spPr>
-          <a:xfrm>
-            <a:off x="16639901" y="15634573"/>
-            <a:ext cx="7323120" cy="5230799"/>
-          </a:xfrm>
-          <a:prstGeom prst="rect">
-            <a:avLst/>
-          </a:prstGeom>
-        </p:spPr>
-      </p:pic>
-      <p:pic>
-        <p:nvPicPr>
-          <p:cNvPr id="1188" name="Picture 1187">
-            <a:extLst>
-              <a:ext uri="{FF2B5EF4-FFF2-40B4-BE49-F238E27FC236}">
-                <a16:creationId xmlns:a16="http://schemas.microsoft.com/office/drawing/2014/main" id="{6900667C-DE99-7315-33F8-5C5D7E8606AA}"/>
-              </a:ext>
-            </a:extLst>
-          </p:cNvPr>
-          <p:cNvPicPr>
-            <a:picLocks noChangeAspect="1"/>
-          </p:cNvPicPr>
-          <p:nvPr/>
-        </p:nvPicPr>
-        <p:blipFill>
-          <a:blip r:embed="rId8">
-            <a:extLst>
-              <a:ext uri="{28A0092B-C50C-407E-A947-70E740481C1C}">
-                <a14:useLocalDpi xmlns:a14="http://schemas.microsoft.com/office/drawing/2010/main" val="0"/>
-              </a:ext>
-            </a:extLst>
-          </a:blip>
-          <a:stretch>
-            <a:fillRect/>
-          </a:stretch>
-        </p:blipFill>
-        <p:spPr>
-          <a:xfrm>
-            <a:off x="26782408" y="15636931"/>
-            <a:ext cx="7323120" cy="5230799"/>
-          </a:xfrm>
-          <a:prstGeom prst="rect">
-            <a:avLst/>
-          </a:prstGeom>
-        </p:spPr>
-      </p:pic>
-      <p:pic>
-        <p:nvPicPr>
-          <p:cNvPr id="1190" name="Picture 1189">
-            <a:extLst>
-              <a:ext uri="{FF2B5EF4-FFF2-40B4-BE49-F238E27FC236}">
-                <a16:creationId xmlns:a16="http://schemas.microsoft.com/office/drawing/2014/main" id="{239FBBE1-2875-71EC-C723-3720DD2BDBBB}"/>
-              </a:ext>
-            </a:extLst>
-          </p:cNvPr>
-          <p:cNvPicPr>
-            <a:picLocks noChangeAspect="1"/>
-          </p:cNvPicPr>
-          <p:nvPr/>
-        </p:nvPicPr>
-        <p:blipFill>
-          <a:blip r:embed="rId9">
-            <a:extLst>
-              <a:ext uri="{28A0092B-C50C-407E-A947-70E740481C1C}">
-                <a14:useLocalDpi xmlns:a14="http://schemas.microsoft.com/office/drawing/2010/main" val="0"/>
-              </a:ext>
-            </a:extLst>
-          </a:blip>
-          <a:stretch>
-            <a:fillRect/>
-          </a:stretch>
-        </p:blipFill>
-        <p:spPr>
-          <a:xfrm>
-            <a:off x="34859609" y="15636931"/>
-            <a:ext cx="7323120" cy="5230799"/>
-          </a:xfrm>
-          <a:prstGeom prst="rect">
-            <a:avLst/>
-          </a:prstGeom>
-        </p:spPr>
-      </p:pic>
-      <p:pic>
-        <p:nvPicPr>
-          <p:cNvPr id="1192" name="Picture 1191">
-            <a:extLst>
-              <a:ext uri="{FF2B5EF4-FFF2-40B4-BE49-F238E27FC236}">
-                <a16:creationId xmlns:a16="http://schemas.microsoft.com/office/drawing/2014/main" id="{496EB742-42DA-991F-7778-EFA9E19B4BCB}"/>
-              </a:ext>
-            </a:extLst>
-          </p:cNvPr>
-          <p:cNvPicPr>
-            <a:picLocks noChangeAspect="1"/>
-          </p:cNvPicPr>
-          <p:nvPr/>
-        </p:nvPicPr>
-        <p:blipFill>
-          <a:blip r:embed="rId10">
-            <a:extLst>
-              <a:ext uri="{28A0092B-C50C-407E-A947-70E740481C1C}">
-                <a14:useLocalDpi xmlns:a14="http://schemas.microsoft.com/office/drawing/2010/main" val="0"/>
-              </a:ext>
-            </a:extLst>
-          </a:blip>
-          <a:stretch>
-            <a:fillRect/>
-          </a:stretch>
-        </p:blipFill>
-        <p:spPr>
-          <a:xfrm>
-            <a:off x="42670108" y="15636929"/>
-            <a:ext cx="7323120" cy="5230799"/>
-          </a:xfrm>
-          <a:prstGeom prst="rect">
-            <a:avLst/>
-          </a:prstGeom>
-        </p:spPr>
-      </p:pic>
       <p:sp>
         <p:nvSpPr>
           <p:cNvPr id="1200" name="TextBox 1199">
@@ -27872,7 +27656,7 @@
         </p:nvSpPr>
         <p:spPr>
           <a:xfrm>
-            <a:off x="2348841" y="4858012"/>
+            <a:off x="2348844" y="4652543"/>
             <a:ext cx="3494867" cy="861774"/>
           </a:xfrm>
           <a:prstGeom prst="rect">
@@ -27910,7 +27694,7 @@
         </p:nvSpPr>
         <p:spPr>
           <a:xfrm>
-            <a:off x="9696136" y="4866034"/>
+            <a:off x="9696139" y="4660565"/>
             <a:ext cx="3494867" cy="861774"/>
           </a:xfrm>
           <a:prstGeom prst="rect">
@@ -27948,7 +27732,7 @@
         </p:nvSpPr>
         <p:spPr>
           <a:xfrm>
-            <a:off x="17404370" y="4946245"/>
+            <a:off x="17404373" y="4740776"/>
             <a:ext cx="3494867" cy="861774"/>
           </a:xfrm>
           <a:prstGeom prst="rect">
@@ -27986,7 +27770,7 @@
         </p:nvSpPr>
         <p:spPr>
           <a:xfrm>
-            <a:off x="3487828" y="9871170"/>
+            <a:off x="3487827" y="9665701"/>
             <a:ext cx="1302408" cy="861774"/>
           </a:xfrm>
           <a:prstGeom prst="rect">
@@ -28024,7 +27808,7 @@
         </p:nvSpPr>
         <p:spPr>
           <a:xfrm>
-            <a:off x="10618557" y="9879192"/>
+            <a:off x="10618557" y="9673722"/>
             <a:ext cx="1302408" cy="861774"/>
           </a:xfrm>
           <a:prstGeom prst="rect">
@@ -28062,7 +27846,7 @@
         </p:nvSpPr>
         <p:spPr>
           <a:xfrm>
-            <a:off x="18350854" y="9959403"/>
+            <a:off x="18350853" y="9753933"/>
             <a:ext cx="1302408" cy="861774"/>
           </a:xfrm>
           <a:prstGeom prst="rect">
@@ -28100,7 +27884,7 @@
         </p:nvSpPr>
         <p:spPr>
           <a:xfrm>
-            <a:off x="28859296" y="6902860"/>
+            <a:off x="28463610" y="6858189"/>
             <a:ext cx="3494867" cy="861774"/>
           </a:xfrm>
           <a:prstGeom prst="rect">
@@ -28138,7 +27922,7 @@
         </p:nvSpPr>
         <p:spPr>
           <a:xfrm>
-            <a:off x="36567530" y="6859246"/>
+            <a:off x="36171843" y="6814576"/>
             <a:ext cx="3494867" cy="861774"/>
           </a:xfrm>
           <a:prstGeom prst="rect">
@@ -28176,7 +27960,7 @@
         </p:nvSpPr>
         <p:spPr>
           <a:xfrm>
-            <a:off x="44339929" y="6867268"/>
+            <a:off x="43944242" y="6822598"/>
             <a:ext cx="3494867" cy="861774"/>
           </a:xfrm>
           <a:prstGeom prst="rect">
@@ -28214,7 +27998,7 @@
         </p:nvSpPr>
         <p:spPr>
           <a:xfrm>
-            <a:off x="30061604" y="10937967"/>
+            <a:off x="29665915" y="10893296"/>
             <a:ext cx="1302408" cy="861774"/>
           </a:xfrm>
           <a:prstGeom prst="rect">
@@ -28252,7 +28036,7 @@
         </p:nvSpPr>
         <p:spPr>
           <a:xfrm>
-            <a:off x="37842034" y="10945989"/>
+            <a:off x="37511659" y="10901317"/>
             <a:ext cx="1302408" cy="861774"/>
           </a:xfrm>
           <a:prstGeom prst="rect">
@@ -28290,7 +28074,7 @@
         </p:nvSpPr>
         <p:spPr>
           <a:xfrm>
-            <a:off x="45478079" y="11026200"/>
+            <a:off x="45082390" y="10981528"/>
             <a:ext cx="1302408" cy="861774"/>
           </a:xfrm>
           <a:prstGeom prst="rect">
@@ -28328,7 +28112,7 @@
         </p:nvSpPr>
         <p:spPr>
           <a:xfrm>
-            <a:off x="28839385" y="4800076"/>
+            <a:off x="28443696" y="4755405"/>
             <a:ext cx="3764172" cy="861774"/>
           </a:xfrm>
           <a:prstGeom prst="rect">
@@ -28366,7 +28150,7 @@
         </p:nvSpPr>
         <p:spPr>
           <a:xfrm>
-            <a:off x="36468910" y="4800076"/>
+            <a:off x="36073221" y="4755405"/>
             <a:ext cx="3764172" cy="861774"/>
           </a:xfrm>
           <a:prstGeom prst="rect">
@@ -28418,8 +28202,8 @@
         </p:blipFill>
         <p:spPr>
           <a:xfrm>
-            <a:off x="45187970" y="5475535"/>
-            <a:ext cx="1563058" cy="1563058"/>
+            <a:off x="45187972" y="5335381"/>
+            <a:ext cx="1563059" cy="1563059"/>
           </a:xfrm>
           <a:prstGeom prst="rect">
             <a:avLst/>
@@ -28440,7 +28224,7 @@
         </p:nvSpPr>
         <p:spPr>
           <a:xfrm>
-            <a:off x="44249342" y="4808096"/>
+            <a:off x="43853653" y="4763426"/>
             <a:ext cx="3764172" cy="861774"/>
           </a:xfrm>
           <a:prstGeom prst="rect">
@@ -28478,7 +28262,7 @@
         </p:nvSpPr>
         <p:spPr>
           <a:xfrm>
-            <a:off x="26831091" y="3671918"/>
+            <a:off x="26831093" y="3466453"/>
             <a:ext cx="7145098" cy="1169551"/>
           </a:xfrm>
           <a:prstGeom prst="rect">
@@ -28516,7 +28300,7 @@
         </p:nvSpPr>
         <p:spPr>
           <a:xfrm>
-            <a:off x="34342227" y="3671921"/>
+            <a:off x="34342228" y="3466456"/>
             <a:ext cx="7145098" cy="1169551"/>
           </a:xfrm>
           <a:prstGeom prst="rect">
@@ -28554,7 +28338,7 @@
         </p:nvSpPr>
         <p:spPr>
           <a:xfrm>
-            <a:off x="42056558" y="3707594"/>
+            <a:off x="42056559" y="3502127"/>
             <a:ext cx="8041176" cy="1169551"/>
           </a:xfrm>
           <a:prstGeom prst="rect">
@@ -28592,13 +28376,13 @@
         </p:nvCxnSpPr>
         <p:spPr>
           <a:xfrm>
-            <a:off x="34286742" y="4893287"/>
+            <a:off x="33850109" y="4717990"/>
             <a:ext cx="0" cy="10205209"/>
           </a:xfrm>
           <a:prstGeom prst="line">
             <a:avLst/>
           </a:prstGeom>
-          <a:ln w="38100">
+          <a:ln w="57150">
             <a:solidFill>
               <a:schemeClr val="tx1"/>
             </a:solidFill>
@@ -28622,10 +28406,10 @@
       </p:cxnSp>
       <p:cxnSp>
         <p:nvCxnSpPr>
-          <p:cNvPr id="38" name="Straight Connector 37">
-            <a:extLst>
-              <a:ext uri="{FF2B5EF4-FFF2-40B4-BE49-F238E27FC236}">
-                <a16:creationId xmlns:a16="http://schemas.microsoft.com/office/drawing/2014/main" id="{D18D741A-27B3-AA9A-3934-4452AE8144A7}"/>
+          <p:cNvPr id="3" name="Straight Connector 2">
+            <a:extLst>
+              <a:ext uri="{FF2B5EF4-FFF2-40B4-BE49-F238E27FC236}">
+                <a16:creationId xmlns:a16="http://schemas.microsoft.com/office/drawing/2014/main" id="{542C9D8E-7E6F-0155-3302-4820D0CEF41B}"/>
               </a:ext>
             </a:extLst>
           </p:cNvPr>
@@ -28634,13 +28418,13 @@
         </p:nvCxnSpPr>
         <p:spPr>
           <a:xfrm>
-            <a:off x="42197160" y="4917351"/>
+            <a:off x="41778138" y="4717990"/>
             <a:ext cx="0" cy="10205209"/>
           </a:xfrm>
           <a:prstGeom prst="line">
             <a:avLst/>
           </a:prstGeom>
-          <a:ln w="38100">
+          <a:ln w="57150">
             <a:solidFill>
               <a:schemeClr val="tx1"/>
             </a:solidFill>
@@ -28664,10 +28448,10 @@
       </p:cxnSp>
       <p:cxnSp>
         <p:nvCxnSpPr>
-          <p:cNvPr id="40" name="Straight Connector 39">
-            <a:extLst>
-              <a:ext uri="{FF2B5EF4-FFF2-40B4-BE49-F238E27FC236}">
-                <a16:creationId xmlns:a16="http://schemas.microsoft.com/office/drawing/2014/main" id="{EA952EC0-967F-5DE5-07B9-D1262C559D5F}"/>
+          <p:cNvPr id="5" name="Straight Connector 4">
+            <a:extLst>
+              <a:ext uri="{FF2B5EF4-FFF2-40B4-BE49-F238E27FC236}">
+                <a16:creationId xmlns:a16="http://schemas.microsoft.com/office/drawing/2014/main" id="{C34AF17F-6E8B-B5E9-B62A-28827F3046B7}"/>
               </a:ext>
             </a:extLst>
           </p:cNvPr>
@@ -28676,13 +28460,13 @@
         </p:nvCxnSpPr>
         <p:spPr>
           <a:xfrm>
-            <a:off x="15601243" y="4893287"/>
+            <a:off x="15566765" y="4687820"/>
             <a:ext cx="0" cy="10205209"/>
           </a:xfrm>
           <a:prstGeom prst="line">
             <a:avLst/>
           </a:prstGeom>
-          <a:ln w="38100">
+          <a:ln w="57150">
             <a:solidFill>
               <a:schemeClr val="tx1"/>
             </a:solidFill>
@@ -28706,10 +28490,10 @@
       </p:cxnSp>
       <p:cxnSp>
         <p:nvCxnSpPr>
-          <p:cNvPr id="41" name="Straight Connector 40">
-            <a:extLst>
-              <a:ext uri="{FF2B5EF4-FFF2-40B4-BE49-F238E27FC236}">
-                <a16:creationId xmlns:a16="http://schemas.microsoft.com/office/drawing/2014/main" id="{9BDC8EFB-193B-B8B0-7089-3A28695980BF}"/>
+          <p:cNvPr id="8" name="Straight Connector 7">
+            <a:extLst>
+              <a:ext uri="{FF2B5EF4-FFF2-40B4-BE49-F238E27FC236}">
+                <a16:creationId xmlns:a16="http://schemas.microsoft.com/office/drawing/2014/main" id="{2FFFFAE2-AEFD-D55D-BABC-3A8CDE259B2A}"/>
               </a:ext>
             </a:extLst>
           </p:cNvPr>
@@ -28718,13 +28502,13 @@
         </p:nvCxnSpPr>
         <p:spPr>
           <a:xfrm>
-            <a:off x="7704937" y="4853183"/>
+            <a:off x="7640615" y="4687820"/>
             <a:ext cx="0" cy="10205209"/>
           </a:xfrm>
           <a:prstGeom prst="line">
             <a:avLst/>
           </a:prstGeom>
-          <a:ln w="38100">
+          <a:ln w="57150">
             <a:solidFill>
               <a:schemeClr val="tx1"/>
             </a:solidFill>
